--- a/docs/plots/carbo/jx_carbo_linsubhr_egfrdisc_death.pptx
+++ b/docs/plots/carbo/jx_carbo_linsubhr_egfrdisc_death.pptx
@@ -3002,384 +3002,456 @@
           </p:nvSpPr>
           <p:spPr>
             <a:xfrm>
-              <a:off x="2717926" y="2073503"/>
-              <a:ext cx="5544753" cy="3450064"/>
+              <a:off x="1172049" y="2073503"/>
+              <a:ext cx="7090630" cy="3433771"/>
             </a:xfrm>
             <a:custGeom>
               <a:avLst/>
               <a:pathLst>
-                <a:path w="5544753" h="3450064">
+                <a:path w="7090630" h="3433771">
                   <a:moveTo>
-                    <a:pt x="2373227" y="0"/>
+                    <a:pt x="3781059" y="0"/>
                   </a:moveTo>
                   <a:lnTo>
-                    <a:pt x="2393362" y="104880"/>
-                  </a:lnTo>
-                  <a:lnTo>
-                    <a:pt x="2464984" y="440862"/>
-                  </a:lnTo>
-                  <a:lnTo>
-                    <a:pt x="2536607" y="743435"/>
-                  </a:lnTo>
-                  <a:lnTo>
-                    <a:pt x="2608229" y="1015922"/>
-                  </a:lnTo>
-                  <a:lnTo>
-                    <a:pt x="2679852" y="1261313"/>
-                  </a:lnTo>
-                  <a:lnTo>
-                    <a:pt x="2751474" y="1482304"/>
-                  </a:lnTo>
-                  <a:lnTo>
-                    <a:pt x="2823097" y="1681320"/>
-                  </a:lnTo>
-                  <a:lnTo>
-                    <a:pt x="2894719" y="1860547"/>
-                  </a:lnTo>
-                  <a:lnTo>
-                    <a:pt x="2966342" y="2021952"/>
-                  </a:lnTo>
-                  <a:lnTo>
-                    <a:pt x="3037964" y="2167307"/>
-                  </a:lnTo>
-                  <a:lnTo>
-                    <a:pt x="3109587" y="2298209"/>
-                  </a:lnTo>
-                  <a:lnTo>
-                    <a:pt x="3181209" y="2416095"/>
-                  </a:lnTo>
-                  <a:lnTo>
-                    <a:pt x="3252832" y="2522258"/>
-                  </a:lnTo>
-                  <a:lnTo>
-                    <a:pt x="3324455" y="2617865"/>
-                  </a:lnTo>
-                  <a:lnTo>
-                    <a:pt x="3396077" y="2669138"/>
-                  </a:lnTo>
-                  <a:lnTo>
-                    <a:pt x="3467700" y="2693723"/>
-                  </a:lnTo>
-                  <a:lnTo>
-                    <a:pt x="3539322" y="2717565"/>
-                  </a:lnTo>
-                  <a:lnTo>
-                    <a:pt x="3610945" y="2740688"/>
-                  </a:lnTo>
-                  <a:lnTo>
-                    <a:pt x="3682567" y="2763114"/>
-                  </a:lnTo>
-                  <a:lnTo>
-                    <a:pt x="3754190" y="2784862"/>
-                  </a:lnTo>
-                  <a:lnTo>
-                    <a:pt x="3825812" y="2805954"/>
-                  </a:lnTo>
-                  <a:lnTo>
-                    <a:pt x="3897435" y="2826409"/>
-                  </a:lnTo>
-                  <a:lnTo>
-                    <a:pt x="3969057" y="2846248"/>
-                  </a:lnTo>
-                  <a:lnTo>
-                    <a:pt x="4040680" y="2865487"/>
-                  </a:lnTo>
-                  <a:lnTo>
-                    <a:pt x="4112302" y="2884146"/>
-                  </a:lnTo>
-                  <a:lnTo>
-                    <a:pt x="4183925" y="2902241"/>
-                  </a:lnTo>
-                  <a:lnTo>
-                    <a:pt x="4255547" y="2919791"/>
-                  </a:lnTo>
-                  <a:lnTo>
-                    <a:pt x="4327170" y="2936811"/>
-                  </a:lnTo>
-                  <a:lnTo>
-                    <a:pt x="4398792" y="2953317"/>
-                  </a:lnTo>
-                  <a:lnTo>
-                    <a:pt x="4470415" y="2969325"/>
-                  </a:lnTo>
-                  <a:lnTo>
-                    <a:pt x="4542037" y="2984850"/>
-                  </a:lnTo>
-                  <a:lnTo>
-                    <a:pt x="4613660" y="2999907"/>
-                  </a:lnTo>
-                  <a:lnTo>
-                    <a:pt x="4685283" y="3014509"/>
-                  </a:lnTo>
-                  <a:lnTo>
-                    <a:pt x="4756905" y="3028670"/>
-                  </a:lnTo>
-                  <a:lnTo>
-                    <a:pt x="4828528" y="3042404"/>
-                  </a:lnTo>
-                  <a:lnTo>
-                    <a:pt x="4900150" y="3055724"/>
-                  </a:lnTo>
-                  <a:lnTo>
-                    <a:pt x="4971773" y="3068641"/>
-                  </a:lnTo>
-                  <a:lnTo>
-                    <a:pt x="5043395" y="3081169"/>
-                  </a:lnTo>
-                  <a:lnTo>
-                    <a:pt x="5115018" y="3093319"/>
-                  </a:lnTo>
-                  <a:lnTo>
-                    <a:pt x="5186640" y="3105102"/>
-                  </a:lnTo>
-                  <a:lnTo>
-                    <a:pt x="5258263" y="3116529"/>
-                  </a:lnTo>
-                  <a:lnTo>
-                    <a:pt x="5329885" y="3127611"/>
-                  </a:lnTo>
-                  <a:lnTo>
-                    <a:pt x="5401508" y="3138359"/>
-                  </a:lnTo>
-                  <a:lnTo>
-                    <a:pt x="5473130" y="3148783"/>
-                  </a:lnTo>
-                  <a:lnTo>
-                    <a:pt x="5544753" y="3158892"/>
-                  </a:lnTo>
-                  <a:lnTo>
-                    <a:pt x="5544753" y="3450064"/>
-                  </a:lnTo>
-                  <a:lnTo>
-                    <a:pt x="5473130" y="3446345"/>
-                  </a:lnTo>
-                  <a:lnTo>
-                    <a:pt x="5401508" y="3442215"/>
-                  </a:lnTo>
-                  <a:lnTo>
-                    <a:pt x="5329885" y="3437629"/>
-                  </a:lnTo>
-                  <a:lnTo>
-                    <a:pt x="5258263" y="3432537"/>
-                  </a:lnTo>
-                  <a:lnTo>
-                    <a:pt x="5186640" y="3426883"/>
-                  </a:lnTo>
-                  <a:lnTo>
-                    <a:pt x="5115018" y="3420604"/>
-                  </a:lnTo>
-                  <a:lnTo>
-                    <a:pt x="5043395" y="3413632"/>
-                  </a:lnTo>
-                  <a:lnTo>
-                    <a:pt x="4971773" y="3405891"/>
-                  </a:lnTo>
-                  <a:lnTo>
-                    <a:pt x="4900150" y="3397294"/>
-                  </a:lnTo>
-                  <a:lnTo>
-                    <a:pt x="4828528" y="3387749"/>
-                  </a:lnTo>
-                  <a:lnTo>
-                    <a:pt x="4756905" y="3377149"/>
-                  </a:lnTo>
-                  <a:lnTo>
-                    <a:pt x="4685283" y="3365379"/>
-                  </a:lnTo>
-                  <a:lnTo>
-                    <a:pt x="4613660" y="3352309"/>
-                  </a:lnTo>
-                  <a:lnTo>
-                    <a:pt x="4542037" y="3337797"/>
-                  </a:lnTo>
-                  <a:lnTo>
-                    <a:pt x="4470415" y="3321681"/>
-                  </a:lnTo>
-                  <a:lnTo>
-                    <a:pt x="4398792" y="3303787"/>
-                  </a:lnTo>
-                  <a:lnTo>
-                    <a:pt x="4327170" y="3283917"/>
-                  </a:lnTo>
-                  <a:lnTo>
-                    <a:pt x="4255547" y="3261852"/>
-                  </a:lnTo>
-                  <a:lnTo>
-                    <a:pt x="4183925" y="3237352"/>
-                  </a:lnTo>
-                  <a:lnTo>
-                    <a:pt x="4112302" y="3210146"/>
-                  </a:lnTo>
-                  <a:lnTo>
-                    <a:pt x="4040680" y="3179936"/>
-                  </a:lnTo>
-                  <a:lnTo>
-                    <a:pt x="3969057" y="3146391"/>
-                  </a:lnTo>
-                  <a:lnTo>
-                    <a:pt x="3897435" y="3109141"/>
-                  </a:lnTo>
-                  <a:lnTo>
-                    <a:pt x="3825812" y="3067779"/>
-                  </a:lnTo>
-                  <a:lnTo>
-                    <a:pt x="3754190" y="3021850"/>
-                  </a:lnTo>
-                  <a:lnTo>
-                    <a:pt x="3682567" y="2970849"/>
-                  </a:lnTo>
-                  <a:lnTo>
-                    <a:pt x="3610945" y="2914217"/>
-                  </a:lnTo>
-                  <a:lnTo>
-                    <a:pt x="3539322" y="2851332"/>
-                  </a:lnTo>
-                  <a:lnTo>
-                    <a:pt x="3467700" y="2781504"/>
-                  </a:lnTo>
-                  <a:lnTo>
-                    <a:pt x="3396077" y="2703965"/>
-                  </a:lnTo>
-                  <a:lnTo>
-                    <a:pt x="3324455" y="2643789"/>
-                  </a:lnTo>
-                  <a:lnTo>
-                    <a:pt x="3252832" y="2617650"/>
-                  </a:lnTo>
-                  <a:lnTo>
-                    <a:pt x="3181209" y="2590699"/>
-                  </a:lnTo>
-                  <a:lnTo>
-                    <a:pt x="3109587" y="2562908"/>
-                  </a:lnTo>
-                  <a:lnTo>
-                    <a:pt x="3037964" y="2534253"/>
-                  </a:lnTo>
-                  <a:lnTo>
-                    <a:pt x="2966342" y="2504706"/>
-                  </a:lnTo>
-                  <a:lnTo>
-                    <a:pt x="2894719" y="2474239"/>
-                  </a:lnTo>
-                  <a:lnTo>
-                    <a:pt x="2823097" y="2442825"/>
-                  </a:lnTo>
-                  <a:lnTo>
-                    <a:pt x="2751474" y="2410433"/>
-                  </a:lnTo>
-                  <a:lnTo>
-                    <a:pt x="2679852" y="2377032"/>
-                  </a:lnTo>
-                  <a:lnTo>
-                    <a:pt x="2608229" y="2342593"/>
-                  </a:lnTo>
-                  <a:lnTo>
-                    <a:pt x="2536607" y="2307082"/>
-                  </a:lnTo>
-                  <a:lnTo>
-                    <a:pt x="2464984" y="2270465"/>
-                  </a:lnTo>
-                  <a:lnTo>
-                    <a:pt x="2393362" y="2232710"/>
-                  </a:lnTo>
-                  <a:lnTo>
-                    <a:pt x="2321739" y="2193779"/>
-                  </a:lnTo>
-                  <a:lnTo>
-                    <a:pt x="2250117" y="2153637"/>
-                  </a:lnTo>
-                  <a:lnTo>
-                    <a:pt x="2178494" y="2112246"/>
-                  </a:lnTo>
-                  <a:lnTo>
-                    <a:pt x="2106872" y="2069566"/>
-                  </a:lnTo>
-                  <a:lnTo>
-                    <a:pt x="2035249" y="2025559"/>
-                  </a:lnTo>
-                  <a:lnTo>
-                    <a:pt x="1963627" y="1980182"/>
-                  </a:lnTo>
-                  <a:lnTo>
-                    <a:pt x="1892004" y="1933393"/>
-                  </a:lnTo>
-                  <a:lnTo>
-                    <a:pt x="1820381" y="1885148"/>
-                  </a:lnTo>
-                  <a:lnTo>
-                    <a:pt x="1748759" y="1835401"/>
-                  </a:lnTo>
-                  <a:lnTo>
-                    <a:pt x="1677136" y="1784107"/>
-                  </a:lnTo>
-                  <a:lnTo>
-                    <a:pt x="1605514" y="1731217"/>
-                  </a:lnTo>
-                  <a:lnTo>
-                    <a:pt x="1533891" y="1676680"/>
-                  </a:lnTo>
-                  <a:lnTo>
-                    <a:pt x="1462269" y="1620446"/>
-                  </a:lnTo>
-                  <a:lnTo>
-                    <a:pt x="1390646" y="1562463"/>
-                  </a:lnTo>
-                  <a:lnTo>
-                    <a:pt x="1319024" y="1502675"/>
-                  </a:lnTo>
-                  <a:lnTo>
-                    <a:pt x="1247401" y="1441027"/>
-                  </a:lnTo>
-                  <a:lnTo>
-                    <a:pt x="1175779" y="1377460"/>
-                  </a:lnTo>
-                  <a:lnTo>
-                    <a:pt x="1104156" y="1311915"/>
-                  </a:lnTo>
-                  <a:lnTo>
-                    <a:pt x="1032534" y="1244330"/>
-                  </a:lnTo>
-                  <a:lnTo>
-                    <a:pt x="960911" y="1174643"/>
-                  </a:lnTo>
-                  <a:lnTo>
-                    <a:pt x="889289" y="1102786"/>
-                  </a:lnTo>
-                  <a:lnTo>
-                    <a:pt x="817666" y="1028694"/>
-                  </a:lnTo>
-                  <a:lnTo>
-                    <a:pt x="746044" y="952296"/>
-                  </a:lnTo>
-                  <a:lnTo>
-                    <a:pt x="674421" y="873520"/>
-                  </a:lnTo>
-                  <a:lnTo>
-                    <a:pt x="602799" y="792294"/>
-                  </a:lnTo>
-                  <a:lnTo>
-                    <a:pt x="531176" y="708539"/>
-                  </a:lnTo>
-                  <a:lnTo>
-                    <a:pt x="459553" y="622178"/>
-                  </a:lnTo>
-                  <a:lnTo>
-                    <a:pt x="387931" y="533130"/>
-                  </a:lnTo>
-                  <a:lnTo>
-                    <a:pt x="316308" y="441310"/>
-                  </a:lnTo>
-                  <a:lnTo>
-                    <a:pt x="244686" y="346634"/>
-                  </a:lnTo>
-                  <a:lnTo>
-                    <a:pt x="173063" y="249011"/>
-                  </a:lnTo>
-                  <a:lnTo>
-                    <a:pt x="101441" y="148350"/>
-                  </a:lnTo>
-                  <a:lnTo>
-                    <a:pt x="29818" y="44557"/>
+                    <a:pt x="3795993" y="68499"/>
+                  </a:lnTo>
+                  <a:lnTo>
+                    <a:pt x="3867616" y="368172"/>
+                  </a:lnTo>
+                  <a:lnTo>
+                    <a:pt x="3939238" y="641551"/>
+                  </a:lnTo>
+                  <a:lnTo>
+                    <a:pt x="4010861" y="890941"/>
+                  </a:lnTo>
+                  <a:lnTo>
+                    <a:pt x="4082483" y="1118449"/>
+                  </a:lnTo>
+                  <a:lnTo>
+                    <a:pt x="4154106" y="1325994"/>
+                  </a:lnTo>
+                  <a:lnTo>
+                    <a:pt x="4225729" y="1515328"/>
+                  </a:lnTo>
+                  <a:lnTo>
+                    <a:pt x="4297351" y="1688048"/>
+                  </a:lnTo>
+                  <a:lnTo>
+                    <a:pt x="4368974" y="1845613"/>
+                  </a:lnTo>
+                  <a:lnTo>
+                    <a:pt x="4440596" y="1989352"/>
+                  </a:lnTo>
+                  <a:lnTo>
+                    <a:pt x="4512219" y="2120479"/>
+                  </a:lnTo>
+                  <a:lnTo>
+                    <a:pt x="4583841" y="2240100"/>
+                  </a:lnTo>
+                  <a:lnTo>
+                    <a:pt x="4655464" y="2349225"/>
+                  </a:lnTo>
+                  <a:lnTo>
+                    <a:pt x="4727086" y="2448774"/>
+                  </a:lnTo>
+                  <a:lnTo>
+                    <a:pt x="4798709" y="2539589"/>
+                  </a:lnTo>
+                  <a:lnTo>
+                    <a:pt x="4870331" y="2622435"/>
+                  </a:lnTo>
+                  <a:lnTo>
+                    <a:pt x="4941954" y="2661715"/>
+                  </a:lnTo>
+                  <a:lnTo>
+                    <a:pt x="5013576" y="2674166"/>
+                  </a:lnTo>
+                  <a:lnTo>
+                    <a:pt x="5085199" y="2686428"/>
+                  </a:lnTo>
+                  <a:lnTo>
+                    <a:pt x="5156821" y="2698505"/>
+                  </a:lnTo>
+                  <a:lnTo>
+                    <a:pt x="5228444" y="2710399"/>
+                  </a:lnTo>
+                  <a:lnTo>
+                    <a:pt x="5300066" y="2722112"/>
+                  </a:lnTo>
+                  <a:lnTo>
+                    <a:pt x="5371689" y="2733648"/>
+                  </a:lnTo>
+                  <a:lnTo>
+                    <a:pt x="5443311" y="2745010"/>
+                  </a:lnTo>
+                  <a:lnTo>
+                    <a:pt x="5514934" y="2756199"/>
+                  </a:lnTo>
+                  <a:lnTo>
+                    <a:pt x="5586557" y="2767219"/>
+                  </a:lnTo>
+                  <a:lnTo>
+                    <a:pt x="5658179" y="2778072"/>
+                  </a:lnTo>
+                  <a:lnTo>
+                    <a:pt x="5729802" y="2788760"/>
+                  </a:lnTo>
+                  <a:lnTo>
+                    <a:pt x="5801424" y="2799287"/>
+                  </a:lnTo>
+                  <a:lnTo>
+                    <a:pt x="5873047" y="2809654"/>
+                  </a:lnTo>
+                  <a:lnTo>
+                    <a:pt x="5944669" y="2819864"/>
+                  </a:lnTo>
+                  <a:lnTo>
+                    <a:pt x="6016292" y="2829919"/>
+                  </a:lnTo>
+                  <a:lnTo>
+                    <a:pt x="6087914" y="2839823"/>
+                  </a:lnTo>
+                  <a:lnTo>
+                    <a:pt x="6159537" y="2849576"/>
+                  </a:lnTo>
+                  <a:lnTo>
+                    <a:pt x="6231159" y="2859181"/>
+                  </a:lnTo>
+                  <a:lnTo>
+                    <a:pt x="6302782" y="2868641"/>
+                  </a:lnTo>
+                  <a:lnTo>
+                    <a:pt x="6374404" y="2877958"/>
+                  </a:lnTo>
+                  <a:lnTo>
+                    <a:pt x="6446027" y="2887134"/>
+                  </a:lnTo>
+                  <a:lnTo>
+                    <a:pt x="6517649" y="2896170"/>
+                  </a:lnTo>
+                  <a:lnTo>
+                    <a:pt x="6589272" y="2905070"/>
+                  </a:lnTo>
+                  <a:lnTo>
+                    <a:pt x="6660894" y="2913835"/>
+                  </a:lnTo>
+                  <a:lnTo>
+                    <a:pt x="6732517" y="2922467"/>
+                  </a:lnTo>
+                  <a:lnTo>
+                    <a:pt x="6804139" y="2930968"/>
+                  </a:lnTo>
+                  <a:lnTo>
+                    <a:pt x="6875762" y="2939341"/>
+                  </a:lnTo>
+                  <a:lnTo>
+                    <a:pt x="6947385" y="2947587"/>
+                  </a:lnTo>
+                  <a:lnTo>
+                    <a:pt x="7019007" y="2955708"/>
+                  </a:lnTo>
+                  <a:lnTo>
+                    <a:pt x="7090630" y="2963706"/>
+                  </a:lnTo>
+                  <a:lnTo>
+                    <a:pt x="7090630" y="3433771"/>
+                  </a:lnTo>
+                  <a:lnTo>
+                    <a:pt x="7019007" y="3428965"/>
+                  </a:lnTo>
+                  <a:lnTo>
+                    <a:pt x="6947385" y="3423695"/>
+                  </a:lnTo>
+                  <a:lnTo>
+                    <a:pt x="6875762" y="3417919"/>
+                  </a:lnTo>
+                  <a:lnTo>
+                    <a:pt x="6804139" y="3411588"/>
+                  </a:lnTo>
+                  <a:lnTo>
+                    <a:pt x="6732517" y="3404647"/>
+                  </a:lnTo>
+                  <a:lnTo>
+                    <a:pt x="6660894" y="3397039"/>
+                  </a:lnTo>
+                  <a:lnTo>
+                    <a:pt x="6589272" y="3388699"/>
+                  </a:lnTo>
+                  <a:lnTo>
+                    <a:pt x="6517649" y="3379557"/>
+                  </a:lnTo>
+                  <a:lnTo>
+                    <a:pt x="6446027" y="3369535"/>
+                  </a:lnTo>
+                  <a:lnTo>
+                    <a:pt x="6374404" y="3358549"/>
+                  </a:lnTo>
+                  <a:lnTo>
+                    <a:pt x="6302782" y="3346507"/>
+                  </a:lnTo>
+                  <a:lnTo>
+                    <a:pt x="6231159" y="3333307"/>
+                  </a:lnTo>
+                  <a:lnTo>
+                    <a:pt x="6159537" y="3318837"/>
+                  </a:lnTo>
+                  <a:lnTo>
+                    <a:pt x="6087914" y="3302975"/>
+                  </a:lnTo>
+                  <a:lnTo>
+                    <a:pt x="6016292" y="3285587"/>
+                  </a:lnTo>
+                  <a:lnTo>
+                    <a:pt x="5944669" y="3266527"/>
+                  </a:lnTo>
+                  <a:lnTo>
+                    <a:pt x="5873047" y="3245634"/>
+                  </a:lnTo>
+                  <a:lnTo>
+                    <a:pt x="5801424" y="3222731"/>
+                  </a:lnTo>
+                  <a:lnTo>
+                    <a:pt x="5729802" y="3197625"/>
+                  </a:lnTo>
+                  <a:lnTo>
+                    <a:pt x="5658179" y="3170104"/>
+                  </a:lnTo>
+                  <a:lnTo>
+                    <a:pt x="5586557" y="3139936"/>
+                  </a:lnTo>
+                  <a:lnTo>
+                    <a:pt x="5514934" y="3106866"/>
+                  </a:lnTo>
+                  <a:lnTo>
+                    <a:pt x="5443311" y="3070616"/>
+                  </a:lnTo>
+                  <a:lnTo>
+                    <a:pt x="5371689" y="3030878"/>
+                  </a:lnTo>
+                  <a:lnTo>
+                    <a:pt x="5300066" y="2987319"/>
+                  </a:lnTo>
+                  <a:lnTo>
+                    <a:pt x="5228444" y="2939570"/>
+                  </a:lnTo>
+                  <a:lnTo>
+                    <a:pt x="5156821" y="2887228"/>
+                  </a:lnTo>
+                  <a:lnTo>
+                    <a:pt x="5085199" y="2829851"/>
+                  </a:lnTo>
+                  <a:lnTo>
+                    <a:pt x="5013576" y="2766956"/>
+                  </a:lnTo>
+                  <a:lnTo>
+                    <a:pt x="4941954" y="2698011"/>
+                  </a:lnTo>
+                  <a:lnTo>
+                    <a:pt x="4870331" y="2649073"/>
+                  </a:lnTo>
+                  <a:lnTo>
+                    <a:pt x="4798709" y="2636236"/>
+                  </a:lnTo>
+                  <a:lnTo>
+                    <a:pt x="4727086" y="2623202"/>
+                  </a:lnTo>
+                  <a:lnTo>
+                    <a:pt x="4655464" y="2609967"/>
+                  </a:lnTo>
+                  <a:lnTo>
+                    <a:pt x="4583841" y="2596529"/>
+                  </a:lnTo>
+                  <a:lnTo>
+                    <a:pt x="4512219" y="2582884"/>
+                  </a:lnTo>
+                  <a:lnTo>
+                    <a:pt x="4440596" y="2569029"/>
+                  </a:lnTo>
+                  <a:lnTo>
+                    <a:pt x="4368974" y="2554961"/>
+                  </a:lnTo>
+                  <a:lnTo>
+                    <a:pt x="4297351" y="2540677"/>
+                  </a:lnTo>
+                  <a:lnTo>
+                    <a:pt x="4225729" y="2526173"/>
+                  </a:lnTo>
+                  <a:lnTo>
+                    <a:pt x="4154106" y="2511446"/>
+                  </a:lnTo>
+                  <a:lnTo>
+                    <a:pt x="4082483" y="2496493"/>
+                  </a:lnTo>
+                  <a:lnTo>
+                    <a:pt x="4010861" y="2481309"/>
+                  </a:lnTo>
+                  <a:lnTo>
+                    <a:pt x="3939238" y="2465892"/>
+                  </a:lnTo>
+                  <a:lnTo>
+                    <a:pt x="3867616" y="2450238"/>
+                  </a:lnTo>
+                  <a:lnTo>
+                    <a:pt x="3795993" y="2434344"/>
+                  </a:lnTo>
+                  <a:lnTo>
+                    <a:pt x="3724371" y="2418204"/>
+                  </a:lnTo>
+                  <a:lnTo>
+                    <a:pt x="3652748" y="2401817"/>
+                  </a:lnTo>
+                  <a:lnTo>
+                    <a:pt x="3581126" y="2385177"/>
+                  </a:lnTo>
+                  <a:lnTo>
+                    <a:pt x="3509503" y="2368282"/>
+                  </a:lnTo>
+                  <a:lnTo>
+                    <a:pt x="3437881" y="2351127"/>
+                  </a:lnTo>
+                  <a:lnTo>
+                    <a:pt x="3366258" y="2333708"/>
+                  </a:lnTo>
+                  <a:lnTo>
+                    <a:pt x="3294636" y="2316021"/>
+                  </a:lnTo>
+                  <a:lnTo>
+                    <a:pt x="3223013" y="2298062"/>
+                  </a:lnTo>
+                  <a:lnTo>
+                    <a:pt x="3151391" y="2279827"/>
+                  </a:lnTo>
+                  <a:lnTo>
+                    <a:pt x="3079768" y="2261311"/>
+                  </a:lnTo>
+                  <a:lnTo>
+                    <a:pt x="3008146" y="2242511"/>
+                  </a:lnTo>
+                  <a:lnTo>
+                    <a:pt x="2936523" y="2223421"/>
+                  </a:lnTo>
+                  <a:lnTo>
+                    <a:pt x="2864901" y="2204038"/>
+                  </a:lnTo>
+                  <a:lnTo>
+                    <a:pt x="2793278" y="2184357"/>
+                  </a:lnTo>
+                  <a:lnTo>
+                    <a:pt x="2721655" y="2164373"/>
+                  </a:lnTo>
+                  <a:lnTo>
+                    <a:pt x="2650033" y="2144082"/>
+                  </a:lnTo>
+                  <a:lnTo>
+                    <a:pt x="2578410" y="2123478"/>
+                  </a:lnTo>
+                  <a:lnTo>
+                    <a:pt x="2506788" y="2102558"/>
+                  </a:lnTo>
+                  <a:lnTo>
+                    <a:pt x="2435165" y="2081316"/>
+                  </a:lnTo>
+                  <a:lnTo>
+                    <a:pt x="2363543" y="2059748"/>
+                  </a:lnTo>
+                  <a:lnTo>
+                    <a:pt x="2291920" y="2037847"/>
+                  </a:lnTo>
+                  <a:lnTo>
+                    <a:pt x="2220298" y="2015610"/>
+                  </a:lnTo>
+                  <a:lnTo>
+                    <a:pt x="2148675" y="1993031"/>
+                  </a:lnTo>
+                  <a:lnTo>
+                    <a:pt x="2077053" y="1970105"/>
+                  </a:lnTo>
+                  <a:lnTo>
+                    <a:pt x="2005430" y="1946826"/>
+                  </a:lnTo>
+                  <a:lnTo>
+                    <a:pt x="1933808" y="1923189"/>
+                  </a:lnTo>
+                  <a:lnTo>
+                    <a:pt x="1862185" y="1899188"/>
+                  </a:lnTo>
+                  <a:lnTo>
+                    <a:pt x="1790563" y="1874819"/>
+                  </a:lnTo>
+                  <a:lnTo>
+                    <a:pt x="1718940" y="1850074"/>
+                  </a:lnTo>
+                  <a:lnTo>
+                    <a:pt x="1647318" y="1824949"/>
+                  </a:lnTo>
+                  <a:lnTo>
+                    <a:pt x="1575695" y="1799438"/>
+                  </a:lnTo>
+                  <a:lnTo>
+                    <a:pt x="1504073" y="1773534"/>
+                  </a:lnTo>
+                  <a:lnTo>
+                    <a:pt x="1432450" y="1747232"/>
+                  </a:lnTo>
+                  <a:lnTo>
+                    <a:pt x="1360827" y="1720526"/>
+                  </a:lnTo>
+                  <a:lnTo>
+                    <a:pt x="1289205" y="1693408"/>
+                  </a:lnTo>
+                  <a:lnTo>
+                    <a:pt x="1217582" y="1665874"/>
+                  </a:lnTo>
+                  <a:lnTo>
+                    <a:pt x="1145960" y="1637916"/>
+                  </a:lnTo>
+                  <a:lnTo>
+                    <a:pt x="1074337" y="1609528"/>
+                  </a:lnTo>
+                  <a:lnTo>
+                    <a:pt x="1002715" y="1580704"/>
+                  </a:lnTo>
+                  <a:lnTo>
+                    <a:pt x="931092" y="1551436"/>
+                  </a:lnTo>
+                  <a:lnTo>
+                    <a:pt x="859470" y="1521718"/>
+                  </a:lnTo>
+                  <a:lnTo>
+                    <a:pt x="787847" y="1491543"/>
+                  </a:lnTo>
+                  <a:lnTo>
+                    <a:pt x="716225" y="1460904"/>
+                  </a:lnTo>
+                  <a:lnTo>
+                    <a:pt x="644602" y="1429794"/>
+                  </a:lnTo>
+                  <a:lnTo>
+                    <a:pt x="572980" y="1398205"/>
+                  </a:lnTo>
+                  <a:lnTo>
+                    <a:pt x="501357" y="1366131"/>
+                  </a:lnTo>
+                  <a:lnTo>
+                    <a:pt x="429735" y="1333563"/>
+                  </a:lnTo>
+                  <a:lnTo>
+                    <a:pt x="358112" y="1300494"/>
+                  </a:lnTo>
+                  <a:lnTo>
+                    <a:pt x="286490" y="1266917"/>
+                  </a:lnTo>
+                  <a:lnTo>
+                    <a:pt x="214867" y="1232824"/>
+                  </a:lnTo>
+                  <a:lnTo>
+                    <a:pt x="143245" y="1198206"/>
+                  </a:lnTo>
+                  <a:lnTo>
+                    <a:pt x="71622" y="1163055"/>
+                  </a:lnTo>
+                  <a:lnTo>
+                    <a:pt x="0" y="1127364"/>
                   </a:lnTo>
                   <a:lnTo>
                     <a:pt x="0" y="0"/>
@@ -3408,150 +3480,156 @@
           </p:nvSpPr>
           <p:spPr>
             <a:xfrm>
-              <a:off x="5091153" y="2073503"/>
-              <a:ext cx="3171525" cy="3158892"/>
+              <a:off x="4953108" y="2073503"/>
+              <a:ext cx="3309571" cy="2963706"/>
             </a:xfrm>
             <a:custGeom>
               <a:avLst/>
               <a:pathLst>
-                <a:path w="3171525" h="3158892">
+                <a:path w="3309571" h="2963706">
                   <a:moveTo>
                     <a:pt x="0" y="0"/>
                   </a:moveTo>
                   <a:lnTo>
-                    <a:pt x="20134" y="104880"/>
-                  </a:lnTo>
-                  <a:lnTo>
-                    <a:pt x="91757" y="440862"/>
-                  </a:lnTo>
-                  <a:lnTo>
-                    <a:pt x="163379" y="743435"/>
-                  </a:lnTo>
-                  <a:lnTo>
-                    <a:pt x="235002" y="1015922"/>
-                  </a:lnTo>
-                  <a:lnTo>
-                    <a:pt x="306624" y="1261313"/>
-                  </a:lnTo>
-                  <a:lnTo>
-                    <a:pt x="378247" y="1482304"/>
-                  </a:lnTo>
-                  <a:lnTo>
-                    <a:pt x="449869" y="1681320"/>
-                  </a:lnTo>
-                  <a:lnTo>
-                    <a:pt x="521492" y="1860547"/>
-                  </a:lnTo>
-                  <a:lnTo>
-                    <a:pt x="593114" y="2021952"/>
-                  </a:lnTo>
-                  <a:lnTo>
-                    <a:pt x="664737" y="2167307"/>
-                  </a:lnTo>
-                  <a:lnTo>
-                    <a:pt x="736359" y="2298209"/>
-                  </a:lnTo>
-                  <a:lnTo>
-                    <a:pt x="807982" y="2416095"/>
-                  </a:lnTo>
-                  <a:lnTo>
-                    <a:pt x="879604" y="2522258"/>
-                  </a:lnTo>
-                  <a:lnTo>
-                    <a:pt x="951227" y="2617865"/>
-                  </a:lnTo>
-                  <a:lnTo>
-                    <a:pt x="1022849" y="2669138"/>
-                  </a:lnTo>
-                  <a:lnTo>
-                    <a:pt x="1094472" y="2693723"/>
-                  </a:lnTo>
-                  <a:lnTo>
-                    <a:pt x="1166095" y="2717565"/>
-                  </a:lnTo>
-                  <a:lnTo>
-                    <a:pt x="1237717" y="2740688"/>
-                  </a:lnTo>
-                  <a:lnTo>
-                    <a:pt x="1309340" y="2763114"/>
-                  </a:lnTo>
-                  <a:lnTo>
-                    <a:pt x="1380962" y="2784862"/>
-                  </a:lnTo>
-                  <a:lnTo>
-                    <a:pt x="1452585" y="2805954"/>
-                  </a:lnTo>
-                  <a:lnTo>
-                    <a:pt x="1524207" y="2826409"/>
-                  </a:lnTo>
-                  <a:lnTo>
-                    <a:pt x="1595830" y="2846248"/>
-                  </a:lnTo>
-                  <a:lnTo>
-                    <a:pt x="1667452" y="2865487"/>
-                  </a:lnTo>
-                  <a:lnTo>
-                    <a:pt x="1739075" y="2884146"/>
-                  </a:lnTo>
-                  <a:lnTo>
-                    <a:pt x="1810697" y="2902241"/>
-                  </a:lnTo>
-                  <a:lnTo>
-                    <a:pt x="1882320" y="2919791"/>
-                  </a:lnTo>
-                  <a:lnTo>
-                    <a:pt x="1953942" y="2936811"/>
-                  </a:lnTo>
-                  <a:lnTo>
-                    <a:pt x="2025565" y="2953317"/>
-                  </a:lnTo>
-                  <a:lnTo>
-                    <a:pt x="2097187" y="2969325"/>
-                  </a:lnTo>
-                  <a:lnTo>
-                    <a:pt x="2168810" y="2984850"/>
-                  </a:lnTo>
-                  <a:lnTo>
-                    <a:pt x="2240432" y="2999907"/>
-                  </a:lnTo>
-                  <a:lnTo>
-                    <a:pt x="2312055" y="3014509"/>
-                  </a:lnTo>
-                  <a:lnTo>
-                    <a:pt x="2383677" y="3028670"/>
-                  </a:lnTo>
-                  <a:lnTo>
-                    <a:pt x="2455300" y="3042404"/>
-                  </a:lnTo>
-                  <a:lnTo>
-                    <a:pt x="2526923" y="3055724"/>
-                  </a:lnTo>
-                  <a:lnTo>
-                    <a:pt x="2598545" y="3068641"/>
-                  </a:lnTo>
-                  <a:lnTo>
-                    <a:pt x="2670168" y="3081169"/>
-                  </a:lnTo>
-                  <a:lnTo>
-                    <a:pt x="2741790" y="3093319"/>
-                  </a:lnTo>
-                  <a:lnTo>
-                    <a:pt x="2813413" y="3105102"/>
-                  </a:lnTo>
-                  <a:lnTo>
-                    <a:pt x="2885035" y="3116529"/>
-                  </a:lnTo>
-                  <a:lnTo>
-                    <a:pt x="2956658" y="3127611"/>
-                  </a:lnTo>
-                  <a:lnTo>
-                    <a:pt x="3028280" y="3138359"/>
-                  </a:lnTo>
-                  <a:lnTo>
-                    <a:pt x="3099903" y="3148783"/>
-                  </a:lnTo>
-                  <a:lnTo>
-                    <a:pt x="3171525" y="3158892"/>
+                    <a:pt x="14934" y="68499"/>
+                  </a:lnTo>
+                  <a:lnTo>
+                    <a:pt x="86557" y="368172"/>
+                  </a:lnTo>
+                  <a:lnTo>
+                    <a:pt x="158179" y="641551"/>
+                  </a:lnTo>
+                  <a:lnTo>
+                    <a:pt x="229802" y="890941"/>
+                  </a:lnTo>
+                  <a:lnTo>
+                    <a:pt x="301424" y="1118449"/>
+                  </a:lnTo>
+                  <a:lnTo>
+                    <a:pt x="373047" y="1325994"/>
+                  </a:lnTo>
+                  <a:lnTo>
+                    <a:pt x="444670" y="1515328"/>
+                  </a:lnTo>
+                  <a:lnTo>
+                    <a:pt x="516292" y="1688048"/>
+                  </a:lnTo>
+                  <a:lnTo>
+                    <a:pt x="587915" y="1845613"/>
+                  </a:lnTo>
+                  <a:lnTo>
+                    <a:pt x="659537" y="1989352"/>
+                  </a:lnTo>
+                  <a:lnTo>
+                    <a:pt x="731160" y="2120479"/>
+                  </a:lnTo>
+                  <a:lnTo>
+                    <a:pt x="802782" y="2240100"/>
+                  </a:lnTo>
+                  <a:lnTo>
+                    <a:pt x="874405" y="2349225"/>
+                  </a:lnTo>
+                  <a:lnTo>
+                    <a:pt x="946027" y="2448774"/>
+                  </a:lnTo>
+                  <a:lnTo>
+                    <a:pt x="1017650" y="2539589"/>
+                  </a:lnTo>
+                  <a:lnTo>
+                    <a:pt x="1089272" y="2622435"/>
+                  </a:lnTo>
+                  <a:lnTo>
+                    <a:pt x="1160895" y="2661715"/>
+                  </a:lnTo>
+                  <a:lnTo>
+                    <a:pt x="1232517" y="2674166"/>
+                  </a:lnTo>
+                  <a:lnTo>
+                    <a:pt x="1304140" y="2686428"/>
+                  </a:lnTo>
+                  <a:lnTo>
+                    <a:pt x="1375762" y="2698505"/>
+                  </a:lnTo>
+                  <a:lnTo>
+                    <a:pt x="1447385" y="2710399"/>
+                  </a:lnTo>
+                  <a:lnTo>
+                    <a:pt x="1519007" y="2722112"/>
+                  </a:lnTo>
+                  <a:lnTo>
+                    <a:pt x="1590630" y="2733648"/>
+                  </a:lnTo>
+                  <a:lnTo>
+                    <a:pt x="1662252" y="2745010"/>
+                  </a:lnTo>
+                  <a:lnTo>
+                    <a:pt x="1733875" y="2756199"/>
+                  </a:lnTo>
+                  <a:lnTo>
+                    <a:pt x="1805498" y="2767219"/>
+                  </a:lnTo>
+                  <a:lnTo>
+                    <a:pt x="1877120" y="2778072"/>
+                  </a:lnTo>
+                  <a:lnTo>
+                    <a:pt x="1948743" y="2788760"/>
+                  </a:lnTo>
+                  <a:lnTo>
+                    <a:pt x="2020365" y="2799287"/>
+                  </a:lnTo>
+                  <a:lnTo>
+                    <a:pt x="2091988" y="2809654"/>
+                  </a:lnTo>
+                  <a:lnTo>
+                    <a:pt x="2163610" y="2819864"/>
+                  </a:lnTo>
+                  <a:lnTo>
+                    <a:pt x="2235233" y="2829919"/>
+                  </a:lnTo>
+                  <a:lnTo>
+                    <a:pt x="2306855" y="2839823"/>
+                  </a:lnTo>
+                  <a:lnTo>
+                    <a:pt x="2378478" y="2849576"/>
+                  </a:lnTo>
+                  <a:lnTo>
+                    <a:pt x="2450100" y="2859181"/>
+                  </a:lnTo>
+                  <a:lnTo>
+                    <a:pt x="2521723" y="2868641"/>
+                  </a:lnTo>
+                  <a:lnTo>
+                    <a:pt x="2593345" y="2877958"/>
+                  </a:lnTo>
+                  <a:lnTo>
+                    <a:pt x="2664968" y="2887134"/>
+                  </a:lnTo>
+                  <a:lnTo>
+                    <a:pt x="2736590" y="2896170"/>
+                  </a:lnTo>
+                  <a:lnTo>
+                    <a:pt x="2808213" y="2905070"/>
+                  </a:lnTo>
+                  <a:lnTo>
+                    <a:pt x="2879835" y="2913835"/>
+                  </a:lnTo>
+                  <a:lnTo>
+                    <a:pt x="2951458" y="2922467"/>
+                  </a:lnTo>
+                  <a:lnTo>
+                    <a:pt x="3023080" y="2930968"/>
+                  </a:lnTo>
+                  <a:lnTo>
+                    <a:pt x="3094703" y="2939341"/>
+                  </a:lnTo>
+                  <a:lnTo>
+                    <a:pt x="3166326" y="2947587"/>
+                  </a:lnTo>
+                  <a:lnTo>
+                    <a:pt x="3237948" y="2955708"/>
+                  </a:lnTo>
+                  <a:lnTo>
+                    <a:pt x="3309571" y="2963706"/>
                   </a:lnTo>
                 </a:path>
               </a:pathLst>
@@ -3571,246 +3649,309 @@
           </p:nvSpPr>
           <p:spPr>
             <a:xfrm>
-              <a:off x="2717926" y="2073503"/>
-              <a:ext cx="5544753" cy="3450064"/>
+              <a:off x="1172049" y="3200867"/>
+              <a:ext cx="7090630" cy="2306407"/>
             </a:xfrm>
             <a:custGeom>
               <a:avLst/>
               <a:pathLst>
-                <a:path w="5544753" h="3450064">
+                <a:path w="7090630" h="2306407">
                   <a:moveTo>
-                    <a:pt x="5544753" y="3450064"/>
+                    <a:pt x="7090630" y="2306407"/>
                   </a:moveTo>
                   <a:lnTo>
-                    <a:pt x="5473130" y="3446345"/>
-                  </a:lnTo>
-                  <a:lnTo>
-                    <a:pt x="5401508" y="3442215"/>
-                  </a:lnTo>
-                  <a:lnTo>
-                    <a:pt x="5329885" y="3437629"/>
-                  </a:lnTo>
-                  <a:lnTo>
-                    <a:pt x="5258263" y="3432537"/>
-                  </a:lnTo>
-                  <a:lnTo>
-                    <a:pt x="5186640" y="3426883"/>
-                  </a:lnTo>
-                  <a:lnTo>
-                    <a:pt x="5115018" y="3420604"/>
-                  </a:lnTo>
-                  <a:lnTo>
-                    <a:pt x="5043395" y="3413632"/>
-                  </a:lnTo>
-                  <a:lnTo>
-                    <a:pt x="4971773" y="3405891"/>
-                  </a:lnTo>
-                  <a:lnTo>
-                    <a:pt x="4900150" y="3397294"/>
-                  </a:lnTo>
-                  <a:lnTo>
-                    <a:pt x="4828528" y="3387749"/>
-                  </a:lnTo>
-                  <a:lnTo>
-                    <a:pt x="4756905" y="3377149"/>
-                  </a:lnTo>
-                  <a:lnTo>
-                    <a:pt x="4685283" y="3365379"/>
-                  </a:lnTo>
-                  <a:lnTo>
-                    <a:pt x="4613660" y="3352309"/>
-                  </a:lnTo>
-                  <a:lnTo>
-                    <a:pt x="4542037" y="3337797"/>
-                  </a:lnTo>
-                  <a:lnTo>
-                    <a:pt x="4470415" y="3321681"/>
-                  </a:lnTo>
-                  <a:lnTo>
-                    <a:pt x="4398792" y="3303787"/>
-                  </a:lnTo>
-                  <a:lnTo>
-                    <a:pt x="4327170" y="3283917"/>
-                  </a:lnTo>
-                  <a:lnTo>
-                    <a:pt x="4255547" y="3261852"/>
-                  </a:lnTo>
-                  <a:lnTo>
-                    <a:pt x="4183925" y="3237352"/>
-                  </a:lnTo>
-                  <a:lnTo>
-                    <a:pt x="4112302" y="3210146"/>
-                  </a:lnTo>
-                  <a:lnTo>
-                    <a:pt x="4040680" y="3179936"/>
-                  </a:lnTo>
-                  <a:lnTo>
-                    <a:pt x="3969057" y="3146391"/>
-                  </a:lnTo>
-                  <a:lnTo>
-                    <a:pt x="3897435" y="3109141"/>
-                  </a:lnTo>
-                  <a:lnTo>
-                    <a:pt x="3825812" y="3067779"/>
-                  </a:lnTo>
-                  <a:lnTo>
-                    <a:pt x="3754190" y="3021850"/>
-                  </a:lnTo>
-                  <a:lnTo>
-                    <a:pt x="3682567" y="2970849"/>
-                  </a:lnTo>
-                  <a:lnTo>
-                    <a:pt x="3610945" y="2914217"/>
-                  </a:lnTo>
-                  <a:lnTo>
-                    <a:pt x="3539322" y="2851332"/>
-                  </a:lnTo>
-                  <a:lnTo>
-                    <a:pt x="3467700" y="2781504"/>
-                  </a:lnTo>
-                  <a:lnTo>
-                    <a:pt x="3396077" y="2703965"/>
-                  </a:lnTo>
-                  <a:lnTo>
-                    <a:pt x="3324455" y="2643789"/>
-                  </a:lnTo>
-                  <a:lnTo>
-                    <a:pt x="3252832" y="2617650"/>
-                  </a:lnTo>
-                  <a:lnTo>
-                    <a:pt x="3181209" y="2590699"/>
-                  </a:lnTo>
-                  <a:lnTo>
-                    <a:pt x="3109587" y="2562908"/>
-                  </a:lnTo>
-                  <a:lnTo>
-                    <a:pt x="3037964" y="2534253"/>
-                  </a:lnTo>
-                  <a:lnTo>
-                    <a:pt x="2966342" y="2504706"/>
-                  </a:lnTo>
-                  <a:lnTo>
-                    <a:pt x="2894719" y="2474239"/>
-                  </a:lnTo>
-                  <a:lnTo>
-                    <a:pt x="2823097" y="2442825"/>
-                  </a:lnTo>
-                  <a:lnTo>
-                    <a:pt x="2751474" y="2410433"/>
-                  </a:lnTo>
-                  <a:lnTo>
-                    <a:pt x="2679852" y="2377032"/>
-                  </a:lnTo>
-                  <a:lnTo>
-                    <a:pt x="2608229" y="2342593"/>
-                  </a:lnTo>
-                  <a:lnTo>
-                    <a:pt x="2536607" y="2307082"/>
-                  </a:lnTo>
-                  <a:lnTo>
-                    <a:pt x="2464984" y="2270465"/>
-                  </a:lnTo>
-                  <a:lnTo>
-                    <a:pt x="2393362" y="2232710"/>
-                  </a:lnTo>
-                  <a:lnTo>
-                    <a:pt x="2321739" y="2193779"/>
-                  </a:lnTo>
-                  <a:lnTo>
-                    <a:pt x="2250117" y="2153637"/>
-                  </a:lnTo>
-                  <a:lnTo>
-                    <a:pt x="2178494" y="2112246"/>
-                  </a:lnTo>
-                  <a:lnTo>
-                    <a:pt x="2106872" y="2069566"/>
-                  </a:lnTo>
-                  <a:lnTo>
-                    <a:pt x="2035249" y="2025559"/>
-                  </a:lnTo>
-                  <a:lnTo>
-                    <a:pt x="1963627" y="1980182"/>
-                  </a:lnTo>
-                  <a:lnTo>
-                    <a:pt x="1892004" y="1933393"/>
-                  </a:lnTo>
-                  <a:lnTo>
-                    <a:pt x="1820381" y="1885148"/>
-                  </a:lnTo>
-                  <a:lnTo>
-                    <a:pt x="1748759" y="1835401"/>
-                  </a:lnTo>
-                  <a:lnTo>
-                    <a:pt x="1677136" y="1784107"/>
-                  </a:lnTo>
-                  <a:lnTo>
-                    <a:pt x="1605514" y="1731217"/>
-                  </a:lnTo>
-                  <a:lnTo>
-                    <a:pt x="1533891" y="1676680"/>
-                  </a:lnTo>
-                  <a:lnTo>
-                    <a:pt x="1462269" y="1620446"/>
-                  </a:lnTo>
-                  <a:lnTo>
-                    <a:pt x="1390646" y="1562463"/>
-                  </a:lnTo>
-                  <a:lnTo>
-                    <a:pt x="1319024" y="1502675"/>
-                  </a:lnTo>
-                  <a:lnTo>
-                    <a:pt x="1247401" y="1441027"/>
-                  </a:lnTo>
-                  <a:lnTo>
-                    <a:pt x="1175779" y="1377460"/>
-                  </a:lnTo>
-                  <a:lnTo>
-                    <a:pt x="1104156" y="1311915"/>
-                  </a:lnTo>
-                  <a:lnTo>
-                    <a:pt x="1032534" y="1244330"/>
-                  </a:lnTo>
-                  <a:lnTo>
-                    <a:pt x="960911" y="1174643"/>
-                  </a:lnTo>
-                  <a:lnTo>
-                    <a:pt x="889289" y="1102786"/>
-                  </a:lnTo>
-                  <a:lnTo>
-                    <a:pt x="817666" y="1028694"/>
-                  </a:lnTo>
-                  <a:lnTo>
-                    <a:pt x="746044" y="952296"/>
-                  </a:lnTo>
-                  <a:lnTo>
-                    <a:pt x="674421" y="873520"/>
-                  </a:lnTo>
-                  <a:lnTo>
-                    <a:pt x="602799" y="792294"/>
-                  </a:lnTo>
-                  <a:lnTo>
-                    <a:pt x="531176" y="708539"/>
-                  </a:lnTo>
-                  <a:lnTo>
-                    <a:pt x="459553" y="622178"/>
-                  </a:lnTo>
-                  <a:lnTo>
-                    <a:pt x="387931" y="533130"/>
-                  </a:lnTo>
-                  <a:lnTo>
-                    <a:pt x="316308" y="441310"/>
-                  </a:lnTo>
-                  <a:lnTo>
-                    <a:pt x="244686" y="346634"/>
-                  </a:lnTo>
-                  <a:lnTo>
-                    <a:pt x="173063" y="249011"/>
-                  </a:lnTo>
-                  <a:lnTo>
-                    <a:pt x="101441" y="148350"/>
-                  </a:lnTo>
-                  <a:lnTo>
-                    <a:pt x="29818" y="44557"/>
+                    <a:pt x="7019007" y="2301600"/>
+                  </a:lnTo>
+                  <a:lnTo>
+                    <a:pt x="6947385" y="2296330"/>
+                  </a:lnTo>
+                  <a:lnTo>
+                    <a:pt x="6875762" y="2290554"/>
+                  </a:lnTo>
+                  <a:lnTo>
+                    <a:pt x="6804139" y="2284223"/>
+                  </a:lnTo>
+                  <a:lnTo>
+                    <a:pt x="6732517" y="2277282"/>
+                  </a:lnTo>
+                  <a:lnTo>
+                    <a:pt x="6660894" y="2269674"/>
+                  </a:lnTo>
+                  <a:lnTo>
+                    <a:pt x="6589272" y="2261334"/>
+                  </a:lnTo>
+                  <a:lnTo>
+                    <a:pt x="6517649" y="2252192"/>
+                  </a:lnTo>
+                  <a:lnTo>
+                    <a:pt x="6446027" y="2242170"/>
+                  </a:lnTo>
+                  <a:lnTo>
+                    <a:pt x="6374404" y="2231185"/>
+                  </a:lnTo>
+                  <a:lnTo>
+                    <a:pt x="6302782" y="2219142"/>
+                  </a:lnTo>
+                  <a:lnTo>
+                    <a:pt x="6231159" y="2205942"/>
+                  </a:lnTo>
+                  <a:lnTo>
+                    <a:pt x="6159537" y="2191472"/>
+                  </a:lnTo>
+                  <a:lnTo>
+                    <a:pt x="6087914" y="2175610"/>
+                  </a:lnTo>
+                  <a:lnTo>
+                    <a:pt x="6016292" y="2158222"/>
+                  </a:lnTo>
+                  <a:lnTo>
+                    <a:pt x="5944669" y="2139162"/>
+                  </a:lnTo>
+                  <a:lnTo>
+                    <a:pt x="5873047" y="2118269"/>
+                  </a:lnTo>
+                  <a:lnTo>
+                    <a:pt x="5801424" y="2095366"/>
+                  </a:lnTo>
+                  <a:lnTo>
+                    <a:pt x="5729802" y="2070260"/>
+                  </a:lnTo>
+                  <a:lnTo>
+                    <a:pt x="5658179" y="2042739"/>
+                  </a:lnTo>
+                  <a:lnTo>
+                    <a:pt x="5586557" y="2012571"/>
+                  </a:lnTo>
+                  <a:lnTo>
+                    <a:pt x="5514934" y="1979501"/>
+                  </a:lnTo>
+                  <a:lnTo>
+                    <a:pt x="5443311" y="1943251"/>
+                  </a:lnTo>
+                  <a:lnTo>
+                    <a:pt x="5371689" y="1903514"/>
+                  </a:lnTo>
+                  <a:lnTo>
+                    <a:pt x="5300066" y="1859954"/>
+                  </a:lnTo>
+                  <a:lnTo>
+                    <a:pt x="5228444" y="1812205"/>
+                  </a:lnTo>
+                  <a:lnTo>
+                    <a:pt x="5156821" y="1759863"/>
+                  </a:lnTo>
+                  <a:lnTo>
+                    <a:pt x="5085199" y="1702487"/>
+                  </a:lnTo>
+                  <a:lnTo>
+                    <a:pt x="5013576" y="1639591"/>
+                  </a:lnTo>
+                  <a:lnTo>
+                    <a:pt x="4941954" y="1570646"/>
+                  </a:lnTo>
+                  <a:lnTo>
+                    <a:pt x="4870331" y="1521708"/>
+                  </a:lnTo>
+                  <a:lnTo>
+                    <a:pt x="4798709" y="1508871"/>
+                  </a:lnTo>
+                  <a:lnTo>
+                    <a:pt x="4727086" y="1495837"/>
+                  </a:lnTo>
+                  <a:lnTo>
+                    <a:pt x="4655464" y="1482602"/>
+                  </a:lnTo>
+                  <a:lnTo>
+                    <a:pt x="4583841" y="1469164"/>
+                  </a:lnTo>
+                  <a:lnTo>
+                    <a:pt x="4512219" y="1455519"/>
+                  </a:lnTo>
+                  <a:lnTo>
+                    <a:pt x="4440596" y="1441664"/>
+                  </a:lnTo>
+                  <a:lnTo>
+                    <a:pt x="4368974" y="1427596"/>
+                  </a:lnTo>
+                  <a:lnTo>
+                    <a:pt x="4297351" y="1413312"/>
+                  </a:lnTo>
+                  <a:lnTo>
+                    <a:pt x="4225729" y="1398808"/>
+                  </a:lnTo>
+                  <a:lnTo>
+                    <a:pt x="4154106" y="1384081"/>
+                  </a:lnTo>
+                  <a:lnTo>
+                    <a:pt x="4082483" y="1369128"/>
+                  </a:lnTo>
+                  <a:lnTo>
+                    <a:pt x="4010861" y="1353945"/>
+                  </a:lnTo>
+                  <a:lnTo>
+                    <a:pt x="3939238" y="1338528"/>
+                  </a:lnTo>
+                  <a:lnTo>
+                    <a:pt x="3867616" y="1322874"/>
+                  </a:lnTo>
+                  <a:lnTo>
+                    <a:pt x="3795993" y="1306979"/>
+                  </a:lnTo>
+                  <a:lnTo>
+                    <a:pt x="3724371" y="1290840"/>
+                  </a:lnTo>
+                  <a:lnTo>
+                    <a:pt x="3652748" y="1274452"/>
+                  </a:lnTo>
+                  <a:lnTo>
+                    <a:pt x="3581126" y="1257813"/>
+                  </a:lnTo>
+                  <a:lnTo>
+                    <a:pt x="3509503" y="1240917"/>
+                  </a:lnTo>
+                  <a:lnTo>
+                    <a:pt x="3437881" y="1223762"/>
+                  </a:lnTo>
+                  <a:lnTo>
+                    <a:pt x="3366258" y="1206343"/>
+                  </a:lnTo>
+                  <a:lnTo>
+                    <a:pt x="3294636" y="1188656"/>
+                  </a:lnTo>
+                  <a:lnTo>
+                    <a:pt x="3223013" y="1170697"/>
+                  </a:lnTo>
+                  <a:lnTo>
+                    <a:pt x="3151391" y="1152462"/>
+                  </a:lnTo>
+                  <a:lnTo>
+                    <a:pt x="3079768" y="1133946"/>
+                  </a:lnTo>
+                  <a:lnTo>
+                    <a:pt x="3008146" y="1115146"/>
+                  </a:lnTo>
+                  <a:lnTo>
+                    <a:pt x="2936523" y="1096056"/>
+                  </a:lnTo>
+                  <a:lnTo>
+                    <a:pt x="2864901" y="1076673"/>
+                  </a:lnTo>
+                  <a:lnTo>
+                    <a:pt x="2793278" y="1056992"/>
+                  </a:lnTo>
+                  <a:lnTo>
+                    <a:pt x="2721655" y="1037008"/>
+                  </a:lnTo>
+                  <a:lnTo>
+                    <a:pt x="2650033" y="1016717"/>
+                  </a:lnTo>
+                  <a:lnTo>
+                    <a:pt x="2578410" y="996114"/>
+                  </a:lnTo>
+                  <a:lnTo>
+                    <a:pt x="2506788" y="975193"/>
+                  </a:lnTo>
+                  <a:lnTo>
+                    <a:pt x="2435165" y="953952"/>
+                  </a:lnTo>
+                  <a:lnTo>
+                    <a:pt x="2363543" y="932383"/>
+                  </a:lnTo>
+                  <a:lnTo>
+                    <a:pt x="2291920" y="910483"/>
+                  </a:lnTo>
+                  <a:lnTo>
+                    <a:pt x="2220298" y="888246"/>
+                  </a:lnTo>
+                  <a:lnTo>
+                    <a:pt x="2148675" y="865666"/>
+                  </a:lnTo>
+                  <a:lnTo>
+                    <a:pt x="2077053" y="842740"/>
+                  </a:lnTo>
+                  <a:lnTo>
+                    <a:pt x="2005430" y="819461"/>
+                  </a:lnTo>
+                  <a:lnTo>
+                    <a:pt x="1933808" y="795824"/>
+                  </a:lnTo>
+                  <a:lnTo>
+                    <a:pt x="1862185" y="771824"/>
+                  </a:lnTo>
+                  <a:lnTo>
+                    <a:pt x="1790563" y="747454"/>
+                  </a:lnTo>
+                  <a:lnTo>
+                    <a:pt x="1718940" y="722710"/>
+                  </a:lnTo>
+                  <a:lnTo>
+                    <a:pt x="1647318" y="697585"/>
+                  </a:lnTo>
+                  <a:lnTo>
+                    <a:pt x="1575695" y="672073"/>
+                  </a:lnTo>
+                  <a:lnTo>
+                    <a:pt x="1504073" y="646169"/>
+                  </a:lnTo>
+                  <a:lnTo>
+                    <a:pt x="1432450" y="619867"/>
+                  </a:lnTo>
+                  <a:lnTo>
+                    <a:pt x="1360827" y="593161"/>
+                  </a:lnTo>
+                  <a:lnTo>
+                    <a:pt x="1289205" y="566043"/>
+                  </a:lnTo>
+                  <a:lnTo>
+                    <a:pt x="1217582" y="538509"/>
+                  </a:lnTo>
+                  <a:lnTo>
+                    <a:pt x="1145960" y="510551"/>
+                  </a:lnTo>
+                  <a:lnTo>
+                    <a:pt x="1074337" y="482163"/>
+                  </a:lnTo>
+                  <a:lnTo>
+                    <a:pt x="1002715" y="453339"/>
+                  </a:lnTo>
+                  <a:lnTo>
+                    <a:pt x="931092" y="424071"/>
+                  </a:lnTo>
+                  <a:lnTo>
+                    <a:pt x="859470" y="394353"/>
+                  </a:lnTo>
+                  <a:lnTo>
+                    <a:pt x="787847" y="364178"/>
+                  </a:lnTo>
+                  <a:lnTo>
+                    <a:pt x="716225" y="333539"/>
+                  </a:lnTo>
+                  <a:lnTo>
+                    <a:pt x="644602" y="302429"/>
+                  </a:lnTo>
+                  <a:lnTo>
+                    <a:pt x="572980" y="270840"/>
+                  </a:lnTo>
+                  <a:lnTo>
+                    <a:pt x="501357" y="238766"/>
+                  </a:lnTo>
+                  <a:lnTo>
+                    <a:pt x="429735" y="206198"/>
+                  </a:lnTo>
+                  <a:lnTo>
+                    <a:pt x="358112" y="173130"/>
+                  </a:lnTo>
+                  <a:lnTo>
+                    <a:pt x="286490" y="139552"/>
+                  </a:lnTo>
+                  <a:lnTo>
+                    <a:pt x="214867" y="105459"/>
+                  </a:lnTo>
+                  <a:lnTo>
+                    <a:pt x="143245" y="70841"/>
+                  </a:lnTo>
+                  <a:lnTo>
+                    <a:pt x="71622" y="35690"/>
                   </a:lnTo>
                   <a:lnTo>
                     <a:pt x="0" y="0"/>
@@ -3833,171 +3974,189 @@
           </p:nvSpPr>
           <p:spPr>
             <a:xfrm>
-              <a:off x="4553697" y="2073503"/>
-              <a:ext cx="3708981" cy="3379143"/>
+              <a:off x="4152792" y="2073503"/>
+              <a:ext cx="4109887" cy="3322535"/>
             </a:xfrm>
             <a:custGeom>
               <a:avLst/>
               <a:pathLst>
-                <a:path w="3708981" h="3379143">
+                <a:path w="4109887" h="3322535">
                   <a:moveTo>
                     <a:pt x="0" y="0"/>
                   </a:moveTo>
                   <a:lnTo>
-                    <a:pt x="56232" y="181569"/>
-                  </a:lnTo>
-                  <a:lnTo>
-                    <a:pt x="127855" y="397694"/>
-                  </a:lnTo>
-                  <a:lnTo>
-                    <a:pt x="199477" y="599674"/>
-                  </a:lnTo>
-                  <a:lnTo>
-                    <a:pt x="271100" y="788434"/>
-                  </a:lnTo>
-                  <a:lnTo>
-                    <a:pt x="342722" y="964841"/>
-                  </a:lnTo>
-                  <a:lnTo>
-                    <a:pt x="414345" y="1129701"/>
-                  </a:lnTo>
-                  <a:lnTo>
-                    <a:pt x="485968" y="1283772"/>
-                  </a:lnTo>
-                  <a:lnTo>
-                    <a:pt x="557590" y="1427759"/>
-                  </a:lnTo>
-                  <a:lnTo>
-                    <a:pt x="629213" y="1562321"/>
-                  </a:lnTo>
-                  <a:lnTo>
-                    <a:pt x="700835" y="1688077"/>
-                  </a:lnTo>
-                  <a:lnTo>
-                    <a:pt x="772458" y="1805603"/>
-                  </a:lnTo>
-                  <a:lnTo>
-                    <a:pt x="844080" y="1915436"/>
-                  </a:lnTo>
-                  <a:lnTo>
-                    <a:pt x="915703" y="2018081"/>
-                  </a:lnTo>
-                  <a:lnTo>
-                    <a:pt x="987325" y="2114007"/>
-                  </a:lnTo>
-                  <a:lnTo>
-                    <a:pt x="1058948" y="2203656"/>
-                  </a:lnTo>
-                  <a:lnTo>
-                    <a:pt x="1130570" y="2287437"/>
-                  </a:lnTo>
-                  <a:lnTo>
-                    <a:pt x="1202193" y="2365734"/>
-                  </a:lnTo>
-                  <a:lnTo>
-                    <a:pt x="1273815" y="2438908"/>
-                  </a:lnTo>
-                  <a:lnTo>
-                    <a:pt x="1345438" y="2507291"/>
-                  </a:lnTo>
-                  <a:lnTo>
-                    <a:pt x="1417060" y="2571200"/>
-                  </a:lnTo>
-                  <a:lnTo>
-                    <a:pt x="1488683" y="2630925"/>
-                  </a:lnTo>
-                  <a:lnTo>
-                    <a:pt x="1560305" y="2686742"/>
-                  </a:lnTo>
-                  <a:lnTo>
-                    <a:pt x="1631928" y="2738905"/>
-                  </a:lnTo>
-                  <a:lnTo>
-                    <a:pt x="1703550" y="2787654"/>
-                  </a:lnTo>
-                  <a:lnTo>
-                    <a:pt x="1775173" y="2833213"/>
-                  </a:lnTo>
-                  <a:lnTo>
-                    <a:pt x="1846795" y="2875790"/>
-                  </a:lnTo>
-                  <a:lnTo>
-                    <a:pt x="1918418" y="2915580"/>
-                  </a:lnTo>
-                  <a:lnTo>
-                    <a:pt x="1990041" y="2952766"/>
-                  </a:lnTo>
-                  <a:lnTo>
-                    <a:pt x="2061663" y="2987519"/>
-                  </a:lnTo>
-                  <a:lnTo>
-                    <a:pt x="2133286" y="3019996"/>
-                  </a:lnTo>
-                  <a:lnTo>
-                    <a:pt x="2204908" y="3050349"/>
-                  </a:lnTo>
-                  <a:lnTo>
-                    <a:pt x="2276531" y="3078714"/>
-                  </a:lnTo>
-                  <a:lnTo>
-                    <a:pt x="2348153" y="3105223"/>
-                  </a:lnTo>
-                  <a:lnTo>
-                    <a:pt x="2419776" y="3129997"/>
-                  </a:lnTo>
-                  <a:lnTo>
-                    <a:pt x="2491398" y="3153150"/>
-                  </a:lnTo>
-                  <a:lnTo>
-                    <a:pt x="2563021" y="3174787"/>
-                  </a:lnTo>
-                  <a:lnTo>
-                    <a:pt x="2634643" y="3195008"/>
-                  </a:lnTo>
-                  <a:lnTo>
-                    <a:pt x="2706266" y="3213906"/>
-                  </a:lnTo>
-                  <a:lnTo>
-                    <a:pt x="2777888" y="3231567"/>
-                  </a:lnTo>
-                  <a:lnTo>
-                    <a:pt x="2849511" y="3248072"/>
-                  </a:lnTo>
-                  <a:lnTo>
-                    <a:pt x="2921133" y="3263497"/>
-                  </a:lnTo>
-                  <a:lnTo>
-                    <a:pt x="2992756" y="3277912"/>
-                  </a:lnTo>
-                  <a:lnTo>
-                    <a:pt x="3064378" y="3291384"/>
-                  </a:lnTo>
-                  <a:lnTo>
-                    <a:pt x="3136001" y="3303974"/>
-                  </a:lnTo>
-                  <a:lnTo>
-                    <a:pt x="3207623" y="3315740"/>
-                  </a:lnTo>
-                  <a:lnTo>
-                    <a:pt x="3279246" y="3326735"/>
-                  </a:lnTo>
-                  <a:lnTo>
-                    <a:pt x="3350869" y="3337012"/>
-                  </a:lnTo>
-                  <a:lnTo>
-                    <a:pt x="3422491" y="3346615"/>
-                  </a:lnTo>
-                  <a:lnTo>
-                    <a:pt x="3494114" y="3355591"/>
-                  </a:lnTo>
-                  <a:lnTo>
-                    <a:pt x="3565736" y="3363978"/>
-                  </a:lnTo>
-                  <a:lnTo>
-                    <a:pt x="3637359" y="3371817"/>
-                  </a:lnTo>
-                  <a:lnTo>
-                    <a:pt x="3708981" y="3379143"/>
+                    <a:pt x="27403" y="71810"/>
+                  </a:lnTo>
+                  <a:lnTo>
+                    <a:pt x="99025" y="249712"/>
+                  </a:lnTo>
+                  <a:lnTo>
+                    <a:pt x="170648" y="418337"/>
+                  </a:lnTo>
+                  <a:lnTo>
+                    <a:pt x="242270" y="578171"/>
+                  </a:lnTo>
+                  <a:lnTo>
+                    <a:pt x="313893" y="729670"/>
+                  </a:lnTo>
+                  <a:lnTo>
+                    <a:pt x="385515" y="873271"/>
+                  </a:lnTo>
+                  <a:lnTo>
+                    <a:pt x="457138" y="1009383"/>
+                  </a:lnTo>
+                  <a:lnTo>
+                    <a:pt x="528760" y="1138399"/>
+                  </a:lnTo>
+                  <a:lnTo>
+                    <a:pt x="600383" y="1260688"/>
+                  </a:lnTo>
+                  <a:lnTo>
+                    <a:pt x="672006" y="1376600"/>
+                  </a:lnTo>
+                  <a:lnTo>
+                    <a:pt x="743628" y="1486469"/>
+                  </a:lnTo>
+                  <a:lnTo>
+                    <a:pt x="815251" y="1590609"/>
+                  </a:lnTo>
+                  <a:lnTo>
+                    <a:pt x="886873" y="1689319"/>
+                  </a:lnTo>
+                  <a:lnTo>
+                    <a:pt x="958496" y="1782882"/>
+                  </a:lnTo>
+                  <a:lnTo>
+                    <a:pt x="1030118" y="1871567"/>
+                  </a:lnTo>
+                  <a:lnTo>
+                    <a:pt x="1101741" y="1955627"/>
+                  </a:lnTo>
+                  <a:lnTo>
+                    <a:pt x="1173363" y="2035305"/>
+                  </a:lnTo>
+                  <a:lnTo>
+                    <a:pt x="1244986" y="2110828"/>
+                  </a:lnTo>
+                  <a:lnTo>
+                    <a:pt x="1316608" y="2182413"/>
+                  </a:lnTo>
+                  <a:lnTo>
+                    <a:pt x="1388231" y="2250266"/>
+                  </a:lnTo>
+                  <a:lnTo>
+                    <a:pt x="1459853" y="2314581"/>
+                  </a:lnTo>
+                  <a:lnTo>
+                    <a:pt x="1531476" y="2375542"/>
+                  </a:lnTo>
+                  <a:lnTo>
+                    <a:pt x="1603098" y="2433325"/>
+                  </a:lnTo>
+                  <a:lnTo>
+                    <a:pt x="1674721" y="2488095"/>
+                  </a:lnTo>
+                  <a:lnTo>
+                    <a:pt x="1746343" y="2540009"/>
+                  </a:lnTo>
+                  <a:lnTo>
+                    <a:pt x="1817966" y="2589217"/>
+                  </a:lnTo>
+                  <a:lnTo>
+                    <a:pt x="1889588" y="2635858"/>
+                  </a:lnTo>
+                  <a:lnTo>
+                    <a:pt x="1961211" y="2680068"/>
+                  </a:lnTo>
+                  <a:lnTo>
+                    <a:pt x="2032833" y="2721973"/>
+                  </a:lnTo>
+                  <a:lnTo>
+                    <a:pt x="2104456" y="2761692"/>
+                  </a:lnTo>
+                  <a:lnTo>
+                    <a:pt x="2176079" y="2799341"/>
+                  </a:lnTo>
+                  <a:lnTo>
+                    <a:pt x="2247701" y="2835026"/>
+                  </a:lnTo>
+                  <a:lnTo>
+                    <a:pt x="2319324" y="2868851"/>
+                  </a:lnTo>
+                  <a:lnTo>
+                    <a:pt x="2390946" y="2900912"/>
+                  </a:lnTo>
+                  <a:lnTo>
+                    <a:pt x="2462569" y="2931302"/>
+                  </a:lnTo>
+                  <a:lnTo>
+                    <a:pt x="2534191" y="2960107"/>
+                  </a:lnTo>
+                  <a:lnTo>
+                    <a:pt x="2605814" y="2987410"/>
+                  </a:lnTo>
+                  <a:lnTo>
+                    <a:pt x="2677436" y="3013289"/>
+                  </a:lnTo>
+                  <a:lnTo>
+                    <a:pt x="2749059" y="3037820"/>
+                  </a:lnTo>
+                  <a:lnTo>
+                    <a:pt x="2820681" y="3061071"/>
+                  </a:lnTo>
+                  <a:lnTo>
+                    <a:pt x="2892304" y="3083109"/>
+                  </a:lnTo>
+                  <a:lnTo>
+                    <a:pt x="2963926" y="3103999"/>
+                  </a:lnTo>
+                  <a:lnTo>
+                    <a:pt x="3035549" y="3123799"/>
+                  </a:lnTo>
+                  <a:lnTo>
+                    <a:pt x="3107171" y="3142567"/>
+                  </a:lnTo>
+                  <a:lnTo>
+                    <a:pt x="3178794" y="3160357"/>
+                  </a:lnTo>
+                  <a:lnTo>
+                    <a:pt x="3250416" y="3177219"/>
+                  </a:lnTo>
+                  <a:lnTo>
+                    <a:pt x="3322039" y="3193201"/>
+                  </a:lnTo>
+                  <a:lnTo>
+                    <a:pt x="3393661" y="3208351"/>
+                  </a:lnTo>
+                  <a:lnTo>
+                    <a:pt x="3465284" y="3222710"/>
+                  </a:lnTo>
+                  <a:lnTo>
+                    <a:pt x="3536907" y="3236321"/>
+                  </a:lnTo>
+                  <a:lnTo>
+                    <a:pt x="3608529" y="3249222"/>
+                  </a:lnTo>
+                  <a:lnTo>
+                    <a:pt x="3680152" y="3261450"/>
+                  </a:lnTo>
+                  <a:lnTo>
+                    <a:pt x="3751774" y="3273041"/>
+                  </a:lnTo>
+                  <a:lnTo>
+                    <a:pt x="3823397" y="3284027"/>
+                  </a:lnTo>
+                  <a:lnTo>
+                    <a:pt x="3895019" y="3294441"/>
+                  </a:lnTo>
+                  <a:lnTo>
+                    <a:pt x="3966642" y="3304311"/>
+                  </a:lnTo>
+                  <a:lnTo>
+                    <a:pt x="4038264" y="3313667"/>
+                  </a:lnTo>
+                  <a:lnTo>
+                    <a:pt x="4109887" y="3322535"/>
                   </a:lnTo>
                 </a:path>
               </a:pathLst>
@@ -4737,7 +4896,7 @@
                   <a:latin typeface="Helvetica"/>
                   <a:cs typeface="Helvetica"/>
                 </a:rPr>
-                <a:t>HR per 1 mL/min: 0.92 (0.87-0.96)  |  per IQR (Δ = 18.2): 0.20 (0.09-0.49)  |  IQR: [-11.5, 6.7]</a:t>
+                <a:t>HR per 1 mL/min: 0.93 (0.89-0.98)  |  per IQR (Δ = 18.2): 0.28 (0.12-0.70)  |  IQR: [-11.5, 6.7]</a:t>
               </a:r>
             </a:p>
           </p:txBody>

--- a/docs/plots/carbo/jx_carbo_linsubhr_egfrdisc_death.pptx
+++ b/docs/plots/carbo/jx_carbo_linsubhr_egfrdisc_death.pptx
@@ -3002,456 +3002,423 @@
           </p:nvSpPr>
           <p:spPr>
             <a:xfrm>
-              <a:off x="1172049" y="2073503"/>
-              <a:ext cx="7090630" cy="3433771"/>
+              <a:off x="1853654" y="2073503"/>
+              <a:ext cx="6409024" cy="3437711"/>
             </a:xfrm>
             <a:custGeom>
               <a:avLst/>
               <a:pathLst>
-                <a:path w="7090630" h="3433771">
+                <a:path w="6409024" h="3437711">
                   <a:moveTo>
-                    <a:pt x="3781059" y="0"/>
+                    <a:pt x="3131288" y="0"/>
                   </a:moveTo>
                   <a:lnTo>
-                    <a:pt x="3795993" y="68499"/>
-                  </a:lnTo>
-                  <a:lnTo>
-                    <a:pt x="3867616" y="368172"/>
-                  </a:lnTo>
-                  <a:lnTo>
-                    <a:pt x="3939238" y="641551"/>
-                  </a:lnTo>
-                  <a:lnTo>
-                    <a:pt x="4010861" y="890941"/>
-                  </a:lnTo>
-                  <a:lnTo>
-                    <a:pt x="4082483" y="1118449"/>
-                  </a:lnTo>
-                  <a:lnTo>
-                    <a:pt x="4154106" y="1325994"/>
-                  </a:lnTo>
-                  <a:lnTo>
-                    <a:pt x="4225729" y="1515328"/>
-                  </a:lnTo>
-                  <a:lnTo>
-                    <a:pt x="4297351" y="1688048"/>
-                  </a:lnTo>
-                  <a:lnTo>
-                    <a:pt x="4368974" y="1845613"/>
-                  </a:lnTo>
-                  <a:lnTo>
-                    <a:pt x="4440596" y="1989352"/>
-                  </a:lnTo>
-                  <a:lnTo>
-                    <a:pt x="4512219" y="2120479"/>
-                  </a:lnTo>
-                  <a:lnTo>
-                    <a:pt x="4583841" y="2240100"/>
-                  </a:lnTo>
-                  <a:lnTo>
-                    <a:pt x="4655464" y="2349225"/>
-                  </a:lnTo>
-                  <a:lnTo>
-                    <a:pt x="4727086" y="2448774"/>
-                  </a:lnTo>
-                  <a:lnTo>
-                    <a:pt x="4798709" y="2539589"/>
-                  </a:lnTo>
-                  <a:lnTo>
-                    <a:pt x="4870331" y="2622435"/>
-                  </a:lnTo>
-                  <a:lnTo>
-                    <a:pt x="4941954" y="2661715"/>
-                  </a:lnTo>
-                  <a:lnTo>
-                    <a:pt x="5013576" y="2674166"/>
-                  </a:lnTo>
-                  <a:lnTo>
-                    <a:pt x="5085199" y="2686428"/>
-                  </a:lnTo>
-                  <a:lnTo>
-                    <a:pt x="5156821" y="2698505"/>
-                  </a:lnTo>
-                  <a:lnTo>
-                    <a:pt x="5228444" y="2710399"/>
-                  </a:lnTo>
-                  <a:lnTo>
-                    <a:pt x="5300066" y="2722112"/>
-                  </a:lnTo>
-                  <a:lnTo>
-                    <a:pt x="5371689" y="2733648"/>
-                  </a:lnTo>
-                  <a:lnTo>
-                    <a:pt x="5443311" y="2745010"/>
-                  </a:lnTo>
-                  <a:lnTo>
-                    <a:pt x="5514934" y="2756199"/>
-                  </a:lnTo>
-                  <a:lnTo>
-                    <a:pt x="5586557" y="2767219"/>
-                  </a:lnTo>
-                  <a:lnTo>
-                    <a:pt x="5658179" y="2778072"/>
-                  </a:lnTo>
-                  <a:lnTo>
-                    <a:pt x="5729802" y="2788760"/>
-                  </a:lnTo>
-                  <a:lnTo>
-                    <a:pt x="5801424" y="2799287"/>
-                  </a:lnTo>
-                  <a:lnTo>
-                    <a:pt x="5873047" y="2809654"/>
-                  </a:lnTo>
-                  <a:lnTo>
-                    <a:pt x="5944669" y="2819864"/>
-                  </a:lnTo>
-                  <a:lnTo>
-                    <a:pt x="6016292" y="2829919"/>
-                  </a:lnTo>
-                  <a:lnTo>
-                    <a:pt x="6087914" y="2839823"/>
-                  </a:lnTo>
-                  <a:lnTo>
-                    <a:pt x="6159537" y="2849576"/>
-                  </a:lnTo>
-                  <a:lnTo>
-                    <a:pt x="6231159" y="2859181"/>
-                  </a:lnTo>
-                  <a:lnTo>
-                    <a:pt x="6302782" y="2868641"/>
-                  </a:lnTo>
-                  <a:lnTo>
-                    <a:pt x="6374404" y="2877958"/>
-                  </a:lnTo>
-                  <a:lnTo>
-                    <a:pt x="6446027" y="2887134"/>
-                  </a:lnTo>
-                  <a:lnTo>
-                    <a:pt x="6517649" y="2896170"/>
-                  </a:lnTo>
-                  <a:lnTo>
-                    <a:pt x="6589272" y="2905070"/>
-                  </a:lnTo>
-                  <a:lnTo>
-                    <a:pt x="6660894" y="2913835"/>
-                  </a:lnTo>
-                  <a:lnTo>
-                    <a:pt x="6732517" y="2922467"/>
-                  </a:lnTo>
-                  <a:lnTo>
-                    <a:pt x="6804139" y="2930968"/>
-                  </a:lnTo>
-                  <a:lnTo>
-                    <a:pt x="6875762" y="2939341"/>
-                  </a:lnTo>
-                  <a:lnTo>
-                    <a:pt x="6947385" y="2947587"/>
-                  </a:lnTo>
-                  <a:lnTo>
-                    <a:pt x="7019007" y="2955708"/>
-                  </a:lnTo>
-                  <a:lnTo>
-                    <a:pt x="7090630" y="2963706"/>
-                  </a:lnTo>
-                  <a:lnTo>
-                    <a:pt x="7090630" y="3433771"/>
-                  </a:lnTo>
-                  <a:lnTo>
-                    <a:pt x="7019007" y="3428965"/>
-                  </a:lnTo>
-                  <a:lnTo>
-                    <a:pt x="6947385" y="3423695"/>
-                  </a:lnTo>
-                  <a:lnTo>
-                    <a:pt x="6875762" y="3417919"/>
-                  </a:lnTo>
-                  <a:lnTo>
-                    <a:pt x="6804139" y="3411588"/>
-                  </a:lnTo>
-                  <a:lnTo>
-                    <a:pt x="6732517" y="3404647"/>
-                  </a:lnTo>
-                  <a:lnTo>
-                    <a:pt x="6660894" y="3397039"/>
-                  </a:lnTo>
-                  <a:lnTo>
-                    <a:pt x="6589272" y="3388699"/>
-                  </a:lnTo>
-                  <a:lnTo>
-                    <a:pt x="6517649" y="3379557"/>
-                  </a:lnTo>
-                  <a:lnTo>
-                    <a:pt x="6446027" y="3369535"/>
-                  </a:lnTo>
-                  <a:lnTo>
-                    <a:pt x="6374404" y="3358549"/>
-                  </a:lnTo>
-                  <a:lnTo>
-                    <a:pt x="6302782" y="3346507"/>
-                  </a:lnTo>
-                  <a:lnTo>
-                    <a:pt x="6231159" y="3333307"/>
-                  </a:lnTo>
-                  <a:lnTo>
-                    <a:pt x="6159537" y="3318837"/>
-                  </a:lnTo>
-                  <a:lnTo>
-                    <a:pt x="6087914" y="3302975"/>
-                  </a:lnTo>
-                  <a:lnTo>
-                    <a:pt x="6016292" y="3285587"/>
-                  </a:lnTo>
-                  <a:lnTo>
-                    <a:pt x="5944669" y="3266527"/>
-                  </a:lnTo>
-                  <a:lnTo>
-                    <a:pt x="5873047" y="3245634"/>
-                  </a:lnTo>
-                  <a:lnTo>
-                    <a:pt x="5801424" y="3222731"/>
-                  </a:lnTo>
-                  <a:lnTo>
-                    <a:pt x="5729802" y="3197625"/>
-                  </a:lnTo>
-                  <a:lnTo>
-                    <a:pt x="5658179" y="3170104"/>
-                  </a:lnTo>
-                  <a:lnTo>
-                    <a:pt x="5586557" y="3139936"/>
-                  </a:lnTo>
-                  <a:lnTo>
-                    <a:pt x="5514934" y="3106866"/>
-                  </a:lnTo>
-                  <a:lnTo>
-                    <a:pt x="5443311" y="3070616"/>
-                  </a:lnTo>
-                  <a:lnTo>
-                    <a:pt x="5371689" y="3030878"/>
-                  </a:lnTo>
-                  <a:lnTo>
-                    <a:pt x="5300066" y="2987319"/>
-                  </a:lnTo>
-                  <a:lnTo>
-                    <a:pt x="5228444" y="2939570"/>
-                  </a:lnTo>
-                  <a:lnTo>
-                    <a:pt x="5156821" y="2887228"/>
-                  </a:lnTo>
-                  <a:lnTo>
-                    <a:pt x="5085199" y="2829851"/>
-                  </a:lnTo>
-                  <a:lnTo>
-                    <a:pt x="5013576" y="2766956"/>
-                  </a:lnTo>
-                  <a:lnTo>
-                    <a:pt x="4941954" y="2698011"/>
-                  </a:lnTo>
-                  <a:lnTo>
-                    <a:pt x="4870331" y="2649073"/>
-                  </a:lnTo>
-                  <a:lnTo>
-                    <a:pt x="4798709" y="2636236"/>
-                  </a:lnTo>
-                  <a:lnTo>
-                    <a:pt x="4727086" y="2623202"/>
-                  </a:lnTo>
-                  <a:lnTo>
-                    <a:pt x="4655464" y="2609967"/>
-                  </a:lnTo>
-                  <a:lnTo>
-                    <a:pt x="4583841" y="2596529"/>
-                  </a:lnTo>
-                  <a:lnTo>
-                    <a:pt x="4512219" y="2582884"/>
-                  </a:lnTo>
-                  <a:lnTo>
-                    <a:pt x="4440596" y="2569029"/>
-                  </a:lnTo>
-                  <a:lnTo>
-                    <a:pt x="4368974" y="2554961"/>
-                  </a:lnTo>
-                  <a:lnTo>
-                    <a:pt x="4297351" y="2540677"/>
-                  </a:lnTo>
-                  <a:lnTo>
-                    <a:pt x="4225729" y="2526173"/>
-                  </a:lnTo>
-                  <a:lnTo>
-                    <a:pt x="4154106" y="2511446"/>
-                  </a:lnTo>
-                  <a:lnTo>
-                    <a:pt x="4082483" y="2496493"/>
-                  </a:lnTo>
-                  <a:lnTo>
-                    <a:pt x="4010861" y="2481309"/>
-                  </a:lnTo>
-                  <a:lnTo>
-                    <a:pt x="3939238" y="2465892"/>
-                  </a:lnTo>
-                  <a:lnTo>
-                    <a:pt x="3867616" y="2450238"/>
-                  </a:lnTo>
-                  <a:lnTo>
-                    <a:pt x="3795993" y="2434344"/>
-                  </a:lnTo>
-                  <a:lnTo>
-                    <a:pt x="3724371" y="2418204"/>
-                  </a:lnTo>
-                  <a:lnTo>
-                    <a:pt x="3652748" y="2401817"/>
-                  </a:lnTo>
-                  <a:lnTo>
-                    <a:pt x="3581126" y="2385177"/>
-                  </a:lnTo>
-                  <a:lnTo>
-                    <a:pt x="3509503" y="2368282"/>
-                  </a:lnTo>
-                  <a:lnTo>
-                    <a:pt x="3437881" y="2351127"/>
-                  </a:lnTo>
-                  <a:lnTo>
-                    <a:pt x="3366258" y="2333708"/>
-                  </a:lnTo>
-                  <a:lnTo>
-                    <a:pt x="3294636" y="2316021"/>
-                  </a:lnTo>
-                  <a:lnTo>
-                    <a:pt x="3223013" y="2298062"/>
-                  </a:lnTo>
-                  <a:lnTo>
-                    <a:pt x="3151391" y="2279827"/>
-                  </a:lnTo>
-                  <a:lnTo>
-                    <a:pt x="3079768" y="2261311"/>
-                  </a:lnTo>
-                  <a:lnTo>
-                    <a:pt x="3008146" y="2242511"/>
-                  </a:lnTo>
-                  <a:lnTo>
-                    <a:pt x="2936523" y="2223421"/>
-                  </a:lnTo>
-                  <a:lnTo>
-                    <a:pt x="2864901" y="2204038"/>
-                  </a:lnTo>
-                  <a:lnTo>
-                    <a:pt x="2793278" y="2184357"/>
-                  </a:lnTo>
-                  <a:lnTo>
-                    <a:pt x="2721655" y="2164373"/>
-                  </a:lnTo>
-                  <a:lnTo>
-                    <a:pt x="2650033" y="2144082"/>
-                  </a:lnTo>
-                  <a:lnTo>
-                    <a:pt x="2578410" y="2123478"/>
-                  </a:lnTo>
-                  <a:lnTo>
-                    <a:pt x="2506788" y="2102558"/>
-                  </a:lnTo>
-                  <a:lnTo>
-                    <a:pt x="2435165" y="2081316"/>
-                  </a:lnTo>
-                  <a:lnTo>
-                    <a:pt x="2363543" y="2059748"/>
-                  </a:lnTo>
-                  <a:lnTo>
-                    <a:pt x="2291920" y="2037847"/>
-                  </a:lnTo>
-                  <a:lnTo>
-                    <a:pt x="2220298" y="2015610"/>
-                  </a:lnTo>
-                  <a:lnTo>
-                    <a:pt x="2148675" y="1993031"/>
-                  </a:lnTo>
-                  <a:lnTo>
-                    <a:pt x="2077053" y="1970105"/>
-                  </a:lnTo>
-                  <a:lnTo>
-                    <a:pt x="2005430" y="1946826"/>
-                  </a:lnTo>
-                  <a:lnTo>
-                    <a:pt x="1933808" y="1923189"/>
-                  </a:lnTo>
-                  <a:lnTo>
-                    <a:pt x="1862185" y="1899188"/>
-                  </a:lnTo>
-                  <a:lnTo>
-                    <a:pt x="1790563" y="1874819"/>
-                  </a:lnTo>
-                  <a:lnTo>
-                    <a:pt x="1718940" y="1850074"/>
-                  </a:lnTo>
-                  <a:lnTo>
-                    <a:pt x="1647318" y="1824949"/>
-                  </a:lnTo>
-                  <a:lnTo>
-                    <a:pt x="1575695" y="1799438"/>
-                  </a:lnTo>
-                  <a:lnTo>
-                    <a:pt x="1504073" y="1773534"/>
-                  </a:lnTo>
-                  <a:lnTo>
-                    <a:pt x="1432450" y="1747232"/>
-                  </a:lnTo>
-                  <a:lnTo>
-                    <a:pt x="1360827" y="1720526"/>
-                  </a:lnTo>
-                  <a:lnTo>
-                    <a:pt x="1289205" y="1693408"/>
-                  </a:lnTo>
-                  <a:lnTo>
-                    <a:pt x="1217582" y="1665874"/>
-                  </a:lnTo>
-                  <a:lnTo>
-                    <a:pt x="1145960" y="1637916"/>
-                  </a:lnTo>
-                  <a:lnTo>
-                    <a:pt x="1074337" y="1609528"/>
-                  </a:lnTo>
-                  <a:lnTo>
-                    <a:pt x="1002715" y="1580704"/>
-                  </a:lnTo>
-                  <a:lnTo>
-                    <a:pt x="931092" y="1551436"/>
-                  </a:lnTo>
-                  <a:lnTo>
-                    <a:pt x="859470" y="1521718"/>
-                  </a:lnTo>
-                  <a:lnTo>
-                    <a:pt x="787847" y="1491543"/>
-                  </a:lnTo>
-                  <a:lnTo>
-                    <a:pt x="716225" y="1460904"/>
-                  </a:lnTo>
-                  <a:lnTo>
-                    <a:pt x="644602" y="1429794"/>
-                  </a:lnTo>
-                  <a:lnTo>
-                    <a:pt x="572980" y="1398205"/>
-                  </a:lnTo>
-                  <a:lnTo>
-                    <a:pt x="501357" y="1366131"/>
-                  </a:lnTo>
-                  <a:lnTo>
-                    <a:pt x="429735" y="1333563"/>
-                  </a:lnTo>
-                  <a:lnTo>
-                    <a:pt x="358112" y="1300494"/>
-                  </a:lnTo>
-                  <a:lnTo>
-                    <a:pt x="286490" y="1266917"/>
-                  </a:lnTo>
-                  <a:lnTo>
-                    <a:pt x="214867" y="1232824"/>
-                  </a:lnTo>
-                  <a:lnTo>
-                    <a:pt x="143245" y="1198206"/>
-                  </a:lnTo>
-                  <a:lnTo>
-                    <a:pt x="71622" y="1163055"/>
-                  </a:lnTo>
-                  <a:lnTo>
-                    <a:pt x="0" y="1127364"/>
+                    <a:pt x="3186010" y="245283"/>
+                  </a:lnTo>
+                  <a:lnTo>
+                    <a:pt x="3257633" y="537365"/>
+                  </a:lnTo>
+                  <a:lnTo>
+                    <a:pt x="3329255" y="803103"/>
+                  </a:lnTo>
+                  <a:lnTo>
+                    <a:pt x="3400878" y="1044875"/>
+                  </a:lnTo>
+                  <a:lnTo>
+                    <a:pt x="3472501" y="1264840"/>
+                  </a:lnTo>
+                  <a:lnTo>
+                    <a:pt x="3544123" y="1464967"/>
+                  </a:lnTo>
+                  <a:lnTo>
+                    <a:pt x="3615746" y="1647043"/>
+                  </a:lnTo>
+                  <a:lnTo>
+                    <a:pt x="3687368" y="1812699"/>
+                  </a:lnTo>
+                  <a:lnTo>
+                    <a:pt x="3758991" y="1963413"/>
+                  </a:lnTo>
+                  <a:lnTo>
+                    <a:pt x="3830613" y="2100534"/>
+                  </a:lnTo>
+                  <a:lnTo>
+                    <a:pt x="3902236" y="2225288"/>
+                  </a:lnTo>
+                  <a:lnTo>
+                    <a:pt x="3973858" y="2338790"/>
+                  </a:lnTo>
+                  <a:lnTo>
+                    <a:pt x="4045481" y="2442056"/>
+                  </a:lnTo>
+                  <a:lnTo>
+                    <a:pt x="4117103" y="2536007"/>
+                  </a:lnTo>
+                  <a:lnTo>
+                    <a:pt x="4188726" y="2621485"/>
+                  </a:lnTo>
+                  <a:lnTo>
+                    <a:pt x="4260348" y="2666117"/>
+                  </a:lnTo>
+                  <a:lnTo>
+                    <a:pt x="4331971" y="2685798"/>
+                  </a:lnTo>
+                  <a:lnTo>
+                    <a:pt x="4403593" y="2705006"/>
+                  </a:lnTo>
+                  <a:lnTo>
+                    <a:pt x="4475216" y="2723752"/>
+                  </a:lnTo>
+                  <a:lnTo>
+                    <a:pt x="4546838" y="2742046"/>
+                  </a:lnTo>
+                  <a:lnTo>
+                    <a:pt x="4618461" y="2759900"/>
+                  </a:lnTo>
+                  <a:lnTo>
+                    <a:pt x="4690083" y="2777324"/>
+                  </a:lnTo>
+                  <a:lnTo>
+                    <a:pt x="4761706" y="2794329"/>
+                  </a:lnTo>
+                  <a:lnTo>
+                    <a:pt x="4833328" y="2810925"/>
+                  </a:lnTo>
+                  <a:lnTo>
+                    <a:pt x="4904951" y="2827121"/>
+                  </a:lnTo>
+                  <a:lnTo>
+                    <a:pt x="4976574" y="2842927"/>
+                  </a:lnTo>
+                  <a:lnTo>
+                    <a:pt x="5048196" y="2858352"/>
+                  </a:lnTo>
+                  <a:lnTo>
+                    <a:pt x="5119819" y="2873407"/>
+                  </a:lnTo>
+                  <a:lnTo>
+                    <a:pt x="5191441" y="2888098"/>
+                  </a:lnTo>
+                  <a:lnTo>
+                    <a:pt x="5263064" y="2902437"/>
+                  </a:lnTo>
+                  <a:lnTo>
+                    <a:pt x="5334686" y="2916430"/>
+                  </a:lnTo>
+                  <a:lnTo>
+                    <a:pt x="5406309" y="2930086"/>
+                  </a:lnTo>
+                  <a:lnTo>
+                    <a:pt x="5477931" y="2943414"/>
+                  </a:lnTo>
+                  <a:lnTo>
+                    <a:pt x="5549554" y="2956420"/>
+                  </a:lnTo>
+                  <a:lnTo>
+                    <a:pt x="5621176" y="2969114"/>
+                  </a:lnTo>
+                  <a:lnTo>
+                    <a:pt x="5692799" y="2981502"/>
+                  </a:lnTo>
+                  <a:lnTo>
+                    <a:pt x="5764421" y="2993592"/>
+                  </a:lnTo>
+                  <a:lnTo>
+                    <a:pt x="5836044" y="3005391"/>
+                  </a:lnTo>
+                  <a:lnTo>
+                    <a:pt x="5907666" y="3016906"/>
+                  </a:lnTo>
+                  <a:lnTo>
+                    <a:pt x="5979289" y="3028143"/>
+                  </a:lnTo>
+                  <a:lnTo>
+                    <a:pt x="6050911" y="3039110"/>
+                  </a:lnTo>
+                  <a:lnTo>
+                    <a:pt x="6122534" y="3049813"/>
+                  </a:lnTo>
+                  <a:lnTo>
+                    <a:pt x="6194156" y="3060259"/>
+                  </a:lnTo>
+                  <a:lnTo>
+                    <a:pt x="6265779" y="3070453"/>
+                  </a:lnTo>
+                  <a:lnTo>
+                    <a:pt x="6337402" y="3080402"/>
+                  </a:lnTo>
+                  <a:lnTo>
+                    <a:pt x="6409024" y="3090111"/>
+                  </a:lnTo>
+                  <a:lnTo>
+                    <a:pt x="6409024" y="3437711"/>
+                  </a:lnTo>
+                  <a:lnTo>
+                    <a:pt x="6337402" y="3433148"/>
+                  </a:lnTo>
+                  <a:lnTo>
+                    <a:pt x="6265779" y="3428132"/>
+                  </a:lnTo>
+                  <a:lnTo>
+                    <a:pt x="6194156" y="3422619"/>
+                  </a:lnTo>
+                  <a:lnTo>
+                    <a:pt x="6122534" y="3416559"/>
+                  </a:lnTo>
+                  <a:lnTo>
+                    <a:pt x="6050911" y="3409898"/>
+                  </a:lnTo>
+                  <a:lnTo>
+                    <a:pt x="5979289" y="3402578"/>
+                  </a:lnTo>
+                  <a:lnTo>
+                    <a:pt x="5907666" y="3394531"/>
+                  </a:lnTo>
+                  <a:lnTo>
+                    <a:pt x="5836044" y="3385687"/>
+                  </a:lnTo>
+                  <a:lnTo>
+                    <a:pt x="5764421" y="3375966"/>
+                  </a:lnTo>
+                  <a:lnTo>
+                    <a:pt x="5692799" y="3365282"/>
+                  </a:lnTo>
+                  <a:lnTo>
+                    <a:pt x="5621176" y="3353538"/>
+                  </a:lnTo>
+                  <a:lnTo>
+                    <a:pt x="5549554" y="3340630"/>
+                  </a:lnTo>
+                  <a:lnTo>
+                    <a:pt x="5477931" y="3326443"/>
+                  </a:lnTo>
+                  <a:lnTo>
+                    <a:pt x="5406309" y="3310849"/>
+                  </a:lnTo>
+                  <a:lnTo>
+                    <a:pt x="5334686" y="3293709"/>
+                  </a:lnTo>
+                  <a:lnTo>
+                    <a:pt x="5263064" y="3274870"/>
+                  </a:lnTo>
+                  <a:lnTo>
+                    <a:pt x="5191441" y="3254164"/>
+                  </a:lnTo>
+                  <a:lnTo>
+                    <a:pt x="5119819" y="3231405"/>
+                  </a:lnTo>
+                  <a:lnTo>
+                    <a:pt x="5048196" y="3206390"/>
+                  </a:lnTo>
+                  <a:lnTo>
+                    <a:pt x="4976574" y="3178895"/>
+                  </a:lnTo>
+                  <a:lnTo>
+                    <a:pt x="4904951" y="3148674"/>
+                  </a:lnTo>
+                  <a:lnTo>
+                    <a:pt x="4833328" y="3115458"/>
+                  </a:lnTo>
+                  <a:lnTo>
+                    <a:pt x="4761706" y="3078948"/>
+                  </a:lnTo>
+                  <a:lnTo>
+                    <a:pt x="4690083" y="3038820"/>
+                  </a:lnTo>
+                  <a:lnTo>
+                    <a:pt x="4618461" y="2994713"/>
+                  </a:lnTo>
+                  <a:lnTo>
+                    <a:pt x="4546838" y="2946234"/>
+                  </a:lnTo>
+                  <a:lnTo>
+                    <a:pt x="4475216" y="2892949"/>
+                  </a:lnTo>
+                  <a:lnTo>
+                    <a:pt x="4403593" y="2834382"/>
+                  </a:lnTo>
+                  <a:lnTo>
+                    <a:pt x="4331971" y="2770009"/>
+                  </a:lnTo>
+                  <a:lnTo>
+                    <a:pt x="4260348" y="2699254"/>
+                  </a:lnTo>
+                  <a:lnTo>
+                    <a:pt x="4188726" y="2645949"/>
+                  </a:lnTo>
+                  <a:lnTo>
+                    <a:pt x="4117103" y="2625285"/>
+                  </a:lnTo>
+                  <a:lnTo>
+                    <a:pt x="4045481" y="2604111"/>
+                  </a:lnTo>
+                  <a:lnTo>
+                    <a:pt x="3973858" y="2582414"/>
+                  </a:lnTo>
+                  <a:lnTo>
+                    <a:pt x="3902236" y="2560182"/>
+                  </a:lnTo>
+                  <a:lnTo>
+                    <a:pt x="3830613" y="2537402"/>
+                  </a:lnTo>
+                  <a:lnTo>
+                    <a:pt x="3758991" y="2514060"/>
+                  </a:lnTo>
+                  <a:lnTo>
+                    <a:pt x="3687368" y="2490142"/>
+                  </a:lnTo>
+                  <a:lnTo>
+                    <a:pt x="3615746" y="2465635"/>
+                  </a:lnTo>
+                  <a:lnTo>
+                    <a:pt x="3544123" y="2440523"/>
+                  </a:lnTo>
+                  <a:lnTo>
+                    <a:pt x="3472501" y="2414791"/>
+                  </a:lnTo>
+                  <a:lnTo>
+                    <a:pt x="3400878" y="2388425"/>
+                  </a:lnTo>
+                  <a:lnTo>
+                    <a:pt x="3329255" y="2361408"/>
+                  </a:lnTo>
+                  <a:lnTo>
+                    <a:pt x="3257633" y="2333725"/>
+                  </a:lnTo>
+                  <a:lnTo>
+                    <a:pt x="3186010" y="2305360"/>
+                  </a:lnTo>
+                  <a:lnTo>
+                    <a:pt x="3114388" y="2276294"/>
+                  </a:lnTo>
+                  <a:lnTo>
+                    <a:pt x="3042765" y="2246512"/>
+                  </a:lnTo>
+                  <a:lnTo>
+                    <a:pt x="2971143" y="2215995"/>
+                  </a:lnTo>
+                  <a:lnTo>
+                    <a:pt x="2899520" y="2184725"/>
+                  </a:lnTo>
+                  <a:lnTo>
+                    <a:pt x="2827898" y="2152684"/>
+                  </a:lnTo>
+                  <a:lnTo>
+                    <a:pt x="2756275" y="2119853"/>
+                  </a:lnTo>
+                  <a:lnTo>
+                    <a:pt x="2684653" y="2086212"/>
+                  </a:lnTo>
+                  <a:lnTo>
+                    <a:pt x="2613030" y="2051741"/>
+                  </a:lnTo>
+                  <a:lnTo>
+                    <a:pt x="2541408" y="2016420"/>
+                  </a:lnTo>
+                  <a:lnTo>
+                    <a:pt x="2469785" y="1980228"/>
+                  </a:lnTo>
+                  <a:lnTo>
+                    <a:pt x="2398163" y="1943143"/>
+                  </a:lnTo>
+                  <a:lnTo>
+                    <a:pt x="2326540" y="1905144"/>
+                  </a:lnTo>
+                  <a:lnTo>
+                    <a:pt x="2254918" y="1866207"/>
+                  </a:lnTo>
+                  <a:lnTo>
+                    <a:pt x="2183295" y="1826309"/>
+                  </a:lnTo>
+                  <a:lnTo>
+                    <a:pt x="2111673" y="1785428"/>
+                  </a:lnTo>
+                  <a:lnTo>
+                    <a:pt x="2040050" y="1743538"/>
+                  </a:lnTo>
+                  <a:lnTo>
+                    <a:pt x="1968427" y="1700615"/>
+                  </a:lnTo>
+                  <a:lnTo>
+                    <a:pt x="1896805" y="1656634"/>
+                  </a:lnTo>
+                  <a:lnTo>
+                    <a:pt x="1825182" y="1611567"/>
+                  </a:lnTo>
+                  <a:lnTo>
+                    <a:pt x="1753560" y="1565389"/>
+                  </a:lnTo>
+                  <a:lnTo>
+                    <a:pt x="1681937" y="1518072"/>
+                  </a:lnTo>
+                  <a:lnTo>
+                    <a:pt x="1610315" y="1469588"/>
+                  </a:lnTo>
+                  <a:lnTo>
+                    <a:pt x="1538692" y="1419908"/>
+                  </a:lnTo>
+                  <a:lnTo>
+                    <a:pt x="1467070" y="1369002"/>
+                  </a:lnTo>
+                  <a:lnTo>
+                    <a:pt x="1395447" y="1316841"/>
+                  </a:lnTo>
+                  <a:lnTo>
+                    <a:pt x="1323825" y="1263394"/>
+                  </a:lnTo>
+                  <a:lnTo>
+                    <a:pt x="1252202" y="1208628"/>
+                  </a:lnTo>
+                  <a:lnTo>
+                    <a:pt x="1180580" y="1152511"/>
+                  </a:lnTo>
+                  <a:lnTo>
+                    <a:pt x="1108957" y="1095010"/>
+                  </a:lnTo>
+                  <a:lnTo>
+                    <a:pt x="1037335" y="1036091"/>
+                  </a:lnTo>
+                  <a:lnTo>
+                    <a:pt x="965712" y="975719"/>
+                  </a:lnTo>
+                  <a:lnTo>
+                    <a:pt x="894090" y="913857"/>
+                  </a:lnTo>
+                  <a:lnTo>
+                    <a:pt x="822467" y="850470"/>
+                  </a:lnTo>
+                  <a:lnTo>
+                    <a:pt x="750845" y="785519"/>
+                  </a:lnTo>
+                  <a:lnTo>
+                    <a:pt x="679222" y="718966"/>
+                  </a:lnTo>
+                  <a:lnTo>
+                    <a:pt x="607599" y="650771"/>
+                  </a:lnTo>
+                  <a:lnTo>
+                    <a:pt x="535977" y="580895"/>
+                  </a:lnTo>
+                  <a:lnTo>
+                    <a:pt x="464354" y="509295"/>
+                  </a:lnTo>
+                  <a:lnTo>
+                    <a:pt x="392732" y="435929"/>
+                  </a:lnTo>
+                  <a:lnTo>
+                    <a:pt x="321109" y="360753"/>
+                  </a:lnTo>
+                  <a:lnTo>
+                    <a:pt x="249487" y="283723"/>
+                  </a:lnTo>
+                  <a:lnTo>
+                    <a:pt x="177864" y="204793"/>
+                  </a:lnTo>
+                  <a:lnTo>
+                    <a:pt x="106242" y="123916"/>
+                  </a:lnTo>
+                  <a:lnTo>
+                    <a:pt x="34619" y="41045"/>
                   </a:lnTo>
                   <a:lnTo>
                     <a:pt x="0" y="0"/>
@@ -3480,156 +3447,153 @@
           </p:nvSpPr>
           <p:spPr>
             <a:xfrm>
-              <a:off x="4953108" y="2073503"/>
-              <a:ext cx="3309571" cy="2963706"/>
+              <a:off x="4984943" y="2073503"/>
+              <a:ext cx="3277735" cy="3090111"/>
             </a:xfrm>
             <a:custGeom>
               <a:avLst/>
               <a:pathLst>
-                <a:path w="3309571" h="2963706">
+                <a:path w="3277735" h="3090111">
                   <a:moveTo>
                     <a:pt x="0" y="0"/>
                   </a:moveTo>
                   <a:lnTo>
-                    <a:pt x="14934" y="68499"/>
-                  </a:lnTo>
-                  <a:lnTo>
-                    <a:pt x="86557" y="368172"/>
-                  </a:lnTo>
-                  <a:lnTo>
-                    <a:pt x="158179" y="641551"/>
-                  </a:lnTo>
-                  <a:lnTo>
-                    <a:pt x="229802" y="890941"/>
-                  </a:lnTo>
-                  <a:lnTo>
-                    <a:pt x="301424" y="1118449"/>
-                  </a:lnTo>
-                  <a:lnTo>
-                    <a:pt x="373047" y="1325994"/>
-                  </a:lnTo>
-                  <a:lnTo>
-                    <a:pt x="444670" y="1515328"/>
-                  </a:lnTo>
-                  <a:lnTo>
-                    <a:pt x="516292" y="1688048"/>
-                  </a:lnTo>
-                  <a:lnTo>
-                    <a:pt x="587915" y="1845613"/>
-                  </a:lnTo>
-                  <a:lnTo>
-                    <a:pt x="659537" y="1989352"/>
-                  </a:lnTo>
-                  <a:lnTo>
-                    <a:pt x="731160" y="2120479"/>
-                  </a:lnTo>
-                  <a:lnTo>
-                    <a:pt x="802782" y="2240100"/>
-                  </a:lnTo>
-                  <a:lnTo>
-                    <a:pt x="874405" y="2349225"/>
-                  </a:lnTo>
-                  <a:lnTo>
-                    <a:pt x="946027" y="2448774"/>
-                  </a:lnTo>
-                  <a:lnTo>
-                    <a:pt x="1017650" y="2539589"/>
-                  </a:lnTo>
-                  <a:lnTo>
-                    <a:pt x="1089272" y="2622435"/>
-                  </a:lnTo>
-                  <a:lnTo>
-                    <a:pt x="1160895" y="2661715"/>
-                  </a:lnTo>
-                  <a:lnTo>
-                    <a:pt x="1232517" y="2674166"/>
-                  </a:lnTo>
-                  <a:lnTo>
-                    <a:pt x="1304140" y="2686428"/>
-                  </a:lnTo>
-                  <a:lnTo>
-                    <a:pt x="1375762" y="2698505"/>
-                  </a:lnTo>
-                  <a:lnTo>
-                    <a:pt x="1447385" y="2710399"/>
-                  </a:lnTo>
-                  <a:lnTo>
-                    <a:pt x="1519007" y="2722112"/>
-                  </a:lnTo>
-                  <a:lnTo>
-                    <a:pt x="1590630" y="2733648"/>
-                  </a:lnTo>
-                  <a:lnTo>
-                    <a:pt x="1662252" y="2745010"/>
-                  </a:lnTo>
-                  <a:lnTo>
-                    <a:pt x="1733875" y="2756199"/>
-                  </a:lnTo>
-                  <a:lnTo>
-                    <a:pt x="1805498" y="2767219"/>
-                  </a:lnTo>
-                  <a:lnTo>
-                    <a:pt x="1877120" y="2778072"/>
-                  </a:lnTo>
-                  <a:lnTo>
-                    <a:pt x="1948743" y="2788760"/>
-                  </a:lnTo>
-                  <a:lnTo>
-                    <a:pt x="2020365" y="2799287"/>
-                  </a:lnTo>
-                  <a:lnTo>
-                    <a:pt x="2091988" y="2809654"/>
-                  </a:lnTo>
-                  <a:lnTo>
-                    <a:pt x="2163610" y="2819864"/>
-                  </a:lnTo>
-                  <a:lnTo>
-                    <a:pt x="2235233" y="2829919"/>
-                  </a:lnTo>
-                  <a:lnTo>
-                    <a:pt x="2306855" y="2839823"/>
-                  </a:lnTo>
-                  <a:lnTo>
-                    <a:pt x="2378478" y="2849576"/>
-                  </a:lnTo>
-                  <a:lnTo>
-                    <a:pt x="2450100" y="2859181"/>
-                  </a:lnTo>
-                  <a:lnTo>
-                    <a:pt x="2521723" y="2868641"/>
-                  </a:lnTo>
-                  <a:lnTo>
-                    <a:pt x="2593345" y="2877958"/>
-                  </a:lnTo>
-                  <a:lnTo>
-                    <a:pt x="2664968" y="2887134"/>
-                  </a:lnTo>
-                  <a:lnTo>
-                    <a:pt x="2736590" y="2896170"/>
-                  </a:lnTo>
-                  <a:lnTo>
-                    <a:pt x="2808213" y="2905070"/>
-                  </a:lnTo>
-                  <a:lnTo>
-                    <a:pt x="2879835" y="2913835"/>
-                  </a:lnTo>
-                  <a:lnTo>
-                    <a:pt x="2951458" y="2922467"/>
-                  </a:lnTo>
-                  <a:lnTo>
-                    <a:pt x="3023080" y="2930968"/>
-                  </a:lnTo>
-                  <a:lnTo>
-                    <a:pt x="3094703" y="2939341"/>
-                  </a:lnTo>
-                  <a:lnTo>
-                    <a:pt x="3166326" y="2947587"/>
-                  </a:lnTo>
-                  <a:lnTo>
-                    <a:pt x="3237948" y="2955708"/>
-                  </a:lnTo>
-                  <a:lnTo>
-                    <a:pt x="3309571" y="2963706"/>
+                    <a:pt x="54722" y="245283"/>
+                  </a:lnTo>
+                  <a:lnTo>
+                    <a:pt x="126344" y="537365"/>
+                  </a:lnTo>
+                  <a:lnTo>
+                    <a:pt x="197967" y="803103"/>
+                  </a:lnTo>
+                  <a:lnTo>
+                    <a:pt x="269589" y="1044875"/>
+                  </a:lnTo>
+                  <a:lnTo>
+                    <a:pt x="341212" y="1264840"/>
+                  </a:lnTo>
+                  <a:lnTo>
+                    <a:pt x="412834" y="1464967"/>
+                  </a:lnTo>
+                  <a:lnTo>
+                    <a:pt x="484457" y="1647043"/>
+                  </a:lnTo>
+                  <a:lnTo>
+                    <a:pt x="556079" y="1812699"/>
+                  </a:lnTo>
+                  <a:lnTo>
+                    <a:pt x="627702" y="1963413"/>
+                  </a:lnTo>
+                  <a:lnTo>
+                    <a:pt x="699324" y="2100534"/>
+                  </a:lnTo>
+                  <a:lnTo>
+                    <a:pt x="770947" y="2225288"/>
+                  </a:lnTo>
+                  <a:lnTo>
+                    <a:pt x="842569" y="2338790"/>
+                  </a:lnTo>
+                  <a:lnTo>
+                    <a:pt x="914192" y="2442056"/>
+                  </a:lnTo>
+                  <a:lnTo>
+                    <a:pt x="985814" y="2536007"/>
+                  </a:lnTo>
+                  <a:lnTo>
+                    <a:pt x="1057437" y="2621485"/>
+                  </a:lnTo>
+                  <a:lnTo>
+                    <a:pt x="1129059" y="2666117"/>
+                  </a:lnTo>
+                  <a:lnTo>
+                    <a:pt x="1200682" y="2685798"/>
+                  </a:lnTo>
+                  <a:lnTo>
+                    <a:pt x="1272305" y="2705006"/>
+                  </a:lnTo>
+                  <a:lnTo>
+                    <a:pt x="1343927" y="2723752"/>
+                  </a:lnTo>
+                  <a:lnTo>
+                    <a:pt x="1415550" y="2742046"/>
+                  </a:lnTo>
+                  <a:lnTo>
+                    <a:pt x="1487172" y="2759900"/>
+                  </a:lnTo>
+                  <a:lnTo>
+                    <a:pt x="1558795" y="2777324"/>
+                  </a:lnTo>
+                  <a:lnTo>
+                    <a:pt x="1630417" y="2794329"/>
+                  </a:lnTo>
+                  <a:lnTo>
+                    <a:pt x="1702040" y="2810925"/>
+                  </a:lnTo>
+                  <a:lnTo>
+                    <a:pt x="1773662" y="2827121"/>
+                  </a:lnTo>
+                  <a:lnTo>
+                    <a:pt x="1845285" y="2842927"/>
+                  </a:lnTo>
+                  <a:lnTo>
+                    <a:pt x="1916907" y="2858352"/>
+                  </a:lnTo>
+                  <a:lnTo>
+                    <a:pt x="1988530" y="2873407"/>
+                  </a:lnTo>
+                  <a:lnTo>
+                    <a:pt x="2060152" y="2888098"/>
+                  </a:lnTo>
+                  <a:lnTo>
+                    <a:pt x="2131775" y="2902437"/>
+                  </a:lnTo>
+                  <a:lnTo>
+                    <a:pt x="2203397" y="2916430"/>
+                  </a:lnTo>
+                  <a:lnTo>
+                    <a:pt x="2275020" y="2930086"/>
+                  </a:lnTo>
+                  <a:lnTo>
+                    <a:pt x="2346642" y="2943414"/>
+                  </a:lnTo>
+                  <a:lnTo>
+                    <a:pt x="2418265" y="2956420"/>
+                  </a:lnTo>
+                  <a:lnTo>
+                    <a:pt x="2489887" y="2969114"/>
+                  </a:lnTo>
+                  <a:lnTo>
+                    <a:pt x="2561510" y="2981502"/>
+                  </a:lnTo>
+                  <a:lnTo>
+                    <a:pt x="2633133" y="2993592"/>
+                  </a:lnTo>
+                  <a:lnTo>
+                    <a:pt x="2704755" y="3005391"/>
+                  </a:lnTo>
+                  <a:lnTo>
+                    <a:pt x="2776378" y="3016906"/>
+                  </a:lnTo>
+                  <a:lnTo>
+                    <a:pt x="2848000" y="3028143"/>
+                  </a:lnTo>
+                  <a:lnTo>
+                    <a:pt x="2919623" y="3039110"/>
+                  </a:lnTo>
+                  <a:lnTo>
+                    <a:pt x="2991245" y="3049813"/>
+                  </a:lnTo>
+                  <a:lnTo>
+                    <a:pt x="3062868" y="3060259"/>
+                  </a:lnTo>
+                  <a:lnTo>
+                    <a:pt x="3134490" y="3070453"/>
+                  </a:lnTo>
+                  <a:lnTo>
+                    <a:pt x="3206113" y="3080402"/>
+                  </a:lnTo>
+                  <a:lnTo>
+                    <a:pt x="3277735" y="3090111"/>
                   </a:lnTo>
                 </a:path>
               </a:pathLst>
@@ -3649,309 +3613,282 @@
           </p:nvSpPr>
           <p:spPr>
             <a:xfrm>
-              <a:off x="1172049" y="3200867"/>
-              <a:ext cx="7090630" cy="2306407"/>
+              <a:off x="1853654" y="2073503"/>
+              <a:ext cx="6409024" cy="3437711"/>
             </a:xfrm>
             <a:custGeom>
               <a:avLst/>
               <a:pathLst>
-                <a:path w="7090630" h="2306407">
+                <a:path w="6409024" h="3437711">
                   <a:moveTo>
-                    <a:pt x="7090630" y="2306407"/>
+                    <a:pt x="6409024" y="3437711"/>
                   </a:moveTo>
                   <a:lnTo>
-                    <a:pt x="7019007" y="2301600"/>
-                  </a:lnTo>
-                  <a:lnTo>
-                    <a:pt x="6947385" y="2296330"/>
-                  </a:lnTo>
-                  <a:lnTo>
-                    <a:pt x="6875762" y="2290554"/>
-                  </a:lnTo>
-                  <a:lnTo>
-                    <a:pt x="6804139" y="2284223"/>
-                  </a:lnTo>
-                  <a:lnTo>
-                    <a:pt x="6732517" y="2277282"/>
-                  </a:lnTo>
-                  <a:lnTo>
-                    <a:pt x="6660894" y="2269674"/>
-                  </a:lnTo>
-                  <a:lnTo>
-                    <a:pt x="6589272" y="2261334"/>
-                  </a:lnTo>
-                  <a:lnTo>
-                    <a:pt x="6517649" y="2252192"/>
-                  </a:lnTo>
-                  <a:lnTo>
-                    <a:pt x="6446027" y="2242170"/>
-                  </a:lnTo>
-                  <a:lnTo>
-                    <a:pt x="6374404" y="2231185"/>
-                  </a:lnTo>
-                  <a:lnTo>
-                    <a:pt x="6302782" y="2219142"/>
-                  </a:lnTo>
-                  <a:lnTo>
-                    <a:pt x="6231159" y="2205942"/>
-                  </a:lnTo>
-                  <a:lnTo>
-                    <a:pt x="6159537" y="2191472"/>
-                  </a:lnTo>
-                  <a:lnTo>
-                    <a:pt x="6087914" y="2175610"/>
-                  </a:lnTo>
-                  <a:lnTo>
-                    <a:pt x="6016292" y="2158222"/>
-                  </a:lnTo>
-                  <a:lnTo>
-                    <a:pt x="5944669" y="2139162"/>
-                  </a:lnTo>
-                  <a:lnTo>
-                    <a:pt x="5873047" y="2118269"/>
-                  </a:lnTo>
-                  <a:lnTo>
-                    <a:pt x="5801424" y="2095366"/>
-                  </a:lnTo>
-                  <a:lnTo>
-                    <a:pt x="5729802" y="2070260"/>
-                  </a:lnTo>
-                  <a:lnTo>
-                    <a:pt x="5658179" y="2042739"/>
-                  </a:lnTo>
-                  <a:lnTo>
-                    <a:pt x="5586557" y="2012571"/>
-                  </a:lnTo>
-                  <a:lnTo>
-                    <a:pt x="5514934" y="1979501"/>
-                  </a:lnTo>
-                  <a:lnTo>
-                    <a:pt x="5443311" y="1943251"/>
-                  </a:lnTo>
-                  <a:lnTo>
-                    <a:pt x="5371689" y="1903514"/>
-                  </a:lnTo>
-                  <a:lnTo>
-                    <a:pt x="5300066" y="1859954"/>
-                  </a:lnTo>
-                  <a:lnTo>
-                    <a:pt x="5228444" y="1812205"/>
-                  </a:lnTo>
-                  <a:lnTo>
-                    <a:pt x="5156821" y="1759863"/>
-                  </a:lnTo>
-                  <a:lnTo>
-                    <a:pt x="5085199" y="1702487"/>
-                  </a:lnTo>
-                  <a:lnTo>
-                    <a:pt x="5013576" y="1639591"/>
-                  </a:lnTo>
-                  <a:lnTo>
-                    <a:pt x="4941954" y="1570646"/>
-                  </a:lnTo>
-                  <a:lnTo>
-                    <a:pt x="4870331" y="1521708"/>
-                  </a:lnTo>
-                  <a:lnTo>
-                    <a:pt x="4798709" y="1508871"/>
-                  </a:lnTo>
-                  <a:lnTo>
-                    <a:pt x="4727086" y="1495837"/>
-                  </a:lnTo>
-                  <a:lnTo>
-                    <a:pt x="4655464" y="1482602"/>
-                  </a:lnTo>
-                  <a:lnTo>
-                    <a:pt x="4583841" y="1469164"/>
-                  </a:lnTo>
-                  <a:lnTo>
-                    <a:pt x="4512219" y="1455519"/>
-                  </a:lnTo>
-                  <a:lnTo>
-                    <a:pt x="4440596" y="1441664"/>
-                  </a:lnTo>
-                  <a:lnTo>
-                    <a:pt x="4368974" y="1427596"/>
-                  </a:lnTo>
-                  <a:lnTo>
-                    <a:pt x="4297351" y="1413312"/>
-                  </a:lnTo>
-                  <a:lnTo>
-                    <a:pt x="4225729" y="1398808"/>
-                  </a:lnTo>
-                  <a:lnTo>
-                    <a:pt x="4154106" y="1384081"/>
-                  </a:lnTo>
-                  <a:lnTo>
-                    <a:pt x="4082483" y="1369128"/>
-                  </a:lnTo>
-                  <a:lnTo>
-                    <a:pt x="4010861" y="1353945"/>
-                  </a:lnTo>
-                  <a:lnTo>
-                    <a:pt x="3939238" y="1338528"/>
-                  </a:lnTo>
-                  <a:lnTo>
-                    <a:pt x="3867616" y="1322874"/>
-                  </a:lnTo>
-                  <a:lnTo>
-                    <a:pt x="3795993" y="1306979"/>
-                  </a:lnTo>
-                  <a:lnTo>
-                    <a:pt x="3724371" y="1290840"/>
-                  </a:lnTo>
-                  <a:lnTo>
-                    <a:pt x="3652748" y="1274452"/>
-                  </a:lnTo>
-                  <a:lnTo>
-                    <a:pt x="3581126" y="1257813"/>
-                  </a:lnTo>
-                  <a:lnTo>
-                    <a:pt x="3509503" y="1240917"/>
-                  </a:lnTo>
-                  <a:lnTo>
-                    <a:pt x="3437881" y="1223762"/>
-                  </a:lnTo>
-                  <a:lnTo>
-                    <a:pt x="3366258" y="1206343"/>
-                  </a:lnTo>
-                  <a:lnTo>
-                    <a:pt x="3294636" y="1188656"/>
-                  </a:lnTo>
-                  <a:lnTo>
-                    <a:pt x="3223013" y="1170697"/>
-                  </a:lnTo>
-                  <a:lnTo>
-                    <a:pt x="3151391" y="1152462"/>
-                  </a:lnTo>
-                  <a:lnTo>
-                    <a:pt x="3079768" y="1133946"/>
-                  </a:lnTo>
-                  <a:lnTo>
-                    <a:pt x="3008146" y="1115146"/>
-                  </a:lnTo>
-                  <a:lnTo>
-                    <a:pt x="2936523" y="1096056"/>
-                  </a:lnTo>
-                  <a:lnTo>
-                    <a:pt x="2864901" y="1076673"/>
-                  </a:lnTo>
-                  <a:lnTo>
-                    <a:pt x="2793278" y="1056992"/>
-                  </a:lnTo>
-                  <a:lnTo>
-                    <a:pt x="2721655" y="1037008"/>
-                  </a:lnTo>
-                  <a:lnTo>
-                    <a:pt x="2650033" y="1016717"/>
-                  </a:lnTo>
-                  <a:lnTo>
-                    <a:pt x="2578410" y="996114"/>
-                  </a:lnTo>
-                  <a:lnTo>
-                    <a:pt x="2506788" y="975193"/>
-                  </a:lnTo>
-                  <a:lnTo>
-                    <a:pt x="2435165" y="953952"/>
-                  </a:lnTo>
-                  <a:lnTo>
-                    <a:pt x="2363543" y="932383"/>
-                  </a:lnTo>
-                  <a:lnTo>
-                    <a:pt x="2291920" y="910483"/>
-                  </a:lnTo>
-                  <a:lnTo>
-                    <a:pt x="2220298" y="888246"/>
-                  </a:lnTo>
-                  <a:lnTo>
-                    <a:pt x="2148675" y="865666"/>
-                  </a:lnTo>
-                  <a:lnTo>
-                    <a:pt x="2077053" y="842740"/>
-                  </a:lnTo>
-                  <a:lnTo>
-                    <a:pt x="2005430" y="819461"/>
-                  </a:lnTo>
-                  <a:lnTo>
-                    <a:pt x="1933808" y="795824"/>
-                  </a:lnTo>
-                  <a:lnTo>
-                    <a:pt x="1862185" y="771824"/>
-                  </a:lnTo>
-                  <a:lnTo>
-                    <a:pt x="1790563" y="747454"/>
-                  </a:lnTo>
-                  <a:lnTo>
-                    <a:pt x="1718940" y="722710"/>
-                  </a:lnTo>
-                  <a:lnTo>
-                    <a:pt x="1647318" y="697585"/>
-                  </a:lnTo>
-                  <a:lnTo>
-                    <a:pt x="1575695" y="672073"/>
-                  </a:lnTo>
-                  <a:lnTo>
-                    <a:pt x="1504073" y="646169"/>
-                  </a:lnTo>
-                  <a:lnTo>
-                    <a:pt x="1432450" y="619867"/>
-                  </a:lnTo>
-                  <a:lnTo>
-                    <a:pt x="1360827" y="593161"/>
-                  </a:lnTo>
-                  <a:lnTo>
-                    <a:pt x="1289205" y="566043"/>
-                  </a:lnTo>
-                  <a:lnTo>
-                    <a:pt x="1217582" y="538509"/>
-                  </a:lnTo>
-                  <a:lnTo>
-                    <a:pt x="1145960" y="510551"/>
-                  </a:lnTo>
-                  <a:lnTo>
-                    <a:pt x="1074337" y="482163"/>
-                  </a:lnTo>
-                  <a:lnTo>
-                    <a:pt x="1002715" y="453339"/>
-                  </a:lnTo>
-                  <a:lnTo>
-                    <a:pt x="931092" y="424071"/>
-                  </a:lnTo>
-                  <a:lnTo>
-                    <a:pt x="859470" y="394353"/>
-                  </a:lnTo>
-                  <a:lnTo>
-                    <a:pt x="787847" y="364178"/>
-                  </a:lnTo>
-                  <a:lnTo>
-                    <a:pt x="716225" y="333539"/>
-                  </a:lnTo>
-                  <a:lnTo>
-                    <a:pt x="644602" y="302429"/>
-                  </a:lnTo>
-                  <a:lnTo>
-                    <a:pt x="572980" y="270840"/>
-                  </a:lnTo>
-                  <a:lnTo>
-                    <a:pt x="501357" y="238766"/>
-                  </a:lnTo>
-                  <a:lnTo>
-                    <a:pt x="429735" y="206198"/>
-                  </a:lnTo>
-                  <a:lnTo>
-                    <a:pt x="358112" y="173130"/>
-                  </a:lnTo>
-                  <a:lnTo>
-                    <a:pt x="286490" y="139552"/>
-                  </a:lnTo>
-                  <a:lnTo>
-                    <a:pt x="214867" y="105459"/>
-                  </a:lnTo>
-                  <a:lnTo>
-                    <a:pt x="143245" y="70841"/>
-                  </a:lnTo>
-                  <a:lnTo>
-                    <a:pt x="71622" y="35690"/>
+                    <a:pt x="6337402" y="3433148"/>
+                  </a:lnTo>
+                  <a:lnTo>
+                    <a:pt x="6265779" y="3428132"/>
+                  </a:lnTo>
+                  <a:lnTo>
+                    <a:pt x="6194156" y="3422619"/>
+                  </a:lnTo>
+                  <a:lnTo>
+                    <a:pt x="6122534" y="3416559"/>
+                  </a:lnTo>
+                  <a:lnTo>
+                    <a:pt x="6050911" y="3409898"/>
+                  </a:lnTo>
+                  <a:lnTo>
+                    <a:pt x="5979289" y="3402578"/>
+                  </a:lnTo>
+                  <a:lnTo>
+                    <a:pt x="5907666" y="3394531"/>
+                  </a:lnTo>
+                  <a:lnTo>
+                    <a:pt x="5836044" y="3385687"/>
+                  </a:lnTo>
+                  <a:lnTo>
+                    <a:pt x="5764421" y="3375966"/>
+                  </a:lnTo>
+                  <a:lnTo>
+                    <a:pt x="5692799" y="3365282"/>
+                  </a:lnTo>
+                  <a:lnTo>
+                    <a:pt x="5621176" y="3353538"/>
+                  </a:lnTo>
+                  <a:lnTo>
+                    <a:pt x="5549554" y="3340630"/>
+                  </a:lnTo>
+                  <a:lnTo>
+                    <a:pt x="5477931" y="3326443"/>
+                  </a:lnTo>
+                  <a:lnTo>
+                    <a:pt x="5406309" y="3310849"/>
+                  </a:lnTo>
+                  <a:lnTo>
+                    <a:pt x="5334686" y="3293709"/>
+                  </a:lnTo>
+                  <a:lnTo>
+                    <a:pt x="5263064" y="3274870"/>
+                  </a:lnTo>
+                  <a:lnTo>
+                    <a:pt x="5191441" y="3254164"/>
+                  </a:lnTo>
+                  <a:lnTo>
+                    <a:pt x="5119819" y="3231405"/>
+                  </a:lnTo>
+                  <a:lnTo>
+                    <a:pt x="5048196" y="3206390"/>
+                  </a:lnTo>
+                  <a:lnTo>
+                    <a:pt x="4976574" y="3178895"/>
+                  </a:lnTo>
+                  <a:lnTo>
+                    <a:pt x="4904951" y="3148674"/>
+                  </a:lnTo>
+                  <a:lnTo>
+                    <a:pt x="4833328" y="3115458"/>
+                  </a:lnTo>
+                  <a:lnTo>
+                    <a:pt x="4761706" y="3078948"/>
+                  </a:lnTo>
+                  <a:lnTo>
+                    <a:pt x="4690083" y="3038820"/>
+                  </a:lnTo>
+                  <a:lnTo>
+                    <a:pt x="4618461" y="2994713"/>
+                  </a:lnTo>
+                  <a:lnTo>
+                    <a:pt x="4546838" y="2946234"/>
+                  </a:lnTo>
+                  <a:lnTo>
+                    <a:pt x="4475216" y="2892949"/>
+                  </a:lnTo>
+                  <a:lnTo>
+                    <a:pt x="4403593" y="2834382"/>
+                  </a:lnTo>
+                  <a:lnTo>
+                    <a:pt x="4331971" y="2770009"/>
+                  </a:lnTo>
+                  <a:lnTo>
+                    <a:pt x="4260348" y="2699254"/>
+                  </a:lnTo>
+                  <a:lnTo>
+                    <a:pt x="4188726" y="2645949"/>
+                  </a:lnTo>
+                  <a:lnTo>
+                    <a:pt x="4117103" y="2625285"/>
+                  </a:lnTo>
+                  <a:lnTo>
+                    <a:pt x="4045481" y="2604111"/>
+                  </a:lnTo>
+                  <a:lnTo>
+                    <a:pt x="3973858" y="2582414"/>
+                  </a:lnTo>
+                  <a:lnTo>
+                    <a:pt x="3902236" y="2560182"/>
+                  </a:lnTo>
+                  <a:lnTo>
+                    <a:pt x="3830613" y="2537402"/>
+                  </a:lnTo>
+                  <a:lnTo>
+                    <a:pt x="3758991" y="2514060"/>
+                  </a:lnTo>
+                  <a:lnTo>
+                    <a:pt x="3687368" y="2490142"/>
+                  </a:lnTo>
+                  <a:lnTo>
+                    <a:pt x="3615746" y="2465635"/>
+                  </a:lnTo>
+                  <a:lnTo>
+                    <a:pt x="3544123" y="2440523"/>
+                  </a:lnTo>
+                  <a:lnTo>
+                    <a:pt x="3472501" y="2414791"/>
+                  </a:lnTo>
+                  <a:lnTo>
+                    <a:pt x="3400878" y="2388425"/>
+                  </a:lnTo>
+                  <a:lnTo>
+                    <a:pt x="3329255" y="2361408"/>
+                  </a:lnTo>
+                  <a:lnTo>
+                    <a:pt x="3257633" y="2333725"/>
+                  </a:lnTo>
+                  <a:lnTo>
+                    <a:pt x="3186010" y="2305360"/>
+                  </a:lnTo>
+                  <a:lnTo>
+                    <a:pt x="3114388" y="2276294"/>
+                  </a:lnTo>
+                  <a:lnTo>
+                    <a:pt x="3042765" y="2246512"/>
+                  </a:lnTo>
+                  <a:lnTo>
+                    <a:pt x="2971143" y="2215995"/>
+                  </a:lnTo>
+                  <a:lnTo>
+                    <a:pt x="2899520" y="2184725"/>
+                  </a:lnTo>
+                  <a:lnTo>
+                    <a:pt x="2827898" y="2152684"/>
+                  </a:lnTo>
+                  <a:lnTo>
+                    <a:pt x="2756275" y="2119853"/>
+                  </a:lnTo>
+                  <a:lnTo>
+                    <a:pt x="2684653" y="2086212"/>
+                  </a:lnTo>
+                  <a:lnTo>
+                    <a:pt x="2613030" y="2051741"/>
+                  </a:lnTo>
+                  <a:lnTo>
+                    <a:pt x="2541408" y="2016420"/>
+                  </a:lnTo>
+                  <a:lnTo>
+                    <a:pt x="2469785" y="1980228"/>
+                  </a:lnTo>
+                  <a:lnTo>
+                    <a:pt x="2398163" y="1943143"/>
+                  </a:lnTo>
+                  <a:lnTo>
+                    <a:pt x="2326540" y="1905144"/>
+                  </a:lnTo>
+                  <a:lnTo>
+                    <a:pt x="2254918" y="1866207"/>
+                  </a:lnTo>
+                  <a:lnTo>
+                    <a:pt x="2183295" y="1826309"/>
+                  </a:lnTo>
+                  <a:lnTo>
+                    <a:pt x="2111673" y="1785428"/>
+                  </a:lnTo>
+                  <a:lnTo>
+                    <a:pt x="2040050" y="1743538"/>
+                  </a:lnTo>
+                  <a:lnTo>
+                    <a:pt x="1968427" y="1700615"/>
+                  </a:lnTo>
+                  <a:lnTo>
+                    <a:pt x="1896805" y="1656634"/>
+                  </a:lnTo>
+                  <a:lnTo>
+                    <a:pt x="1825182" y="1611567"/>
+                  </a:lnTo>
+                  <a:lnTo>
+                    <a:pt x="1753560" y="1565389"/>
+                  </a:lnTo>
+                  <a:lnTo>
+                    <a:pt x="1681937" y="1518072"/>
+                  </a:lnTo>
+                  <a:lnTo>
+                    <a:pt x="1610315" y="1469588"/>
+                  </a:lnTo>
+                  <a:lnTo>
+                    <a:pt x="1538692" y="1419908"/>
+                  </a:lnTo>
+                  <a:lnTo>
+                    <a:pt x="1467070" y="1369002"/>
+                  </a:lnTo>
+                  <a:lnTo>
+                    <a:pt x="1395447" y="1316841"/>
+                  </a:lnTo>
+                  <a:lnTo>
+                    <a:pt x="1323825" y="1263394"/>
+                  </a:lnTo>
+                  <a:lnTo>
+                    <a:pt x="1252202" y="1208628"/>
+                  </a:lnTo>
+                  <a:lnTo>
+                    <a:pt x="1180580" y="1152511"/>
+                  </a:lnTo>
+                  <a:lnTo>
+                    <a:pt x="1108957" y="1095010"/>
+                  </a:lnTo>
+                  <a:lnTo>
+                    <a:pt x="1037335" y="1036091"/>
+                  </a:lnTo>
+                  <a:lnTo>
+                    <a:pt x="965712" y="975719"/>
+                  </a:lnTo>
+                  <a:lnTo>
+                    <a:pt x="894090" y="913857"/>
+                  </a:lnTo>
+                  <a:lnTo>
+                    <a:pt x="822467" y="850470"/>
+                  </a:lnTo>
+                  <a:lnTo>
+                    <a:pt x="750845" y="785519"/>
+                  </a:lnTo>
+                  <a:lnTo>
+                    <a:pt x="679222" y="718966"/>
+                  </a:lnTo>
+                  <a:lnTo>
+                    <a:pt x="607599" y="650771"/>
+                  </a:lnTo>
+                  <a:lnTo>
+                    <a:pt x="535977" y="580895"/>
+                  </a:lnTo>
+                  <a:lnTo>
+                    <a:pt x="464354" y="509295"/>
+                  </a:lnTo>
+                  <a:lnTo>
+                    <a:pt x="392732" y="435929"/>
+                  </a:lnTo>
+                  <a:lnTo>
+                    <a:pt x="321109" y="360753"/>
+                  </a:lnTo>
+                  <a:lnTo>
+                    <a:pt x="249487" y="283723"/>
+                  </a:lnTo>
+                  <a:lnTo>
+                    <a:pt x="177864" y="204793"/>
+                  </a:lnTo>
+                  <a:lnTo>
+                    <a:pt x="106242" y="123916"/>
+                  </a:lnTo>
+                  <a:lnTo>
+                    <a:pt x="34619" y="41045"/>
                   </a:lnTo>
                   <a:lnTo>
                     <a:pt x="0" y="0"/>
@@ -3974,189 +3911,180 @@
           </p:nvSpPr>
           <p:spPr>
             <a:xfrm>
-              <a:off x="4152792" y="2073503"/>
-              <a:ext cx="4109887" cy="3322535"/>
+              <a:off x="4343079" y="2073503"/>
+              <a:ext cx="3919600" cy="3349132"/>
             </a:xfrm>
             <a:custGeom>
               <a:avLst/>
               <a:pathLst>
-                <a:path w="4109887" h="3322535">
+                <a:path w="3919600" h="3349132">
                   <a:moveTo>
                     <a:pt x="0" y="0"/>
                   </a:moveTo>
                   <a:lnTo>
-                    <a:pt x="27403" y="71810"/>
-                  </a:lnTo>
-                  <a:lnTo>
-                    <a:pt x="99025" y="249712"/>
-                  </a:lnTo>
-                  <a:lnTo>
-                    <a:pt x="170648" y="418337"/>
-                  </a:lnTo>
-                  <a:lnTo>
-                    <a:pt x="242270" y="578171"/>
-                  </a:lnTo>
-                  <a:lnTo>
-                    <a:pt x="313893" y="729670"/>
-                  </a:lnTo>
-                  <a:lnTo>
-                    <a:pt x="385515" y="873271"/>
-                  </a:lnTo>
-                  <a:lnTo>
-                    <a:pt x="457138" y="1009383"/>
-                  </a:lnTo>
-                  <a:lnTo>
-                    <a:pt x="528760" y="1138399"/>
-                  </a:lnTo>
-                  <a:lnTo>
-                    <a:pt x="600383" y="1260688"/>
-                  </a:lnTo>
-                  <a:lnTo>
-                    <a:pt x="672006" y="1376600"/>
-                  </a:lnTo>
-                  <a:lnTo>
-                    <a:pt x="743628" y="1486469"/>
-                  </a:lnTo>
-                  <a:lnTo>
-                    <a:pt x="815251" y="1590609"/>
-                  </a:lnTo>
-                  <a:lnTo>
-                    <a:pt x="886873" y="1689319"/>
-                  </a:lnTo>
-                  <a:lnTo>
-                    <a:pt x="958496" y="1782882"/>
-                  </a:lnTo>
-                  <a:lnTo>
-                    <a:pt x="1030118" y="1871567"/>
-                  </a:lnTo>
-                  <a:lnTo>
-                    <a:pt x="1101741" y="1955627"/>
-                  </a:lnTo>
-                  <a:lnTo>
-                    <a:pt x="1173363" y="2035305"/>
-                  </a:lnTo>
-                  <a:lnTo>
-                    <a:pt x="1244986" y="2110828"/>
-                  </a:lnTo>
-                  <a:lnTo>
-                    <a:pt x="1316608" y="2182413"/>
-                  </a:lnTo>
-                  <a:lnTo>
-                    <a:pt x="1388231" y="2250266"/>
-                  </a:lnTo>
-                  <a:lnTo>
-                    <a:pt x="1459853" y="2314581"/>
-                  </a:lnTo>
-                  <a:lnTo>
-                    <a:pt x="1531476" y="2375542"/>
-                  </a:lnTo>
-                  <a:lnTo>
-                    <a:pt x="1603098" y="2433325"/>
-                  </a:lnTo>
-                  <a:lnTo>
-                    <a:pt x="1674721" y="2488095"/>
-                  </a:lnTo>
-                  <a:lnTo>
-                    <a:pt x="1746343" y="2540009"/>
-                  </a:lnTo>
-                  <a:lnTo>
-                    <a:pt x="1817966" y="2589217"/>
-                  </a:lnTo>
-                  <a:lnTo>
-                    <a:pt x="1889588" y="2635858"/>
-                  </a:lnTo>
-                  <a:lnTo>
-                    <a:pt x="1961211" y="2680068"/>
-                  </a:lnTo>
-                  <a:lnTo>
-                    <a:pt x="2032833" y="2721973"/>
-                  </a:lnTo>
-                  <a:lnTo>
-                    <a:pt x="2104456" y="2761692"/>
-                  </a:lnTo>
-                  <a:lnTo>
-                    <a:pt x="2176079" y="2799341"/>
-                  </a:lnTo>
-                  <a:lnTo>
-                    <a:pt x="2247701" y="2835026"/>
-                  </a:lnTo>
-                  <a:lnTo>
-                    <a:pt x="2319324" y="2868851"/>
-                  </a:lnTo>
-                  <a:lnTo>
-                    <a:pt x="2390946" y="2900912"/>
-                  </a:lnTo>
-                  <a:lnTo>
-                    <a:pt x="2462569" y="2931302"/>
-                  </a:lnTo>
-                  <a:lnTo>
-                    <a:pt x="2534191" y="2960107"/>
-                  </a:lnTo>
-                  <a:lnTo>
-                    <a:pt x="2605814" y="2987410"/>
-                  </a:lnTo>
-                  <a:lnTo>
-                    <a:pt x="2677436" y="3013289"/>
-                  </a:lnTo>
-                  <a:lnTo>
-                    <a:pt x="2749059" y="3037820"/>
-                  </a:lnTo>
-                  <a:lnTo>
-                    <a:pt x="2820681" y="3061071"/>
-                  </a:lnTo>
-                  <a:lnTo>
-                    <a:pt x="2892304" y="3083109"/>
-                  </a:lnTo>
-                  <a:lnTo>
-                    <a:pt x="2963926" y="3103999"/>
-                  </a:lnTo>
-                  <a:lnTo>
-                    <a:pt x="3035549" y="3123799"/>
-                  </a:lnTo>
-                  <a:lnTo>
-                    <a:pt x="3107171" y="3142567"/>
-                  </a:lnTo>
-                  <a:lnTo>
-                    <a:pt x="3178794" y="3160357"/>
-                  </a:lnTo>
-                  <a:lnTo>
-                    <a:pt x="3250416" y="3177219"/>
-                  </a:lnTo>
-                  <a:lnTo>
-                    <a:pt x="3322039" y="3193201"/>
-                  </a:lnTo>
-                  <a:lnTo>
-                    <a:pt x="3393661" y="3208351"/>
-                  </a:lnTo>
-                  <a:lnTo>
-                    <a:pt x="3465284" y="3222710"/>
-                  </a:lnTo>
-                  <a:lnTo>
-                    <a:pt x="3536907" y="3236321"/>
-                  </a:lnTo>
-                  <a:lnTo>
-                    <a:pt x="3608529" y="3249222"/>
-                  </a:lnTo>
-                  <a:lnTo>
-                    <a:pt x="3680152" y="3261450"/>
-                  </a:lnTo>
-                  <a:lnTo>
-                    <a:pt x="3751774" y="3273041"/>
-                  </a:lnTo>
-                  <a:lnTo>
-                    <a:pt x="3823397" y="3284027"/>
-                  </a:lnTo>
-                  <a:lnTo>
-                    <a:pt x="3895019" y="3294441"/>
-                  </a:lnTo>
-                  <a:lnTo>
-                    <a:pt x="3966642" y="3304311"/>
-                  </a:lnTo>
-                  <a:lnTo>
-                    <a:pt x="4038264" y="3313667"/>
-                  </a:lnTo>
-                  <a:lnTo>
-                    <a:pt x="4109887" y="3322535"/>
+                    <a:pt x="51983" y="148270"/>
+                  </a:lnTo>
+                  <a:lnTo>
+                    <a:pt x="123606" y="340765"/>
+                  </a:lnTo>
+                  <a:lnTo>
+                    <a:pt x="195228" y="522150"/>
+                  </a:lnTo>
+                  <a:lnTo>
+                    <a:pt x="266851" y="693068"/>
+                  </a:lnTo>
+                  <a:lnTo>
+                    <a:pt x="338473" y="854122"/>
+                  </a:lnTo>
+                  <a:lnTo>
+                    <a:pt x="410096" y="1005881"/>
+                  </a:lnTo>
+                  <a:lnTo>
+                    <a:pt x="481718" y="1148882"/>
+                  </a:lnTo>
+                  <a:lnTo>
+                    <a:pt x="553341" y="1283630"/>
+                  </a:lnTo>
+                  <a:lnTo>
+                    <a:pt x="624964" y="1410602"/>
+                  </a:lnTo>
+                  <a:lnTo>
+                    <a:pt x="696586" y="1530246"/>
+                  </a:lnTo>
+                  <a:lnTo>
+                    <a:pt x="768209" y="1642985"/>
+                  </a:lnTo>
+                  <a:lnTo>
+                    <a:pt x="839831" y="1749218"/>
+                  </a:lnTo>
+                  <a:lnTo>
+                    <a:pt x="911454" y="1849320"/>
+                  </a:lnTo>
+                  <a:lnTo>
+                    <a:pt x="983076" y="1943645"/>
+                  </a:lnTo>
+                  <a:lnTo>
+                    <a:pt x="1054699" y="2032527"/>
+                  </a:lnTo>
+                  <a:lnTo>
+                    <a:pt x="1126321" y="2116278"/>
+                  </a:lnTo>
+                  <a:lnTo>
+                    <a:pt x="1197944" y="2195197"/>
+                  </a:lnTo>
+                  <a:lnTo>
+                    <a:pt x="1269566" y="2269561"/>
+                  </a:lnTo>
+                  <a:lnTo>
+                    <a:pt x="1341189" y="2339633"/>
+                  </a:lnTo>
+                  <a:lnTo>
+                    <a:pt x="1412811" y="2405662"/>
+                  </a:lnTo>
+                  <a:lnTo>
+                    <a:pt x="1484434" y="2467879"/>
+                  </a:lnTo>
+                  <a:lnTo>
+                    <a:pt x="1556056" y="2526506"/>
+                  </a:lnTo>
+                  <a:lnTo>
+                    <a:pt x="1627679" y="2581750"/>
+                  </a:lnTo>
+                  <a:lnTo>
+                    <a:pt x="1699301" y="2633805"/>
+                  </a:lnTo>
+                  <a:lnTo>
+                    <a:pt x="1770924" y="2682857"/>
+                  </a:lnTo>
+                  <a:lnTo>
+                    <a:pt x="1842546" y="2729077"/>
+                  </a:lnTo>
+                  <a:lnTo>
+                    <a:pt x="1914169" y="2772630"/>
+                  </a:lnTo>
+                  <a:lnTo>
+                    <a:pt x="1985792" y="2813670"/>
+                  </a:lnTo>
+                  <a:lnTo>
+                    <a:pt x="2057414" y="2852341"/>
+                  </a:lnTo>
+                  <a:lnTo>
+                    <a:pt x="2129037" y="2888780"/>
+                  </a:lnTo>
+                  <a:lnTo>
+                    <a:pt x="2200659" y="2923116"/>
+                  </a:lnTo>
+                  <a:lnTo>
+                    <a:pt x="2272282" y="2955471"/>
+                  </a:lnTo>
+                  <a:lnTo>
+                    <a:pt x="2343904" y="2985959"/>
+                  </a:lnTo>
+                  <a:lnTo>
+                    <a:pt x="2415527" y="3014687"/>
+                  </a:lnTo>
+                  <a:lnTo>
+                    <a:pt x="2487149" y="3041757"/>
+                  </a:lnTo>
+                  <a:lnTo>
+                    <a:pt x="2558772" y="3067264"/>
+                  </a:lnTo>
+                  <a:lnTo>
+                    <a:pt x="2630394" y="3091300"/>
+                  </a:lnTo>
+                  <a:lnTo>
+                    <a:pt x="2702017" y="3113949"/>
+                  </a:lnTo>
+                  <a:lnTo>
+                    <a:pt x="2773639" y="3135290"/>
+                  </a:lnTo>
+                  <a:lnTo>
+                    <a:pt x="2845262" y="3155400"/>
+                  </a:lnTo>
+                  <a:lnTo>
+                    <a:pt x="2916884" y="3174350"/>
+                  </a:lnTo>
+                  <a:lnTo>
+                    <a:pt x="2988507" y="3192205"/>
+                  </a:lnTo>
+                  <a:lnTo>
+                    <a:pt x="3060129" y="3209030"/>
+                  </a:lnTo>
+                  <a:lnTo>
+                    <a:pt x="3131752" y="3224885"/>
+                  </a:lnTo>
+                  <a:lnTo>
+                    <a:pt x="3203374" y="3239824"/>
+                  </a:lnTo>
+                  <a:lnTo>
+                    <a:pt x="3274997" y="3253901"/>
+                  </a:lnTo>
+                  <a:lnTo>
+                    <a:pt x="3346620" y="3267166"/>
+                  </a:lnTo>
+                  <a:lnTo>
+                    <a:pt x="3418242" y="3279665"/>
+                  </a:lnTo>
+                  <a:lnTo>
+                    <a:pt x="3489865" y="3291443"/>
+                  </a:lnTo>
+                  <a:lnTo>
+                    <a:pt x="3561487" y="3302541"/>
+                  </a:lnTo>
+                  <a:lnTo>
+                    <a:pt x="3633110" y="3312998"/>
+                  </a:lnTo>
+                  <a:lnTo>
+                    <a:pt x="3704732" y="3322853"/>
+                  </a:lnTo>
+                  <a:lnTo>
+                    <a:pt x="3776355" y="3332138"/>
+                  </a:lnTo>
+                  <a:lnTo>
+                    <a:pt x="3847977" y="3340888"/>
+                  </a:lnTo>
+                  <a:lnTo>
+                    <a:pt x="3919600" y="3349132"/>
                   </a:lnTo>
                 </a:path>
               </a:pathLst>
@@ -4896,7 +4824,7 @@
                   <a:latin typeface="Helvetica"/>
                   <a:cs typeface="Helvetica"/>
                 </a:rPr>
-                <a:t>HR per 1 mL/min: 0.93 (0.89-0.98)  |  per IQR (Δ = 18.2): 0.28 (0.12-0.70)  |  IQR: [-11.5, 6.7]</a:t>
+                <a:t>HR per 1 mL/min: 0.93 (0.89-0.97)  |  per IQR (Δ = 18.2): 0.25 (0.11-0.56)  |  IQR: [-11.5, 6.7]</a:t>
               </a:r>
             </a:p>
           </p:txBody>

--- a/docs/plots/carbo/jx_carbo_linsubhr_egfrdisc_death.pptx
+++ b/docs/plots/carbo/jx_carbo_linsubhr_egfrdisc_death.pptx
@@ -3002,423 +3002,456 @@
           </p:nvSpPr>
           <p:spPr>
             <a:xfrm>
-              <a:off x="1853654" y="2073503"/>
-              <a:ext cx="6409024" cy="3437711"/>
+              <a:off x="1172049" y="2073503"/>
+              <a:ext cx="7090630" cy="3433771"/>
             </a:xfrm>
             <a:custGeom>
               <a:avLst/>
               <a:pathLst>
-                <a:path w="6409024" h="3437711">
+                <a:path w="7090630" h="3433771">
                   <a:moveTo>
-                    <a:pt x="3131288" y="0"/>
+                    <a:pt x="3781059" y="0"/>
                   </a:moveTo>
                   <a:lnTo>
-                    <a:pt x="3186010" y="245283"/>
-                  </a:lnTo>
-                  <a:lnTo>
-                    <a:pt x="3257633" y="537365"/>
-                  </a:lnTo>
-                  <a:lnTo>
-                    <a:pt x="3329255" y="803103"/>
-                  </a:lnTo>
-                  <a:lnTo>
-                    <a:pt x="3400878" y="1044875"/>
-                  </a:lnTo>
-                  <a:lnTo>
-                    <a:pt x="3472501" y="1264840"/>
-                  </a:lnTo>
-                  <a:lnTo>
-                    <a:pt x="3544123" y="1464967"/>
-                  </a:lnTo>
-                  <a:lnTo>
-                    <a:pt x="3615746" y="1647043"/>
-                  </a:lnTo>
-                  <a:lnTo>
-                    <a:pt x="3687368" y="1812699"/>
-                  </a:lnTo>
-                  <a:lnTo>
-                    <a:pt x="3758991" y="1963413"/>
-                  </a:lnTo>
-                  <a:lnTo>
-                    <a:pt x="3830613" y="2100534"/>
-                  </a:lnTo>
-                  <a:lnTo>
-                    <a:pt x="3902236" y="2225288"/>
-                  </a:lnTo>
-                  <a:lnTo>
-                    <a:pt x="3973858" y="2338790"/>
-                  </a:lnTo>
-                  <a:lnTo>
-                    <a:pt x="4045481" y="2442056"/>
-                  </a:lnTo>
-                  <a:lnTo>
-                    <a:pt x="4117103" y="2536007"/>
-                  </a:lnTo>
-                  <a:lnTo>
-                    <a:pt x="4188726" y="2621485"/>
-                  </a:lnTo>
-                  <a:lnTo>
-                    <a:pt x="4260348" y="2666117"/>
-                  </a:lnTo>
-                  <a:lnTo>
-                    <a:pt x="4331971" y="2685798"/>
-                  </a:lnTo>
-                  <a:lnTo>
-                    <a:pt x="4403593" y="2705006"/>
-                  </a:lnTo>
-                  <a:lnTo>
-                    <a:pt x="4475216" y="2723752"/>
-                  </a:lnTo>
-                  <a:lnTo>
-                    <a:pt x="4546838" y="2742046"/>
-                  </a:lnTo>
-                  <a:lnTo>
-                    <a:pt x="4618461" y="2759900"/>
-                  </a:lnTo>
-                  <a:lnTo>
-                    <a:pt x="4690083" y="2777324"/>
-                  </a:lnTo>
-                  <a:lnTo>
-                    <a:pt x="4761706" y="2794329"/>
-                  </a:lnTo>
-                  <a:lnTo>
-                    <a:pt x="4833328" y="2810925"/>
-                  </a:lnTo>
-                  <a:lnTo>
-                    <a:pt x="4904951" y="2827121"/>
-                  </a:lnTo>
-                  <a:lnTo>
-                    <a:pt x="4976574" y="2842927"/>
-                  </a:lnTo>
-                  <a:lnTo>
-                    <a:pt x="5048196" y="2858352"/>
-                  </a:lnTo>
-                  <a:lnTo>
-                    <a:pt x="5119819" y="2873407"/>
-                  </a:lnTo>
-                  <a:lnTo>
-                    <a:pt x="5191441" y="2888098"/>
-                  </a:lnTo>
-                  <a:lnTo>
-                    <a:pt x="5263064" y="2902437"/>
-                  </a:lnTo>
-                  <a:lnTo>
-                    <a:pt x="5334686" y="2916430"/>
-                  </a:lnTo>
-                  <a:lnTo>
-                    <a:pt x="5406309" y="2930086"/>
-                  </a:lnTo>
-                  <a:lnTo>
-                    <a:pt x="5477931" y="2943414"/>
-                  </a:lnTo>
-                  <a:lnTo>
-                    <a:pt x="5549554" y="2956420"/>
-                  </a:lnTo>
-                  <a:lnTo>
-                    <a:pt x="5621176" y="2969114"/>
-                  </a:lnTo>
-                  <a:lnTo>
-                    <a:pt x="5692799" y="2981502"/>
-                  </a:lnTo>
-                  <a:lnTo>
-                    <a:pt x="5764421" y="2993592"/>
-                  </a:lnTo>
-                  <a:lnTo>
-                    <a:pt x="5836044" y="3005391"/>
-                  </a:lnTo>
-                  <a:lnTo>
-                    <a:pt x="5907666" y="3016906"/>
-                  </a:lnTo>
-                  <a:lnTo>
-                    <a:pt x="5979289" y="3028143"/>
-                  </a:lnTo>
-                  <a:lnTo>
-                    <a:pt x="6050911" y="3039110"/>
-                  </a:lnTo>
-                  <a:lnTo>
-                    <a:pt x="6122534" y="3049813"/>
-                  </a:lnTo>
-                  <a:lnTo>
-                    <a:pt x="6194156" y="3060259"/>
-                  </a:lnTo>
-                  <a:lnTo>
-                    <a:pt x="6265779" y="3070453"/>
-                  </a:lnTo>
-                  <a:lnTo>
-                    <a:pt x="6337402" y="3080402"/>
-                  </a:lnTo>
-                  <a:lnTo>
-                    <a:pt x="6409024" y="3090111"/>
-                  </a:lnTo>
-                  <a:lnTo>
-                    <a:pt x="6409024" y="3437711"/>
-                  </a:lnTo>
-                  <a:lnTo>
-                    <a:pt x="6337402" y="3433148"/>
-                  </a:lnTo>
-                  <a:lnTo>
-                    <a:pt x="6265779" y="3428132"/>
-                  </a:lnTo>
-                  <a:lnTo>
-                    <a:pt x="6194156" y="3422619"/>
-                  </a:lnTo>
-                  <a:lnTo>
-                    <a:pt x="6122534" y="3416559"/>
-                  </a:lnTo>
-                  <a:lnTo>
-                    <a:pt x="6050911" y="3409898"/>
-                  </a:lnTo>
-                  <a:lnTo>
-                    <a:pt x="5979289" y="3402578"/>
-                  </a:lnTo>
-                  <a:lnTo>
-                    <a:pt x="5907666" y="3394531"/>
-                  </a:lnTo>
-                  <a:lnTo>
-                    <a:pt x="5836044" y="3385687"/>
-                  </a:lnTo>
-                  <a:lnTo>
-                    <a:pt x="5764421" y="3375966"/>
-                  </a:lnTo>
-                  <a:lnTo>
-                    <a:pt x="5692799" y="3365282"/>
-                  </a:lnTo>
-                  <a:lnTo>
-                    <a:pt x="5621176" y="3353538"/>
-                  </a:lnTo>
-                  <a:lnTo>
-                    <a:pt x="5549554" y="3340630"/>
-                  </a:lnTo>
-                  <a:lnTo>
-                    <a:pt x="5477931" y="3326443"/>
-                  </a:lnTo>
-                  <a:lnTo>
-                    <a:pt x="5406309" y="3310849"/>
-                  </a:lnTo>
-                  <a:lnTo>
-                    <a:pt x="5334686" y="3293709"/>
-                  </a:lnTo>
-                  <a:lnTo>
-                    <a:pt x="5263064" y="3274870"/>
-                  </a:lnTo>
-                  <a:lnTo>
-                    <a:pt x="5191441" y="3254164"/>
-                  </a:lnTo>
-                  <a:lnTo>
-                    <a:pt x="5119819" y="3231405"/>
-                  </a:lnTo>
-                  <a:lnTo>
-                    <a:pt x="5048196" y="3206390"/>
-                  </a:lnTo>
-                  <a:lnTo>
-                    <a:pt x="4976574" y="3178895"/>
-                  </a:lnTo>
-                  <a:lnTo>
-                    <a:pt x="4904951" y="3148674"/>
-                  </a:lnTo>
-                  <a:lnTo>
-                    <a:pt x="4833328" y="3115458"/>
-                  </a:lnTo>
-                  <a:lnTo>
-                    <a:pt x="4761706" y="3078948"/>
-                  </a:lnTo>
-                  <a:lnTo>
-                    <a:pt x="4690083" y="3038820"/>
-                  </a:lnTo>
-                  <a:lnTo>
-                    <a:pt x="4618461" y="2994713"/>
-                  </a:lnTo>
-                  <a:lnTo>
-                    <a:pt x="4546838" y="2946234"/>
-                  </a:lnTo>
-                  <a:lnTo>
-                    <a:pt x="4475216" y="2892949"/>
-                  </a:lnTo>
-                  <a:lnTo>
-                    <a:pt x="4403593" y="2834382"/>
-                  </a:lnTo>
-                  <a:lnTo>
-                    <a:pt x="4331971" y="2770009"/>
-                  </a:lnTo>
-                  <a:lnTo>
-                    <a:pt x="4260348" y="2699254"/>
-                  </a:lnTo>
-                  <a:lnTo>
-                    <a:pt x="4188726" y="2645949"/>
-                  </a:lnTo>
-                  <a:lnTo>
-                    <a:pt x="4117103" y="2625285"/>
-                  </a:lnTo>
-                  <a:lnTo>
-                    <a:pt x="4045481" y="2604111"/>
-                  </a:lnTo>
-                  <a:lnTo>
-                    <a:pt x="3973858" y="2582414"/>
-                  </a:lnTo>
-                  <a:lnTo>
-                    <a:pt x="3902236" y="2560182"/>
-                  </a:lnTo>
-                  <a:lnTo>
-                    <a:pt x="3830613" y="2537402"/>
-                  </a:lnTo>
-                  <a:lnTo>
-                    <a:pt x="3758991" y="2514060"/>
-                  </a:lnTo>
-                  <a:lnTo>
-                    <a:pt x="3687368" y="2490142"/>
-                  </a:lnTo>
-                  <a:lnTo>
-                    <a:pt x="3615746" y="2465635"/>
-                  </a:lnTo>
-                  <a:lnTo>
-                    <a:pt x="3544123" y="2440523"/>
-                  </a:lnTo>
-                  <a:lnTo>
-                    <a:pt x="3472501" y="2414791"/>
-                  </a:lnTo>
-                  <a:lnTo>
-                    <a:pt x="3400878" y="2388425"/>
-                  </a:lnTo>
-                  <a:lnTo>
-                    <a:pt x="3329255" y="2361408"/>
-                  </a:lnTo>
-                  <a:lnTo>
-                    <a:pt x="3257633" y="2333725"/>
-                  </a:lnTo>
-                  <a:lnTo>
-                    <a:pt x="3186010" y="2305360"/>
-                  </a:lnTo>
-                  <a:lnTo>
-                    <a:pt x="3114388" y="2276294"/>
-                  </a:lnTo>
-                  <a:lnTo>
-                    <a:pt x="3042765" y="2246512"/>
-                  </a:lnTo>
-                  <a:lnTo>
-                    <a:pt x="2971143" y="2215995"/>
-                  </a:lnTo>
-                  <a:lnTo>
-                    <a:pt x="2899520" y="2184725"/>
-                  </a:lnTo>
-                  <a:lnTo>
-                    <a:pt x="2827898" y="2152684"/>
-                  </a:lnTo>
-                  <a:lnTo>
-                    <a:pt x="2756275" y="2119853"/>
-                  </a:lnTo>
-                  <a:lnTo>
-                    <a:pt x="2684653" y="2086212"/>
-                  </a:lnTo>
-                  <a:lnTo>
-                    <a:pt x="2613030" y="2051741"/>
-                  </a:lnTo>
-                  <a:lnTo>
-                    <a:pt x="2541408" y="2016420"/>
-                  </a:lnTo>
-                  <a:lnTo>
-                    <a:pt x="2469785" y="1980228"/>
-                  </a:lnTo>
-                  <a:lnTo>
-                    <a:pt x="2398163" y="1943143"/>
-                  </a:lnTo>
-                  <a:lnTo>
-                    <a:pt x="2326540" y="1905144"/>
-                  </a:lnTo>
-                  <a:lnTo>
-                    <a:pt x="2254918" y="1866207"/>
-                  </a:lnTo>
-                  <a:lnTo>
-                    <a:pt x="2183295" y="1826309"/>
-                  </a:lnTo>
-                  <a:lnTo>
-                    <a:pt x="2111673" y="1785428"/>
-                  </a:lnTo>
-                  <a:lnTo>
-                    <a:pt x="2040050" y="1743538"/>
-                  </a:lnTo>
-                  <a:lnTo>
-                    <a:pt x="1968427" y="1700615"/>
-                  </a:lnTo>
-                  <a:lnTo>
-                    <a:pt x="1896805" y="1656634"/>
-                  </a:lnTo>
-                  <a:lnTo>
-                    <a:pt x="1825182" y="1611567"/>
-                  </a:lnTo>
-                  <a:lnTo>
-                    <a:pt x="1753560" y="1565389"/>
-                  </a:lnTo>
-                  <a:lnTo>
-                    <a:pt x="1681937" y="1518072"/>
-                  </a:lnTo>
-                  <a:lnTo>
-                    <a:pt x="1610315" y="1469588"/>
-                  </a:lnTo>
-                  <a:lnTo>
-                    <a:pt x="1538692" y="1419908"/>
-                  </a:lnTo>
-                  <a:lnTo>
-                    <a:pt x="1467070" y="1369002"/>
-                  </a:lnTo>
-                  <a:lnTo>
-                    <a:pt x="1395447" y="1316841"/>
-                  </a:lnTo>
-                  <a:lnTo>
-                    <a:pt x="1323825" y="1263394"/>
-                  </a:lnTo>
-                  <a:lnTo>
-                    <a:pt x="1252202" y="1208628"/>
-                  </a:lnTo>
-                  <a:lnTo>
-                    <a:pt x="1180580" y="1152511"/>
-                  </a:lnTo>
-                  <a:lnTo>
-                    <a:pt x="1108957" y="1095010"/>
-                  </a:lnTo>
-                  <a:lnTo>
-                    <a:pt x="1037335" y="1036091"/>
-                  </a:lnTo>
-                  <a:lnTo>
-                    <a:pt x="965712" y="975719"/>
-                  </a:lnTo>
-                  <a:lnTo>
-                    <a:pt x="894090" y="913857"/>
-                  </a:lnTo>
-                  <a:lnTo>
-                    <a:pt x="822467" y="850470"/>
-                  </a:lnTo>
-                  <a:lnTo>
-                    <a:pt x="750845" y="785519"/>
-                  </a:lnTo>
-                  <a:lnTo>
-                    <a:pt x="679222" y="718966"/>
-                  </a:lnTo>
-                  <a:lnTo>
-                    <a:pt x="607599" y="650771"/>
-                  </a:lnTo>
-                  <a:lnTo>
-                    <a:pt x="535977" y="580895"/>
-                  </a:lnTo>
-                  <a:lnTo>
-                    <a:pt x="464354" y="509295"/>
-                  </a:lnTo>
-                  <a:lnTo>
-                    <a:pt x="392732" y="435929"/>
-                  </a:lnTo>
-                  <a:lnTo>
-                    <a:pt x="321109" y="360753"/>
-                  </a:lnTo>
-                  <a:lnTo>
-                    <a:pt x="249487" y="283723"/>
-                  </a:lnTo>
-                  <a:lnTo>
-                    <a:pt x="177864" y="204793"/>
-                  </a:lnTo>
-                  <a:lnTo>
-                    <a:pt x="106242" y="123916"/>
-                  </a:lnTo>
-                  <a:lnTo>
-                    <a:pt x="34619" y="41045"/>
+                    <a:pt x="3795993" y="68499"/>
+                  </a:lnTo>
+                  <a:lnTo>
+                    <a:pt x="3867616" y="368172"/>
+                  </a:lnTo>
+                  <a:lnTo>
+                    <a:pt x="3939238" y="641551"/>
+                  </a:lnTo>
+                  <a:lnTo>
+                    <a:pt x="4010861" y="890941"/>
+                  </a:lnTo>
+                  <a:lnTo>
+                    <a:pt x="4082483" y="1118449"/>
+                  </a:lnTo>
+                  <a:lnTo>
+                    <a:pt x="4154106" y="1325994"/>
+                  </a:lnTo>
+                  <a:lnTo>
+                    <a:pt x="4225729" y="1515328"/>
+                  </a:lnTo>
+                  <a:lnTo>
+                    <a:pt x="4297351" y="1688048"/>
+                  </a:lnTo>
+                  <a:lnTo>
+                    <a:pt x="4368974" y="1845613"/>
+                  </a:lnTo>
+                  <a:lnTo>
+                    <a:pt x="4440596" y="1989352"/>
+                  </a:lnTo>
+                  <a:lnTo>
+                    <a:pt x="4512219" y="2120479"/>
+                  </a:lnTo>
+                  <a:lnTo>
+                    <a:pt x="4583841" y="2240100"/>
+                  </a:lnTo>
+                  <a:lnTo>
+                    <a:pt x="4655464" y="2349225"/>
+                  </a:lnTo>
+                  <a:lnTo>
+                    <a:pt x="4727086" y="2448774"/>
+                  </a:lnTo>
+                  <a:lnTo>
+                    <a:pt x="4798709" y="2539589"/>
+                  </a:lnTo>
+                  <a:lnTo>
+                    <a:pt x="4870331" y="2622435"/>
+                  </a:lnTo>
+                  <a:lnTo>
+                    <a:pt x="4941954" y="2661715"/>
+                  </a:lnTo>
+                  <a:lnTo>
+                    <a:pt x="5013576" y="2674166"/>
+                  </a:lnTo>
+                  <a:lnTo>
+                    <a:pt x="5085199" y="2686428"/>
+                  </a:lnTo>
+                  <a:lnTo>
+                    <a:pt x="5156821" y="2698505"/>
+                  </a:lnTo>
+                  <a:lnTo>
+                    <a:pt x="5228444" y="2710399"/>
+                  </a:lnTo>
+                  <a:lnTo>
+                    <a:pt x="5300066" y="2722112"/>
+                  </a:lnTo>
+                  <a:lnTo>
+                    <a:pt x="5371689" y="2733648"/>
+                  </a:lnTo>
+                  <a:lnTo>
+                    <a:pt x="5443311" y="2745010"/>
+                  </a:lnTo>
+                  <a:lnTo>
+                    <a:pt x="5514934" y="2756199"/>
+                  </a:lnTo>
+                  <a:lnTo>
+                    <a:pt x="5586557" y="2767219"/>
+                  </a:lnTo>
+                  <a:lnTo>
+                    <a:pt x="5658179" y="2778072"/>
+                  </a:lnTo>
+                  <a:lnTo>
+                    <a:pt x="5729802" y="2788760"/>
+                  </a:lnTo>
+                  <a:lnTo>
+                    <a:pt x="5801424" y="2799287"/>
+                  </a:lnTo>
+                  <a:lnTo>
+                    <a:pt x="5873047" y="2809654"/>
+                  </a:lnTo>
+                  <a:lnTo>
+                    <a:pt x="5944669" y="2819864"/>
+                  </a:lnTo>
+                  <a:lnTo>
+                    <a:pt x="6016292" y="2829919"/>
+                  </a:lnTo>
+                  <a:lnTo>
+                    <a:pt x="6087914" y="2839823"/>
+                  </a:lnTo>
+                  <a:lnTo>
+                    <a:pt x="6159537" y="2849576"/>
+                  </a:lnTo>
+                  <a:lnTo>
+                    <a:pt x="6231159" y="2859181"/>
+                  </a:lnTo>
+                  <a:lnTo>
+                    <a:pt x="6302782" y="2868641"/>
+                  </a:lnTo>
+                  <a:lnTo>
+                    <a:pt x="6374404" y="2877958"/>
+                  </a:lnTo>
+                  <a:lnTo>
+                    <a:pt x="6446027" y="2887134"/>
+                  </a:lnTo>
+                  <a:lnTo>
+                    <a:pt x="6517649" y="2896170"/>
+                  </a:lnTo>
+                  <a:lnTo>
+                    <a:pt x="6589272" y="2905070"/>
+                  </a:lnTo>
+                  <a:lnTo>
+                    <a:pt x="6660894" y="2913835"/>
+                  </a:lnTo>
+                  <a:lnTo>
+                    <a:pt x="6732517" y="2922467"/>
+                  </a:lnTo>
+                  <a:lnTo>
+                    <a:pt x="6804139" y="2930968"/>
+                  </a:lnTo>
+                  <a:lnTo>
+                    <a:pt x="6875762" y="2939341"/>
+                  </a:lnTo>
+                  <a:lnTo>
+                    <a:pt x="6947385" y="2947587"/>
+                  </a:lnTo>
+                  <a:lnTo>
+                    <a:pt x="7019007" y="2955708"/>
+                  </a:lnTo>
+                  <a:lnTo>
+                    <a:pt x="7090630" y="2963706"/>
+                  </a:lnTo>
+                  <a:lnTo>
+                    <a:pt x="7090630" y="3433771"/>
+                  </a:lnTo>
+                  <a:lnTo>
+                    <a:pt x="7019007" y="3428965"/>
+                  </a:lnTo>
+                  <a:lnTo>
+                    <a:pt x="6947385" y="3423695"/>
+                  </a:lnTo>
+                  <a:lnTo>
+                    <a:pt x="6875762" y="3417919"/>
+                  </a:lnTo>
+                  <a:lnTo>
+                    <a:pt x="6804139" y="3411588"/>
+                  </a:lnTo>
+                  <a:lnTo>
+                    <a:pt x="6732517" y="3404647"/>
+                  </a:lnTo>
+                  <a:lnTo>
+                    <a:pt x="6660894" y="3397039"/>
+                  </a:lnTo>
+                  <a:lnTo>
+                    <a:pt x="6589272" y="3388699"/>
+                  </a:lnTo>
+                  <a:lnTo>
+                    <a:pt x="6517649" y="3379557"/>
+                  </a:lnTo>
+                  <a:lnTo>
+                    <a:pt x="6446027" y="3369535"/>
+                  </a:lnTo>
+                  <a:lnTo>
+                    <a:pt x="6374404" y="3358549"/>
+                  </a:lnTo>
+                  <a:lnTo>
+                    <a:pt x="6302782" y="3346507"/>
+                  </a:lnTo>
+                  <a:lnTo>
+                    <a:pt x="6231159" y="3333307"/>
+                  </a:lnTo>
+                  <a:lnTo>
+                    <a:pt x="6159537" y="3318837"/>
+                  </a:lnTo>
+                  <a:lnTo>
+                    <a:pt x="6087914" y="3302975"/>
+                  </a:lnTo>
+                  <a:lnTo>
+                    <a:pt x="6016292" y="3285587"/>
+                  </a:lnTo>
+                  <a:lnTo>
+                    <a:pt x="5944669" y="3266527"/>
+                  </a:lnTo>
+                  <a:lnTo>
+                    <a:pt x="5873047" y="3245634"/>
+                  </a:lnTo>
+                  <a:lnTo>
+                    <a:pt x="5801424" y="3222731"/>
+                  </a:lnTo>
+                  <a:lnTo>
+                    <a:pt x="5729802" y="3197625"/>
+                  </a:lnTo>
+                  <a:lnTo>
+                    <a:pt x="5658179" y="3170104"/>
+                  </a:lnTo>
+                  <a:lnTo>
+                    <a:pt x="5586557" y="3139936"/>
+                  </a:lnTo>
+                  <a:lnTo>
+                    <a:pt x="5514934" y="3106866"/>
+                  </a:lnTo>
+                  <a:lnTo>
+                    <a:pt x="5443311" y="3070616"/>
+                  </a:lnTo>
+                  <a:lnTo>
+                    <a:pt x="5371689" y="3030878"/>
+                  </a:lnTo>
+                  <a:lnTo>
+                    <a:pt x="5300066" y="2987319"/>
+                  </a:lnTo>
+                  <a:lnTo>
+                    <a:pt x="5228444" y="2939570"/>
+                  </a:lnTo>
+                  <a:lnTo>
+                    <a:pt x="5156821" y="2887228"/>
+                  </a:lnTo>
+                  <a:lnTo>
+                    <a:pt x="5085199" y="2829851"/>
+                  </a:lnTo>
+                  <a:lnTo>
+                    <a:pt x="5013576" y="2766956"/>
+                  </a:lnTo>
+                  <a:lnTo>
+                    <a:pt x="4941954" y="2698011"/>
+                  </a:lnTo>
+                  <a:lnTo>
+                    <a:pt x="4870331" y="2649073"/>
+                  </a:lnTo>
+                  <a:lnTo>
+                    <a:pt x="4798709" y="2636236"/>
+                  </a:lnTo>
+                  <a:lnTo>
+                    <a:pt x="4727086" y="2623202"/>
+                  </a:lnTo>
+                  <a:lnTo>
+                    <a:pt x="4655464" y="2609967"/>
+                  </a:lnTo>
+                  <a:lnTo>
+                    <a:pt x="4583841" y="2596529"/>
+                  </a:lnTo>
+                  <a:lnTo>
+                    <a:pt x="4512219" y="2582884"/>
+                  </a:lnTo>
+                  <a:lnTo>
+                    <a:pt x="4440596" y="2569029"/>
+                  </a:lnTo>
+                  <a:lnTo>
+                    <a:pt x="4368974" y="2554961"/>
+                  </a:lnTo>
+                  <a:lnTo>
+                    <a:pt x="4297351" y="2540677"/>
+                  </a:lnTo>
+                  <a:lnTo>
+                    <a:pt x="4225729" y="2526173"/>
+                  </a:lnTo>
+                  <a:lnTo>
+                    <a:pt x="4154106" y="2511446"/>
+                  </a:lnTo>
+                  <a:lnTo>
+                    <a:pt x="4082483" y="2496493"/>
+                  </a:lnTo>
+                  <a:lnTo>
+                    <a:pt x="4010861" y="2481309"/>
+                  </a:lnTo>
+                  <a:lnTo>
+                    <a:pt x="3939238" y="2465892"/>
+                  </a:lnTo>
+                  <a:lnTo>
+                    <a:pt x="3867616" y="2450238"/>
+                  </a:lnTo>
+                  <a:lnTo>
+                    <a:pt x="3795993" y="2434344"/>
+                  </a:lnTo>
+                  <a:lnTo>
+                    <a:pt x="3724371" y="2418204"/>
+                  </a:lnTo>
+                  <a:lnTo>
+                    <a:pt x="3652748" y="2401817"/>
+                  </a:lnTo>
+                  <a:lnTo>
+                    <a:pt x="3581126" y="2385177"/>
+                  </a:lnTo>
+                  <a:lnTo>
+                    <a:pt x="3509503" y="2368282"/>
+                  </a:lnTo>
+                  <a:lnTo>
+                    <a:pt x="3437881" y="2351127"/>
+                  </a:lnTo>
+                  <a:lnTo>
+                    <a:pt x="3366258" y="2333708"/>
+                  </a:lnTo>
+                  <a:lnTo>
+                    <a:pt x="3294636" y="2316021"/>
+                  </a:lnTo>
+                  <a:lnTo>
+                    <a:pt x="3223013" y="2298062"/>
+                  </a:lnTo>
+                  <a:lnTo>
+                    <a:pt x="3151391" y="2279827"/>
+                  </a:lnTo>
+                  <a:lnTo>
+                    <a:pt x="3079768" y="2261311"/>
+                  </a:lnTo>
+                  <a:lnTo>
+                    <a:pt x="3008146" y="2242511"/>
+                  </a:lnTo>
+                  <a:lnTo>
+                    <a:pt x="2936523" y="2223421"/>
+                  </a:lnTo>
+                  <a:lnTo>
+                    <a:pt x="2864901" y="2204038"/>
+                  </a:lnTo>
+                  <a:lnTo>
+                    <a:pt x="2793278" y="2184357"/>
+                  </a:lnTo>
+                  <a:lnTo>
+                    <a:pt x="2721655" y="2164373"/>
+                  </a:lnTo>
+                  <a:lnTo>
+                    <a:pt x="2650033" y="2144082"/>
+                  </a:lnTo>
+                  <a:lnTo>
+                    <a:pt x="2578410" y="2123478"/>
+                  </a:lnTo>
+                  <a:lnTo>
+                    <a:pt x="2506788" y="2102558"/>
+                  </a:lnTo>
+                  <a:lnTo>
+                    <a:pt x="2435165" y="2081316"/>
+                  </a:lnTo>
+                  <a:lnTo>
+                    <a:pt x="2363543" y="2059748"/>
+                  </a:lnTo>
+                  <a:lnTo>
+                    <a:pt x="2291920" y="2037847"/>
+                  </a:lnTo>
+                  <a:lnTo>
+                    <a:pt x="2220298" y="2015610"/>
+                  </a:lnTo>
+                  <a:lnTo>
+                    <a:pt x="2148675" y="1993031"/>
+                  </a:lnTo>
+                  <a:lnTo>
+                    <a:pt x="2077053" y="1970105"/>
+                  </a:lnTo>
+                  <a:lnTo>
+                    <a:pt x="2005430" y="1946826"/>
+                  </a:lnTo>
+                  <a:lnTo>
+                    <a:pt x="1933808" y="1923189"/>
+                  </a:lnTo>
+                  <a:lnTo>
+                    <a:pt x="1862185" y="1899188"/>
+                  </a:lnTo>
+                  <a:lnTo>
+                    <a:pt x="1790563" y="1874819"/>
+                  </a:lnTo>
+                  <a:lnTo>
+                    <a:pt x="1718940" y="1850074"/>
+                  </a:lnTo>
+                  <a:lnTo>
+                    <a:pt x="1647318" y="1824949"/>
+                  </a:lnTo>
+                  <a:lnTo>
+                    <a:pt x="1575695" y="1799438"/>
+                  </a:lnTo>
+                  <a:lnTo>
+                    <a:pt x="1504073" y="1773534"/>
+                  </a:lnTo>
+                  <a:lnTo>
+                    <a:pt x="1432450" y="1747232"/>
+                  </a:lnTo>
+                  <a:lnTo>
+                    <a:pt x="1360827" y="1720526"/>
+                  </a:lnTo>
+                  <a:lnTo>
+                    <a:pt x="1289205" y="1693408"/>
+                  </a:lnTo>
+                  <a:lnTo>
+                    <a:pt x="1217582" y="1665874"/>
+                  </a:lnTo>
+                  <a:lnTo>
+                    <a:pt x="1145960" y="1637916"/>
+                  </a:lnTo>
+                  <a:lnTo>
+                    <a:pt x="1074337" y="1609528"/>
+                  </a:lnTo>
+                  <a:lnTo>
+                    <a:pt x="1002715" y="1580704"/>
+                  </a:lnTo>
+                  <a:lnTo>
+                    <a:pt x="931092" y="1551436"/>
+                  </a:lnTo>
+                  <a:lnTo>
+                    <a:pt x="859470" y="1521718"/>
+                  </a:lnTo>
+                  <a:lnTo>
+                    <a:pt x="787847" y="1491543"/>
+                  </a:lnTo>
+                  <a:lnTo>
+                    <a:pt x="716225" y="1460904"/>
+                  </a:lnTo>
+                  <a:lnTo>
+                    <a:pt x="644602" y="1429794"/>
+                  </a:lnTo>
+                  <a:lnTo>
+                    <a:pt x="572980" y="1398205"/>
+                  </a:lnTo>
+                  <a:lnTo>
+                    <a:pt x="501357" y="1366131"/>
+                  </a:lnTo>
+                  <a:lnTo>
+                    <a:pt x="429735" y="1333563"/>
+                  </a:lnTo>
+                  <a:lnTo>
+                    <a:pt x="358112" y="1300494"/>
+                  </a:lnTo>
+                  <a:lnTo>
+                    <a:pt x="286490" y="1266917"/>
+                  </a:lnTo>
+                  <a:lnTo>
+                    <a:pt x="214867" y="1232824"/>
+                  </a:lnTo>
+                  <a:lnTo>
+                    <a:pt x="143245" y="1198206"/>
+                  </a:lnTo>
+                  <a:lnTo>
+                    <a:pt x="71622" y="1163055"/>
+                  </a:lnTo>
+                  <a:lnTo>
+                    <a:pt x="0" y="1127364"/>
                   </a:lnTo>
                   <a:lnTo>
                     <a:pt x="0" y="0"/>
@@ -3447,153 +3480,156 @@
           </p:nvSpPr>
           <p:spPr>
             <a:xfrm>
-              <a:off x="4984943" y="2073503"/>
-              <a:ext cx="3277735" cy="3090111"/>
+              <a:off x="4953108" y="2073503"/>
+              <a:ext cx="3309571" cy="2963706"/>
             </a:xfrm>
             <a:custGeom>
               <a:avLst/>
               <a:pathLst>
-                <a:path w="3277735" h="3090111">
+                <a:path w="3309571" h="2963706">
                   <a:moveTo>
                     <a:pt x="0" y="0"/>
                   </a:moveTo>
                   <a:lnTo>
-                    <a:pt x="54722" y="245283"/>
-                  </a:lnTo>
-                  <a:lnTo>
-                    <a:pt x="126344" y="537365"/>
-                  </a:lnTo>
-                  <a:lnTo>
-                    <a:pt x="197967" y="803103"/>
-                  </a:lnTo>
-                  <a:lnTo>
-                    <a:pt x="269589" y="1044875"/>
-                  </a:lnTo>
-                  <a:lnTo>
-                    <a:pt x="341212" y="1264840"/>
-                  </a:lnTo>
-                  <a:lnTo>
-                    <a:pt x="412834" y="1464967"/>
-                  </a:lnTo>
-                  <a:lnTo>
-                    <a:pt x="484457" y="1647043"/>
-                  </a:lnTo>
-                  <a:lnTo>
-                    <a:pt x="556079" y="1812699"/>
-                  </a:lnTo>
-                  <a:lnTo>
-                    <a:pt x="627702" y="1963413"/>
-                  </a:lnTo>
-                  <a:lnTo>
-                    <a:pt x="699324" y="2100534"/>
-                  </a:lnTo>
-                  <a:lnTo>
-                    <a:pt x="770947" y="2225288"/>
-                  </a:lnTo>
-                  <a:lnTo>
-                    <a:pt x="842569" y="2338790"/>
-                  </a:lnTo>
-                  <a:lnTo>
-                    <a:pt x="914192" y="2442056"/>
-                  </a:lnTo>
-                  <a:lnTo>
-                    <a:pt x="985814" y="2536007"/>
-                  </a:lnTo>
-                  <a:lnTo>
-                    <a:pt x="1057437" y="2621485"/>
-                  </a:lnTo>
-                  <a:lnTo>
-                    <a:pt x="1129059" y="2666117"/>
-                  </a:lnTo>
-                  <a:lnTo>
-                    <a:pt x="1200682" y="2685798"/>
-                  </a:lnTo>
-                  <a:lnTo>
-                    <a:pt x="1272305" y="2705006"/>
-                  </a:lnTo>
-                  <a:lnTo>
-                    <a:pt x="1343927" y="2723752"/>
-                  </a:lnTo>
-                  <a:lnTo>
-                    <a:pt x="1415550" y="2742046"/>
-                  </a:lnTo>
-                  <a:lnTo>
-                    <a:pt x="1487172" y="2759900"/>
-                  </a:lnTo>
-                  <a:lnTo>
-                    <a:pt x="1558795" y="2777324"/>
-                  </a:lnTo>
-                  <a:lnTo>
-                    <a:pt x="1630417" y="2794329"/>
-                  </a:lnTo>
-                  <a:lnTo>
-                    <a:pt x="1702040" y="2810925"/>
-                  </a:lnTo>
-                  <a:lnTo>
-                    <a:pt x="1773662" y="2827121"/>
-                  </a:lnTo>
-                  <a:lnTo>
-                    <a:pt x="1845285" y="2842927"/>
-                  </a:lnTo>
-                  <a:lnTo>
-                    <a:pt x="1916907" y="2858352"/>
-                  </a:lnTo>
-                  <a:lnTo>
-                    <a:pt x="1988530" y="2873407"/>
-                  </a:lnTo>
-                  <a:lnTo>
-                    <a:pt x="2060152" y="2888098"/>
-                  </a:lnTo>
-                  <a:lnTo>
-                    <a:pt x="2131775" y="2902437"/>
-                  </a:lnTo>
-                  <a:lnTo>
-                    <a:pt x="2203397" y="2916430"/>
-                  </a:lnTo>
-                  <a:lnTo>
-                    <a:pt x="2275020" y="2930086"/>
-                  </a:lnTo>
-                  <a:lnTo>
-                    <a:pt x="2346642" y="2943414"/>
-                  </a:lnTo>
-                  <a:lnTo>
-                    <a:pt x="2418265" y="2956420"/>
-                  </a:lnTo>
-                  <a:lnTo>
-                    <a:pt x="2489887" y="2969114"/>
-                  </a:lnTo>
-                  <a:lnTo>
-                    <a:pt x="2561510" y="2981502"/>
-                  </a:lnTo>
-                  <a:lnTo>
-                    <a:pt x="2633133" y="2993592"/>
-                  </a:lnTo>
-                  <a:lnTo>
-                    <a:pt x="2704755" y="3005391"/>
-                  </a:lnTo>
-                  <a:lnTo>
-                    <a:pt x="2776378" y="3016906"/>
-                  </a:lnTo>
-                  <a:lnTo>
-                    <a:pt x="2848000" y="3028143"/>
-                  </a:lnTo>
-                  <a:lnTo>
-                    <a:pt x="2919623" y="3039110"/>
-                  </a:lnTo>
-                  <a:lnTo>
-                    <a:pt x="2991245" y="3049813"/>
-                  </a:lnTo>
-                  <a:lnTo>
-                    <a:pt x="3062868" y="3060259"/>
-                  </a:lnTo>
-                  <a:lnTo>
-                    <a:pt x="3134490" y="3070453"/>
-                  </a:lnTo>
-                  <a:lnTo>
-                    <a:pt x="3206113" y="3080402"/>
-                  </a:lnTo>
-                  <a:lnTo>
-                    <a:pt x="3277735" y="3090111"/>
+                    <a:pt x="14934" y="68499"/>
+                  </a:lnTo>
+                  <a:lnTo>
+                    <a:pt x="86557" y="368172"/>
+                  </a:lnTo>
+                  <a:lnTo>
+                    <a:pt x="158179" y="641551"/>
+                  </a:lnTo>
+                  <a:lnTo>
+                    <a:pt x="229802" y="890941"/>
+                  </a:lnTo>
+                  <a:lnTo>
+                    <a:pt x="301424" y="1118449"/>
+                  </a:lnTo>
+                  <a:lnTo>
+                    <a:pt x="373047" y="1325994"/>
+                  </a:lnTo>
+                  <a:lnTo>
+                    <a:pt x="444670" y="1515328"/>
+                  </a:lnTo>
+                  <a:lnTo>
+                    <a:pt x="516292" y="1688048"/>
+                  </a:lnTo>
+                  <a:lnTo>
+                    <a:pt x="587915" y="1845613"/>
+                  </a:lnTo>
+                  <a:lnTo>
+                    <a:pt x="659537" y="1989352"/>
+                  </a:lnTo>
+                  <a:lnTo>
+                    <a:pt x="731160" y="2120479"/>
+                  </a:lnTo>
+                  <a:lnTo>
+                    <a:pt x="802782" y="2240100"/>
+                  </a:lnTo>
+                  <a:lnTo>
+                    <a:pt x="874405" y="2349225"/>
+                  </a:lnTo>
+                  <a:lnTo>
+                    <a:pt x="946027" y="2448774"/>
+                  </a:lnTo>
+                  <a:lnTo>
+                    <a:pt x="1017650" y="2539589"/>
+                  </a:lnTo>
+                  <a:lnTo>
+                    <a:pt x="1089272" y="2622435"/>
+                  </a:lnTo>
+                  <a:lnTo>
+                    <a:pt x="1160895" y="2661715"/>
+                  </a:lnTo>
+                  <a:lnTo>
+                    <a:pt x="1232517" y="2674166"/>
+                  </a:lnTo>
+                  <a:lnTo>
+                    <a:pt x="1304140" y="2686428"/>
+                  </a:lnTo>
+                  <a:lnTo>
+                    <a:pt x="1375762" y="2698505"/>
+                  </a:lnTo>
+                  <a:lnTo>
+                    <a:pt x="1447385" y="2710399"/>
+                  </a:lnTo>
+                  <a:lnTo>
+                    <a:pt x="1519007" y="2722112"/>
+                  </a:lnTo>
+                  <a:lnTo>
+                    <a:pt x="1590630" y="2733648"/>
+                  </a:lnTo>
+                  <a:lnTo>
+                    <a:pt x="1662252" y="2745010"/>
+                  </a:lnTo>
+                  <a:lnTo>
+                    <a:pt x="1733875" y="2756199"/>
+                  </a:lnTo>
+                  <a:lnTo>
+                    <a:pt x="1805498" y="2767219"/>
+                  </a:lnTo>
+                  <a:lnTo>
+                    <a:pt x="1877120" y="2778072"/>
+                  </a:lnTo>
+                  <a:lnTo>
+                    <a:pt x="1948743" y="2788760"/>
+                  </a:lnTo>
+                  <a:lnTo>
+                    <a:pt x="2020365" y="2799287"/>
+                  </a:lnTo>
+                  <a:lnTo>
+                    <a:pt x="2091988" y="2809654"/>
+                  </a:lnTo>
+                  <a:lnTo>
+                    <a:pt x="2163610" y="2819864"/>
+                  </a:lnTo>
+                  <a:lnTo>
+                    <a:pt x="2235233" y="2829919"/>
+                  </a:lnTo>
+                  <a:lnTo>
+                    <a:pt x="2306855" y="2839823"/>
+                  </a:lnTo>
+                  <a:lnTo>
+                    <a:pt x="2378478" y="2849576"/>
+                  </a:lnTo>
+                  <a:lnTo>
+                    <a:pt x="2450100" y="2859181"/>
+                  </a:lnTo>
+                  <a:lnTo>
+                    <a:pt x="2521723" y="2868641"/>
+                  </a:lnTo>
+                  <a:lnTo>
+                    <a:pt x="2593345" y="2877958"/>
+                  </a:lnTo>
+                  <a:lnTo>
+                    <a:pt x="2664968" y="2887134"/>
+                  </a:lnTo>
+                  <a:lnTo>
+                    <a:pt x="2736590" y="2896170"/>
+                  </a:lnTo>
+                  <a:lnTo>
+                    <a:pt x="2808213" y="2905070"/>
+                  </a:lnTo>
+                  <a:lnTo>
+                    <a:pt x="2879835" y="2913835"/>
+                  </a:lnTo>
+                  <a:lnTo>
+                    <a:pt x="2951458" y="2922467"/>
+                  </a:lnTo>
+                  <a:lnTo>
+                    <a:pt x="3023080" y="2930968"/>
+                  </a:lnTo>
+                  <a:lnTo>
+                    <a:pt x="3094703" y="2939341"/>
+                  </a:lnTo>
+                  <a:lnTo>
+                    <a:pt x="3166326" y="2947587"/>
+                  </a:lnTo>
+                  <a:lnTo>
+                    <a:pt x="3237948" y="2955708"/>
+                  </a:lnTo>
+                  <a:lnTo>
+                    <a:pt x="3309571" y="2963706"/>
                   </a:lnTo>
                 </a:path>
               </a:pathLst>
@@ -3613,282 +3649,309 @@
           </p:nvSpPr>
           <p:spPr>
             <a:xfrm>
-              <a:off x="1853654" y="2073503"/>
-              <a:ext cx="6409024" cy="3437711"/>
+              <a:off x="1172049" y="3200867"/>
+              <a:ext cx="7090630" cy="2306407"/>
             </a:xfrm>
             <a:custGeom>
               <a:avLst/>
               <a:pathLst>
-                <a:path w="6409024" h="3437711">
+                <a:path w="7090630" h="2306407">
                   <a:moveTo>
-                    <a:pt x="6409024" y="3437711"/>
+                    <a:pt x="7090630" y="2306407"/>
                   </a:moveTo>
                   <a:lnTo>
-                    <a:pt x="6337402" y="3433148"/>
-                  </a:lnTo>
-                  <a:lnTo>
-                    <a:pt x="6265779" y="3428132"/>
-                  </a:lnTo>
-                  <a:lnTo>
-                    <a:pt x="6194156" y="3422619"/>
-                  </a:lnTo>
-                  <a:lnTo>
-                    <a:pt x="6122534" y="3416559"/>
-                  </a:lnTo>
-                  <a:lnTo>
-                    <a:pt x="6050911" y="3409898"/>
-                  </a:lnTo>
-                  <a:lnTo>
-                    <a:pt x="5979289" y="3402578"/>
-                  </a:lnTo>
-                  <a:lnTo>
-                    <a:pt x="5907666" y="3394531"/>
-                  </a:lnTo>
-                  <a:lnTo>
-                    <a:pt x="5836044" y="3385687"/>
-                  </a:lnTo>
-                  <a:lnTo>
-                    <a:pt x="5764421" y="3375966"/>
-                  </a:lnTo>
-                  <a:lnTo>
-                    <a:pt x="5692799" y="3365282"/>
-                  </a:lnTo>
-                  <a:lnTo>
-                    <a:pt x="5621176" y="3353538"/>
-                  </a:lnTo>
-                  <a:lnTo>
-                    <a:pt x="5549554" y="3340630"/>
-                  </a:lnTo>
-                  <a:lnTo>
-                    <a:pt x="5477931" y="3326443"/>
-                  </a:lnTo>
-                  <a:lnTo>
-                    <a:pt x="5406309" y="3310849"/>
-                  </a:lnTo>
-                  <a:lnTo>
-                    <a:pt x="5334686" y="3293709"/>
-                  </a:lnTo>
-                  <a:lnTo>
-                    <a:pt x="5263064" y="3274870"/>
-                  </a:lnTo>
-                  <a:lnTo>
-                    <a:pt x="5191441" y="3254164"/>
-                  </a:lnTo>
-                  <a:lnTo>
-                    <a:pt x="5119819" y="3231405"/>
-                  </a:lnTo>
-                  <a:lnTo>
-                    <a:pt x="5048196" y="3206390"/>
-                  </a:lnTo>
-                  <a:lnTo>
-                    <a:pt x="4976574" y="3178895"/>
-                  </a:lnTo>
-                  <a:lnTo>
-                    <a:pt x="4904951" y="3148674"/>
-                  </a:lnTo>
-                  <a:lnTo>
-                    <a:pt x="4833328" y="3115458"/>
-                  </a:lnTo>
-                  <a:lnTo>
-                    <a:pt x="4761706" y="3078948"/>
-                  </a:lnTo>
-                  <a:lnTo>
-                    <a:pt x="4690083" y="3038820"/>
-                  </a:lnTo>
-                  <a:lnTo>
-                    <a:pt x="4618461" y="2994713"/>
-                  </a:lnTo>
-                  <a:lnTo>
-                    <a:pt x="4546838" y="2946234"/>
-                  </a:lnTo>
-                  <a:lnTo>
-                    <a:pt x="4475216" y="2892949"/>
-                  </a:lnTo>
-                  <a:lnTo>
-                    <a:pt x="4403593" y="2834382"/>
-                  </a:lnTo>
-                  <a:lnTo>
-                    <a:pt x="4331971" y="2770009"/>
-                  </a:lnTo>
-                  <a:lnTo>
-                    <a:pt x="4260348" y="2699254"/>
-                  </a:lnTo>
-                  <a:lnTo>
-                    <a:pt x="4188726" y="2645949"/>
-                  </a:lnTo>
-                  <a:lnTo>
-                    <a:pt x="4117103" y="2625285"/>
-                  </a:lnTo>
-                  <a:lnTo>
-                    <a:pt x="4045481" y="2604111"/>
-                  </a:lnTo>
-                  <a:lnTo>
-                    <a:pt x="3973858" y="2582414"/>
-                  </a:lnTo>
-                  <a:lnTo>
-                    <a:pt x="3902236" y="2560182"/>
-                  </a:lnTo>
-                  <a:lnTo>
-                    <a:pt x="3830613" y="2537402"/>
-                  </a:lnTo>
-                  <a:lnTo>
-                    <a:pt x="3758991" y="2514060"/>
-                  </a:lnTo>
-                  <a:lnTo>
-                    <a:pt x="3687368" y="2490142"/>
-                  </a:lnTo>
-                  <a:lnTo>
-                    <a:pt x="3615746" y="2465635"/>
-                  </a:lnTo>
-                  <a:lnTo>
-                    <a:pt x="3544123" y="2440523"/>
-                  </a:lnTo>
-                  <a:lnTo>
-                    <a:pt x="3472501" y="2414791"/>
-                  </a:lnTo>
-                  <a:lnTo>
-                    <a:pt x="3400878" y="2388425"/>
-                  </a:lnTo>
-                  <a:lnTo>
-                    <a:pt x="3329255" y="2361408"/>
-                  </a:lnTo>
-                  <a:lnTo>
-                    <a:pt x="3257633" y="2333725"/>
-                  </a:lnTo>
-                  <a:lnTo>
-                    <a:pt x="3186010" y="2305360"/>
-                  </a:lnTo>
-                  <a:lnTo>
-                    <a:pt x="3114388" y="2276294"/>
-                  </a:lnTo>
-                  <a:lnTo>
-                    <a:pt x="3042765" y="2246512"/>
-                  </a:lnTo>
-                  <a:lnTo>
-                    <a:pt x="2971143" y="2215995"/>
-                  </a:lnTo>
-                  <a:lnTo>
-                    <a:pt x="2899520" y="2184725"/>
-                  </a:lnTo>
-                  <a:lnTo>
-                    <a:pt x="2827898" y="2152684"/>
-                  </a:lnTo>
-                  <a:lnTo>
-                    <a:pt x="2756275" y="2119853"/>
-                  </a:lnTo>
-                  <a:lnTo>
-                    <a:pt x="2684653" y="2086212"/>
-                  </a:lnTo>
-                  <a:lnTo>
-                    <a:pt x="2613030" y="2051741"/>
-                  </a:lnTo>
-                  <a:lnTo>
-                    <a:pt x="2541408" y="2016420"/>
-                  </a:lnTo>
-                  <a:lnTo>
-                    <a:pt x="2469785" y="1980228"/>
-                  </a:lnTo>
-                  <a:lnTo>
-                    <a:pt x="2398163" y="1943143"/>
-                  </a:lnTo>
-                  <a:lnTo>
-                    <a:pt x="2326540" y="1905144"/>
-                  </a:lnTo>
-                  <a:lnTo>
-                    <a:pt x="2254918" y="1866207"/>
-                  </a:lnTo>
-                  <a:lnTo>
-                    <a:pt x="2183295" y="1826309"/>
-                  </a:lnTo>
-                  <a:lnTo>
-                    <a:pt x="2111673" y="1785428"/>
-                  </a:lnTo>
-                  <a:lnTo>
-                    <a:pt x="2040050" y="1743538"/>
-                  </a:lnTo>
-                  <a:lnTo>
-                    <a:pt x="1968427" y="1700615"/>
-                  </a:lnTo>
-                  <a:lnTo>
-                    <a:pt x="1896805" y="1656634"/>
-                  </a:lnTo>
-                  <a:lnTo>
-                    <a:pt x="1825182" y="1611567"/>
-                  </a:lnTo>
-                  <a:lnTo>
-                    <a:pt x="1753560" y="1565389"/>
-                  </a:lnTo>
-                  <a:lnTo>
-                    <a:pt x="1681937" y="1518072"/>
-                  </a:lnTo>
-                  <a:lnTo>
-                    <a:pt x="1610315" y="1469588"/>
-                  </a:lnTo>
-                  <a:lnTo>
-                    <a:pt x="1538692" y="1419908"/>
-                  </a:lnTo>
-                  <a:lnTo>
-                    <a:pt x="1467070" y="1369002"/>
-                  </a:lnTo>
-                  <a:lnTo>
-                    <a:pt x="1395447" y="1316841"/>
-                  </a:lnTo>
-                  <a:lnTo>
-                    <a:pt x="1323825" y="1263394"/>
-                  </a:lnTo>
-                  <a:lnTo>
-                    <a:pt x="1252202" y="1208628"/>
-                  </a:lnTo>
-                  <a:lnTo>
-                    <a:pt x="1180580" y="1152511"/>
-                  </a:lnTo>
-                  <a:lnTo>
-                    <a:pt x="1108957" y="1095010"/>
-                  </a:lnTo>
-                  <a:lnTo>
-                    <a:pt x="1037335" y="1036091"/>
-                  </a:lnTo>
-                  <a:lnTo>
-                    <a:pt x="965712" y="975719"/>
-                  </a:lnTo>
-                  <a:lnTo>
-                    <a:pt x="894090" y="913857"/>
-                  </a:lnTo>
-                  <a:lnTo>
-                    <a:pt x="822467" y="850470"/>
-                  </a:lnTo>
-                  <a:lnTo>
-                    <a:pt x="750845" y="785519"/>
-                  </a:lnTo>
-                  <a:lnTo>
-                    <a:pt x="679222" y="718966"/>
-                  </a:lnTo>
-                  <a:lnTo>
-                    <a:pt x="607599" y="650771"/>
-                  </a:lnTo>
-                  <a:lnTo>
-                    <a:pt x="535977" y="580895"/>
-                  </a:lnTo>
-                  <a:lnTo>
-                    <a:pt x="464354" y="509295"/>
-                  </a:lnTo>
-                  <a:lnTo>
-                    <a:pt x="392732" y="435929"/>
-                  </a:lnTo>
-                  <a:lnTo>
-                    <a:pt x="321109" y="360753"/>
-                  </a:lnTo>
-                  <a:lnTo>
-                    <a:pt x="249487" y="283723"/>
-                  </a:lnTo>
-                  <a:lnTo>
-                    <a:pt x="177864" y="204793"/>
-                  </a:lnTo>
-                  <a:lnTo>
-                    <a:pt x="106242" y="123916"/>
-                  </a:lnTo>
-                  <a:lnTo>
-                    <a:pt x="34619" y="41045"/>
+                    <a:pt x="7019007" y="2301600"/>
+                  </a:lnTo>
+                  <a:lnTo>
+                    <a:pt x="6947385" y="2296330"/>
+                  </a:lnTo>
+                  <a:lnTo>
+                    <a:pt x="6875762" y="2290554"/>
+                  </a:lnTo>
+                  <a:lnTo>
+                    <a:pt x="6804139" y="2284223"/>
+                  </a:lnTo>
+                  <a:lnTo>
+                    <a:pt x="6732517" y="2277282"/>
+                  </a:lnTo>
+                  <a:lnTo>
+                    <a:pt x="6660894" y="2269674"/>
+                  </a:lnTo>
+                  <a:lnTo>
+                    <a:pt x="6589272" y="2261334"/>
+                  </a:lnTo>
+                  <a:lnTo>
+                    <a:pt x="6517649" y="2252192"/>
+                  </a:lnTo>
+                  <a:lnTo>
+                    <a:pt x="6446027" y="2242170"/>
+                  </a:lnTo>
+                  <a:lnTo>
+                    <a:pt x="6374404" y="2231185"/>
+                  </a:lnTo>
+                  <a:lnTo>
+                    <a:pt x="6302782" y="2219142"/>
+                  </a:lnTo>
+                  <a:lnTo>
+                    <a:pt x="6231159" y="2205942"/>
+                  </a:lnTo>
+                  <a:lnTo>
+                    <a:pt x="6159537" y="2191472"/>
+                  </a:lnTo>
+                  <a:lnTo>
+                    <a:pt x="6087914" y="2175610"/>
+                  </a:lnTo>
+                  <a:lnTo>
+                    <a:pt x="6016292" y="2158222"/>
+                  </a:lnTo>
+                  <a:lnTo>
+                    <a:pt x="5944669" y="2139162"/>
+                  </a:lnTo>
+                  <a:lnTo>
+                    <a:pt x="5873047" y="2118269"/>
+                  </a:lnTo>
+                  <a:lnTo>
+                    <a:pt x="5801424" y="2095366"/>
+                  </a:lnTo>
+                  <a:lnTo>
+                    <a:pt x="5729802" y="2070260"/>
+                  </a:lnTo>
+                  <a:lnTo>
+                    <a:pt x="5658179" y="2042739"/>
+                  </a:lnTo>
+                  <a:lnTo>
+                    <a:pt x="5586557" y="2012571"/>
+                  </a:lnTo>
+                  <a:lnTo>
+                    <a:pt x="5514934" y="1979501"/>
+                  </a:lnTo>
+                  <a:lnTo>
+                    <a:pt x="5443311" y="1943251"/>
+                  </a:lnTo>
+                  <a:lnTo>
+                    <a:pt x="5371689" y="1903514"/>
+                  </a:lnTo>
+                  <a:lnTo>
+                    <a:pt x="5300066" y="1859954"/>
+                  </a:lnTo>
+                  <a:lnTo>
+                    <a:pt x="5228444" y="1812205"/>
+                  </a:lnTo>
+                  <a:lnTo>
+                    <a:pt x="5156821" y="1759863"/>
+                  </a:lnTo>
+                  <a:lnTo>
+                    <a:pt x="5085199" y="1702487"/>
+                  </a:lnTo>
+                  <a:lnTo>
+                    <a:pt x="5013576" y="1639591"/>
+                  </a:lnTo>
+                  <a:lnTo>
+                    <a:pt x="4941954" y="1570646"/>
+                  </a:lnTo>
+                  <a:lnTo>
+                    <a:pt x="4870331" y="1521708"/>
+                  </a:lnTo>
+                  <a:lnTo>
+                    <a:pt x="4798709" y="1508871"/>
+                  </a:lnTo>
+                  <a:lnTo>
+                    <a:pt x="4727086" y="1495837"/>
+                  </a:lnTo>
+                  <a:lnTo>
+                    <a:pt x="4655464" y="1482602"/>
+                  </a:lnTo>
+                  <a:lnTo>
+                    <a:pt x="4583841" y="1469164"/>
+                  </a:lnTo>
+                  <a:lnTo>
+                    <a:pt x="4512219" y="1455519"/>
+                  </a:lnTo>
+                  <a:lnTo>
+                    <a:pt x="4440596" y="1441664"/>
+                  </a:lnTo>
+                  <a:lnTo>
+                    <a:pt x="4368974" y="1427596"/>
+                  </a:lnTo>
+                  <a:lnTo>
+                    <a:pt x="4297351" y="1413312"/>
+                  </a:lnTo>
+                  <a:lnTo>
+                    <a:pt x="4225729" y="1398808"/>
+                  </a:lnTo>
+                  <a:lnTo>
+                    <a:pt x="4154106" y="1384081"/>
+                  </a:lnTo>
+                  <a:lnTo>
+                    <a:pt x="4082483" y="1369128"/>
+                  </a:lnTo>
+                  <a:lnTo>
+                    <a:pt x="4010861" y="1353945"/>
+                  </a:lnTo>
+                  <a:lnTo>
+                    <a:pt x="3939238" y="1338528"/>
+                  </a:lnTo>
+                  <a:lnTo>
+                    <a:pt x="3867616" y="1322874"/>
+                  </a:lnTo>
+                  <a:lnTo>
+                    <a:pt x="3795993" y="1306979"/>
+                  </a:lnTo>
+                  <a:lnTo>
+                    <a:pt x="3724371" y="1290840"/>
+                  </a:lnTo>
+                  <a:lnTo>
+                    <a:pt x="3652748" y="1274452"/>
+                  </a:lnTo>
+                  <a:lnTo>
+                    <a:pt x="3581126" y="1257813"/>
+                  </a:lnTo>
+                  <a:lnTo>
+                    <a:pt x="3509503" y="1240917"/>
+                  </a:lnTo>
+                  <a:lnTo>
+                    <a:pt x="3437881" y="1223762"/>
+                  </a:lnTo>
+                  <a:lnTo>
+                    <a:pt x="3366258" y="1206343"/>
+                  </a:lnTo>
+                  <a:lnTo>
+                    <a:pt x="3294636" y="1188656"/>
+                  </a:lnTo>
+                  <a:lnTo>
+                    <a:pt x="3223013" y="1170697"/>
+                  </a:lnTo>
+                  <a:lnTo>
+                    <a:pt x="3151391" y="1152462"/>
+                  </a:lnTo>
+                  <a:lnTo>
+                    <a:pt x="3079768" y="1133946"/>
+                  </a:lnTo>
+                  <a:lnTo>
+                    <a:pt x="3008146" y="1115146"/>
+                  </a:lnTo>
+                  <a:lnTo>
+                    <a:pt x="2936523" y="1096056"/>
+                  </a:lnTo>
+                  <a:lnTo>
+                    <a:pt x="2864901" y="1076673"/>
+                  </a:lnTo>
+                  <a:lnTo>
+                    <a:pt x="2793278" y="1056992"/>
+                  </a:lnTo>
+                  <a:lnTo>
+                    <a:pt x="2721655" y="1037008"/>
+                  </a:lnTo>
+                  <a:lnTo>
+                    <a:pt x="2650033" y="1016717"/>
+                  </a:lnTo>
+                  <a:lnTo>
+                    <a:pt x="2578410" y="996114"/>
+                  </a:lnTo>
+                  <a:lnTo>
+                    <a:pt x="2506788" y="975193"/>
+                  </a:lnTo>
+                  <a:lnTo>
+                    <a:pt x="2435165" y="953952"/>
+                  </a:lnTo>
+                  <a:lnTo>
+                    <a:pt x="2363543" y="932383"/>
+                  </a:lnTo>
+                  <a:lnTo>
+                    <a:pt x="2291920" y="910483"/>
+                  </a:lnTo>
+                  <a:lnTo>
+                    <a:pt x="2220298" y="888246"/>
+                  </a:lnTo>
+                  <a:lnTo>
+                    <a:pt x="2148675" y="865666"/>
+                  </a:lnTo>
+                  <a:lnTo>
+                    <a:pt x="2077053" y="842740"/>
+                  </a:lnTo>
+                  <a:lnTo>
+                    <a:pt x="2005430" y="819461"/>
+                  </a:lnTo>
+                  <a:lnTo>
+                    <a:pt x="1933808" y="795824"/>
+                  </a:lnTo>
+                  <a:lnTo>
+                    <a:pt x="1862185" y="771824"/>
+                  </a:lnTo>
+                  <a:lnTo>
+                    <a:pt x="1790563" y="747454"/>
+                  </a:lnTo>
+                  <a:lnTo>
+                    <a:pt x="1718940" y="722710"/>
+                  </a:lnTo>
+                  <a:lnTo>
+                    <a:pt x="1647318" y="697585"/>
+                  </a:lnTo>
+                  <a:lnTo>
+                    <a:pt x="1575695" y="672073"/>
+                  </a:lnTo>
+                  <a:lnTo>
+                    <a:pt x="1504073" y="646169"/>
+                  </a:lnTo>
+                  <a:lnTo>
+                    <a:pt x="1432450" y="619867"/>
+                  </a:lnTo>
+                  <a:lnTo>
+                    <a:pt x="1360827" y="593161"/>
+                  </a:lnTo>
+                  <a:lnTo>
+                    <a:pt x="1289205" y="566043"/>
+                  </a:lnTo>
+                  <a:lnTo>
+                    <a:pt x="1217582" y="538509"/>
+                  </a:lnTo>
+                  <a:lnTo>
+                    <a:pt x="1145960" y="510551"/>
+                  </a:lnTo>
+                  <a:lnTo>
+                    <a:pt x="1074337" y="482163"/>
+                  </a:lnTo>
+                  <a:lnTo>
+                    <a:pt x="1002715" y="453339"/>
+                  </a:lnTo>
+                  <a:lnTo>
+                    <a:pt x="931092" y="424071"/>
+                  </a:lnTo>
+                  <a:lnTo>
+                    <a:pt x="859470" y="394353"/>
+                  </a:lnTo>
+                  <a:lnTo>
+                    <a:pt x="787847" y="364178"/>
+                  </a:lnTo>
+                  <a:lnTo>
+                    <a:pt x="716225" y="333539"/>
+                  </a:lnTo>
+                  <a:lnTo>
+                    <a:pt x="644602" y="302429"/>
+                  </a:lnTo>
+                  <a:lnTo>
+                    <a:pt x="572980" y="270840"/>
+                  </a:lnTo>
+                  <a:lnTo>
+                    <a:pt x="501357" y="238766"/>
+                  </a:lnTo>
+                  <a:lnTo>
+                    <a:pt x="429735" y="206198"/>
+                  </a:lnTo>
+                  <a:lnTo>
+                    <a:pt x="358112" y="173130"/>
+                  </a:lnTo>
+                  <a:lnTo>
+                    <a:pt x="286490" y="139552"/>
+                  </a:lnTo>
+                  <a:lnTo>
+                    <a:pt x="214867" y="105459"/>
+                  </a:lnTo>
+                  <a:lnTo>
+                    <a:pt x="143245" y="70841"/>
+                  </a:lnTo>
+                  <a:lnTo>
+                    <a:pt x="71622" y="35690"/>
                   </a:lnTo>
                   <a:lnTo>
                     <a:pt x="0" y="0"/>
@@ -3911,180 +3974,189 @@
           </p:nvSpPr>
           <p:spPr>
             <a:xfrm>
-              <a:off x="4343079" y="2073503"/>
-              <a:ext cx="3919600" cy="3349132"/>
+              <a:off x="4152792" y="2073503"/>
+              <a:ext cx="4109887" cy="3322535"/>
             </a:xfrm>
             <a:custGeom>
               <a:avLst/>
               <a:pathLst>
-                <a:path w="3919600" h="3349132">
+                <a:path w="4109887" h="3322535">
                   <a:moveTo>
                     <a:pt x="0" y="0"/>
                   </a:moveTo>
                   <a:lnTo>
-                    <a:pt x="51983" y="148270"/>
-                  </a:lnTo>
-                  <a:lnTo>
-                    <a:pt x="123606" y="340765"/>
-                  </a:lnTo>
-                  <a:lnTo>
-                    <a:pt x="195228" y="522150"/>
-                  </a:lnTo>
-                  <a:lnTo>
-                    <a:pt x="266851" y="693068"/>
-                  </a:lnTo>
-                  <a:lnTo>
-                    <a:pt x="338473" y="854122"/>
-                  </a:lnTo>
-                  <a:lnTo>
-                    <a:pt x="410096" y="1005881"/>
-                  </a:lnTo>
-                  <a:lnTo>
-                    <a:pt x="481718" y="1148882"/>
-                  </a:lnTo>
-                  <a:lnTo>
-                    <a:pt x="553341" y="1283630"/>
-                  </a:lnTo>
-                  <a:lnTo>
-                    <a:pt x="624964" y="1410602"/>
-                  </a:lnTo>
-                  <a:lnTo>
-                    <a:pt x="696586" y="1530246"/>
-                  </a:lnTo>
-                  <a:lnTo>
-                    <a:pt x="768209" y="1642985"/>
-                  </a:lnTo>
-                  <a:lnTo>
-                    <a:pt x="839831" y="1749218"/>
-                  </a:lnTo>
-                  <a:lnTo>
-                    <a:pt x="911454" y="1849320"/>
-                  </a:lnTo>
-                  <a:lnTo>
-                    <a:pt x="983076" y="1943645"/>
-                  </a:lnTo>
-                  <a:lnTo>
-                    <a:pt x="1054699" y="2032527"/>
-                  </a:lnTo>
-                  <a:lnTo>
-                    <a:pt x="1126321" y="2116278"/>
-                  </a:lnTo>
-                  <a:lnTo>
-                    <a:pt x="1197944" y="2195197"/>
-                  </a:lnTo>
-                  <a:lnTo>
-                    <a:pt x="1269566" y="2269561"/>
-                  </a:lnTo>
-                  <a:lnTo>
-                    <a:pt x="1341189" y="2339633"/>
-                  </a:lnTo>
-                  <a:lnTo>
-                    <a:pt x="1412811" y="2405662"/>
-                  </a:lnTo>
-                  <a:lnTo>
-                    <a:pt x="1484434" y="2467879"/>
-                  </a:lnTo>
-                  <a:lnTo>
-                    <a:pt x="1556056" y="2526506"/>
-                  </a:lnTo>
-                  <a:lnTo>
-                    <a:pt x="1627679" y="2581750"/>
-                  </a:lnTo>
-                  <a:lnTo>
-                    <a:pt x="1699301" y="2633805"/>
-                  </a:lnTo>
-                  <a:lnTo>
-                    <a:pt x="1770924" y="2682857"/>
-                  </a:lnTo>
-                  <a:lnTo>
-                    <a:pt x="1842546" y="2729077"/>
-                  </a:lnTo>
-                  <a:lnTo>
-                    <a:pt x="1914169" y="2772630"/>
-                  </a:lnTo>
-                  <a:lnTo>
-                    <a:pt x="1985792" y="2813670"/>
-                  </a:lnTo>
-                  <a:lnTo>
-                    <a:pt x="2057414" y="2852341"/>
-                  </a:lnTo>
-                  <a:lnTo>
-                    <a:pt x="2129037" y="2888780"/>
-                  </a:lnTo>
-                  <a:lnTo>
-                    <a:pt x="2200659" y="2923116"/>
-                  </a:lnTo>
-                  <a:lnTo>
-                    <a:pt x="2272282" y="2955471"/>
-                  </a:lnTo>
-                  <a:lnTo>
-                    <a:pt x="2343904" y="2985959"/>
-                  </a:lnTo>
-                  <a:lnTo>
-                    <a:pt x="2415527" y="3014687"/>
-                  </a:lnTo>
-                  <a:lnTo>
-                    <a:pt x="2487149" y="3041757"/>
-                  </a:lnTo>
-                  <a:lnTo>
-                    <a:pt x="2558772" y="3067264"/>
-                  </a:lnTo>
-                  <a:lnTo>
-                    <a:pt x="2630394" y="3091300"/>
-                  </a:lnTo>
-                  <a:lnTo>
-                    <a:pt x="2702017" y="3113949"/>
-                  </a:lnTo>
-                  <a:lnTo>
-                    <a:pt x="2773639" y="3135290"/>
-                  </a:lnTo>
-                  <a:lnTo>
-                    <a:pt x="2845262" y="3155400"/>
-                  </a:lnTo>
-                  <a:lnTo>
-                    <a:pt x="2916884" y="3174350"/>
-                  </a:lnTo>
-                  <a:lnTo>
-                    <a:pt x="2988507" y="3192205"/>
-                  </a:lnTo>
-                  <a:lnTo>
-                    <a:pt x="3060129" y="3209030"/>
-                  </a:lnTo>
-                  <a:lnTo>
-                    <a:pt x="3131752" y="3224885"/>
-                  </a:lnTo>
-                  <a:lnTo>
-                    <a:pt x="3203374" y="3239824"/>
-                  </a:lnTo>
-                  <a:lnTo>
-                    <a:pt x="3274997" y="3253901"/>
-                  </a:lnTo>
-                  <a:lnTo>
-                    <a:pt x="3346620" y="3267166"/>
-                  </a:lnTo>
-                  <a:lnTo>
-                    <a:pt x="3418242" y="3279665"/>
-                  </a:lnTo>
-                  <a:lnTo>
-                    <a:pt x="3489865" y="3291443"/>
-                  </a:lnTo>
-                  <a:lnTo>
-                    <a:pt x="3561487" y="3302541"/>
-                  </a:lnTo>
-                  <a:lnTo>
-                    <a:pt x="3633110" y="3312998"/>
-                  </a:lnTo>
-                  <a:lnTo>
-                    <a:pt x="3704732" y="3322853"/>
-                  </a:lnTo>
-                  <a:lnTo>
-                    <a:pt x="3776355" y="3332138"/>
-                  </a:lnTo>
-                  <a:lnTo>
-                    <a:pt x="3847977" y="3340888"/>
-                  </a:lnTo>
-                  <a:lnTo>
-                    <a:pt x="3919600" y="3349132"/>
+                    <a:pt x="27403" y="71810"/>
+                  </a:lnTo>
+                  <a:lnTo>
+                    <a:pt x="99025" y="249712"/>
+                  </a:lnTo>
+                  <a:lnTo>
+                    <a:pt x="170648" y="418337"/>
+                  </a:lnTo>
+                  <a:lnTo>
+                    <a:pt x="242270" y="578171"/>
+                  </a:lnTo>
+                  <a:lnTo>
+                    <a:pt x="313893" y="729670"/>
+                  </a:lnTo>
+                  <a:lnTo>
+                    <a:pt x="385515" y="873271"/>
+                  </a:lnTo>
+                  <a:lnTo>
+                    <a:pt x="457138" y="1009383"/>
+                  </a:lnTo>
+                  <a:lnTo>
+                    <a:pt x="528760" y="1138399"/>
+                  </a:lnTo>
+                  <a:lnTo>
+                    <a:pt x="600383" y="1260688"/>
+                  </a:lnTo>
+                  <a:lnTo>
+                    <a:pt x="672006" y="1376600"/>
+                  </a:lnTo>
+                  <a:lnTo>
+                    <a:pt x="743628" y="1486469"/>
+                  </a:lnTo>
+                  <a:lnTo>
+                    <a:pt x="815251" y="1590609"/>
+                  </a:lnTo>
+                  <a:lnTo>
+                    <a:pt x="886873" y="1689319"/>
+                  </a:lnTo>
+                  <a:lnTo>
+                    <a:pt x="958496" y="1782882"/>
+                  </a:lnTo>
+                  <a:lnTo>
+                    <a:pt x="1030118" y="1871567"/>
+                  </a:lnTo>
+                  <a:lnTo>
+                    <a:pt x="1101741" y="1955627"/>
+                  </a:lnTo>
+                  <a:lnTo>
+                    <a:pt x="1173363" y="2035305"/>
+                  </a:lnTo>
+                  <a:lnTo>
+                    <a:pt x="1244986" y="2110828"/>
+                  </a:lnTo>
+                  <a:lnTo>
+                    <a:pt x="1316608" y="2182413"/>
+                  </a:lnTo>
+                  <a:lnTo>
+                    <a:pt x="1388231" y="2250266"/>
+                  </a:lnTo>
+                  <a:lnTo>
+                    <a:pt x="1459853" y="2314581"/>
+                  </a:lnTo>
+                  <a:lnTo>
+                    <a:pt x="1531476" y="2375542"/>
+                  </a:lnTo>
+                  <a:lnTo>
+                    <a:pt x="1603098" y="2433325"/>
+                  </a:lnTo>
+                  <a:lnTo>
+                    <a:pt x="1674721" y="2488095"/>
+                  </a:lnTo>
+                  <a:lnTo>
+                    <a:pt x="1746343" y="2540009"/>
+                  </a:lnTo>
+                  <a:lnTo>
+                    <a:pt x="1817966" y="2589217"/>
+                  </a:lnTo>
+                  <a:lnTo>
+                    <a:pt x="1889588" y="2635858"/>
+                  </a:lnTo>
+                  <a:lnTo>
+                    <a:pt x="1961211" y="2680068"/>
+                  </a:lnTo>
+                  <a:lnTo>
+                    <a:pt x="2032833" y="2721973"/>
+                  </a:lnTo>
+                  <a:lnTo>
+                    <a:pt x="2104456" y="2761692"/>
+                  </a:lnTo>
+                  <a:lnTo>
+                    <a:pt x="2176079" y="2799341"/>
+                  </a:lnTo>
+                  <a:lnTo>
+                    <a:pt x="2247701" y="2835026"/>
+                  </a:lnTo>
+                  <a:lnTo>
+                    <a:pt x="2319324" y="2868851"/>
+                  </a:lnTo>
+                  <a:lnTo>
+                    <a:pt x="2390946" y="2900912"/>
+                  </a:lnTo>
+                  <a:lnTo>
+                    <a:pt x="2462569" y="2931302"/>
+                  </a:lnTo>
+                  <a:lnTo>
+                    <a:pt x="2534191" y="2960107"/>
+                  </a:lnTo>
+                  <a:lnTo>
+                    <a:pt x="2605814" y="2987410"/>
+                  </a:lnTo>
+                  <a:lnTo>
+                    <a:pt x="2677436" y="3013289"/>
+                  </a:lnTo>
+                  <a:lnTo>
+                    <a:pt x="2749059" y="3037820"/>
+                  </a:lnTo>
+                  <a:lnTo>
+                    <a:pt x="2820681" y="3061071"/>
+                  </a:lnTo>
+                  <a:lnTo>
+                    <a:pt x="2892304" y="3083109"/>
+                  </a:lnTo>
+                  <a:lnTo>
+                    <a:pt x="2963926" y="3103999"/>
+                  </a:lnTo>
+                  <a:lnTo>
+                    <a:pt x="3035549" y="3123799"/>
+                  </a:lnTo>
+                  <a:lnTo>
+                    <a:pt x="3107171" y="3142567"/>
+                  </a:lnTo>
+                  <a:lnTo>
+                    <a:pt x="3178794" y="3160357"/>
+                  </a:lnTo>
+                  <a:lnTo>
+                    <a:pt x="3250416" y="3177219"/>
+                  </a:lnTo>
+                  <a:lnTo>
+                    <a:pt x="3322039" y="3193201"/>
+                  </a:lnTo>
+                  <a:lnTo>
+                    <a:pt x="3393661" y="3208351"/>
+                  </a:lnTo>
+                  <a:lnTo>
+                    <a:pt x="3465284" y="3222710"/>
+                  </a:lnTo>
+                  <a:lnTo>
+                    <a:pt x="3536907" y="3236321"/>
+                  </a:lnTo>
+                  <a:lnTo>
+                    <a:pt x="3608529" y="3249222"/>
+                  </a:lnTo>
+                  <a:lnTo>
+                    <a:pt x="3680152" y="3261450"/>
+                  </a:lnTo>
+                  <a:lnTo>
+                    <a:pt x="3751774" y="3273041"/>
+                  </a:lnTo>
+                  <a:lnTo>
+                    <a:pt x="3823397" y="3284027"/>
+                  </a:lnTo>
+                  <a:lnTo>
+                    <a:pt x="3895019" y="3294441"/>
+                  </a:lnTo>
+                  <a:lnTo>
+                    <a:pt x="3966642" y="3304311"/>
+                  </a:lnTo>
+                  <a:lnTo>
+                    <a:pt x="4038264" y="3313667"/>
+                  </a:lnTo>
+                  <a:lnTo>
+                    <a:pt x="4109887" y="3322535"/>
                   </a:lnTo>
                 </a:path>
               </a:pathLst>
@@ -4824,7 +4896,7 @@
                   <a:latin typeface="Helvetica"/>
                   <a:cs typeface="Helvetica"/>
                 </a:rPr>
-                <a:t>HR per 1 mL/min: 0.93 (0.89-0.97)  |  per IQR (Δ = 18.2): 0.25 (0.11-0.56)  |  IQR: [-11.5, 6.7]</a:t>
+                <a:t>HR per 1 mL/min: 0.93 (0.89-0.98)  |  per IQR (Δ = 18.2): 0.28 (0.12-0.70)  |  IQR: [-11.5, 6.7]</a:t>
               </a:r>
             </a:p>
           </p:txBody>

--- a/docs/plots/carbo/jx_carbo_linsubhr_egfrdisc_death.pptx
+++ b/docs/plots/carbo/jx_carbo_linsubhr_egfrdisc_death.pptx
@@ -3394,7 +3394,7 @@
                     <a:pt x="1432450" y="1747232"/>
                   </a:lnTo>
                   <a:lnTo>
-                    <a:pt x="1360827" y="1720526"/>
+                    <a:pt x="1360827" y="1720525"/>
                   </a:lnTo>
                   <a:lnTo>
                     <a:pt x="1289205" y="1693408"/>
@@ -3442,7 +3442,7 @@
                     <a:pt x="286490" y="1266917"/>
                   </a:lnTo>
                   <a:lnTo>
-                    <a:pt x="214867" y="1232824"/>
+                    <a:pt x="214867" y="1232823"/>
                   </a:lnTo>
                   <a:lnTo>
                     <a:pt x="143245" y="1198206"/>
@@ -3663,10 +3663,10 @@
                     <a:pt x="7019007" y="2301600"/>
                   </a:lnTo>
                   <a:lnTo>
-                    <a:pt x="6947385" y="2296330"/>
-                  </a:lnTo>
-                  <a:lnTo>
-                    <a:pt x="6875762" y="2290554"/>
+                    <a:pt x="6947385" y="2296331"/>
+                  </a:lnTo>
+                  <a:lnTo>
+                    <a:pt x="6875762" y="2290555"/>
                   </a:lnTo>
                   <a:lnTo>
                     <a:pt x="6804139" y="2284223"/>
@@ -3690,7 +3690,7 @@
                     <a:pt x="6374404" y="2231185"/>
                   </a:lnTo>
                   <a:lnTo>
-                    <a:pt x="6302782" y="2219142"/>
+                    <a:pt x="6302782" y="2219143"/>
                   </a:lnTo>
                   <a:lnTo>
                     <a:pt x="6231159" y="2205942"/>
@@ -3849,7 +3849,7 @@
                     <a:pt x="2578410" y="996114"/>
                   </a:lnTo>
                   <a:lnTo>
-                    <a:pt x="2506788" y="975193"/>
+                    <a:pt x="2506788" y="975194"/>
                   </a:lnTo>
                   <a:lnTo>
                     <a:pt x="2435165" y="953952"/>
@@ -4000,7 +4000,7 @@
                     <a:pt x="313893" y="729670"/>
                   </a:lnTo>
                   <a:lnTo>
-                    <a:pt x="385515" y="873271"/>
+                    <a:pt x="385515" y="873270"/>
                   </a:lnTo>
                   <a:lnTo>
                     <a:pt x="457138" y="1009383"/>
@@ -4012,7 +4012,7 @@
                     <a:pt x="600383" y="1260688"/>
                   </a:lnTo>
                   <a:lnTo>
-                    <a:pt x="672006" y="1376600"/>
+                    <a:pt x="672005" y="1376600"/>
                   </a:lnTo>
                   <a:lnTo>
                     <a:pt x="743628" y="1486469"/>

--- a/docs/plots/carbo/jx_carbo_linsubhr_egfrdisc_death.pptx
+++ b/docs/plots/carbo/jx_carbo_linsubhr_egfrdisc_death.pptx
@@ -4864,7 +4864,7 @@
           <p:spPr>
             <a:xfrm>
               <a:off x="817517" y="1896563"/>
-              <a:ext cx="4685659" cy="82021"/>
+              <a:ext cx="5228813" cy="82021"/>
             </a:xfrm>
             <a:prstGeom prst="rect">
               <a:avLst/>
@@ -4896,7 +4896,7 @@
                   <a:latin typeface="Helvetica"/>
                   <a:cs typeface="Helvetica"/>
                 </a:rPr>
-                <a:t>HR per 1 mL/min: 0.93 (0.89-0.98)  |  per IQR (Δ = 18.2): 0.28 (0.12-0.70)  |  IQR: [-11.5, 6.7]</a:t>
+                <a:t>HR per 1 mL/min: 0.93 (0.89-0.98), p = 0.006  |  per IQR (Δ = 18.2): 0.28 (0.12-0.70)  |  IQR: [-11.5, 6.7]</a:t>
               </a:r>
             </a:p>
           </p:txBody>

--- a/docs/plots/carbo/jx_carbo_linsubhr_egfrdisc_death.pptx
+++ b/docs/plots/carbo/jx_carbo_linsubhr_egfrdisc_death.pptx
@@ -2271,26 +2271,26 @@
           </p:nvSpPr>
           <p:spPr>
             <a:xfrm>
-              <a:off x="817517" y="5142518"/>
-              <a:ext cx="7799693" cy="0"/>
+              <a:off x="915645" y="5071743"/>
+              <a:ext cx="7682587" cy="0"/>
             </a:xfrm>
             <a:custGeom>
               <a:avLst/>
               <a:pathLst>
-                <a:path w="7799693" h="0">
+                <a:path w="7682587" h="0">
                   <a:moveTo>
                     <a:pt x="0" y="0"/>
                   </a:moveTo>
                   <a:lnTo>
-                    <a:pt x="7799693" y="0"/>
-                  </a:lnTo>
-                  <a:lnTo>
-                    <a:pt x="7799693" y="0"/>
+                    <a:pt x="7682587" y="0"/>
+                  </a:lnTo>
+                  <a:lnTo>
+                    <a:pt x="7682587" y="0"/>
                   </a:lnTo>
                 </a:path>
               </a:pathLst>
             </a:custGeom>
-            <a:ln w="6775" cap="flat">
+            <a:ln w="8623" cap="flat">
               <a:solidFill>
                 <a:srgbClr val="EBEBEB">
                   <a:alpha val="100000"/>
@@ -2314,26 +2314,26 @@
           </p:nvSpPr>
           <p:spPr>
             <a:xfrm>
-              <a:off x="817517" y="4313054"/>
-              <a:ext cx="7799693" cy="0"/>
+              <a:off x="915645" y="4298074"/>
+              <a:ext cx="7682587" cy="0"/>
             </a:xfrm>
             <a:custGeom>
               <a:avLst/>
               <a:pathLst>
-                <a:path w="7799693" h="0">
+                <a:path w="7682587" h="0">
                   <a:moveTo>
                     <a:pt x="0" y="0"/>
                   </a:moveTo>
                   <a:lnTo>
-                    <a:pt x="7799693" y="0"/>
-                  </a:lnTo>
-                  <a:lnTo>
-                    <a:pt x="7799693" y="0"/>
+                    <a:pt x="7682587" y="0"/>
+                  </a:lnTo>
+                  <a:lnTo>
+                    <a:pt x="7682587" y="0"/>
                   </a:lnTo>
                 </a:path>
               </a:pathLst>
             </a:custGeom>
-            <a:ln w="6775" cap="flat">
+            <a:ln w="8623" cap="flat">
               <a:solidFill>
                 <a:srgbClr val="EBEBEB">
                   <a:alpha val="100000"/>
@@ -2357,26 +2357,26 @@
           </p:nvSpPr>
           <p:spPr>
             <a:xfrm>
-              <a:off x="817517" y="3483591"/>
-              <a:ext cx="7799693" cy="0"/>
+              <a:off x="915645" y="3524405"/>
+              <a:ext cx="7682587" cy="0"/>
             </a:xfrm>
             <a:custGeom>
               <a:avLst/>
               <a:pathLst>
-                <a:path w="7799693" h="0">
+                <a:path w="7682587" h="0">
                   <a:moveTo>
                     <a:pt x="0" y="0"/>
                   </a:moveTo>
                   <a:lnTo>
-                    <a:pt x="7799693" y="0"/>
-                  </a:lnTo>
-                  <a:lnTo>
-                    <a:pt x="7799693" y="0"/>
+                    <a:pt x="7682587" y="0"/>
+                  </a:lnTo>
+                  <a:lnTo>
+                    <a:pt x="7682587" y="0"/>
                   </a:lnTo>
                 </a:path>
               </a:pathLst>
             </a:custGeom>
-            <a:ln w="6775" cap="flat">
+            <a:ln w="8623" cap="flat">
               <a:solidFill>
                 <a:srgbClr val="EBEBEB">
                   <a:alpha val="100000"/>
@@ -2400,26 +2400,26 @@
           </p:nvSpPr>
           <p:spPr>
             <a:xfrm>
-              <a:off x="817517" y="2654127"/>
-              <a:ext cx="7799693" cy="0"/>
+              <a:off x="915645" y="2750737"/>
+              <a:ext cx="7682587" cy="0"/>
             </a:xfrm>
             <a:custGeom>
               <a:avLst/>
               <a:pathLst>
-                <a:path w="7799693" h="0">
+                <a:path w="7682587" h="0">
                   <a:moveTo>
                     <a:pt x="0" y="0"/>
                   </a:moveTo>
                   <a:lnTo>
-                    <a:pt x="7799693" y="0"/>
-                  </a:lnTo>
-                  <a:lnTo>
-                    <a:pt x="7799693" y="0"/>
+                    <a:pt x="7682587" y="0"/>
+                  </a:lnTo>
+                  <a:lnTo>
+                    <a:pt x="7682587" y="0"/>
                   </a:lnTo>
                 </a:path>
               </a:pathLst>
             </a:custGeom>
-            <a:ln w="6775" cap="flat">
+            <a:ln w="8623" cap="flat">
               <a:solidFill>
                 <a:srgbClr val="EBEBEB">
                   <a:alpha val="100000"/>
@@ -2443,15 +2443,15 @@
           </p:nvSpPr>
           <p:spPr>
             <a:xfrm>
-              <a:off x="1487487" y="2073503"/>
-              <a:ext cx="0" cy="3649639"/>
+              <a:off x="1575555" y="2209169"/>
+              <a:ext cx="0" cy="3404141"/>
             </a:xfrm>
             <a:custGeom>
               <a:avLst/>
               <a:pathLst>
-                <a:path w="0" h="3649639">
+                <a:path w="0" h="3404141">
                   <a:moveTo>
-                    <a:pt x="0" y="3649639"/>
+                    <a:pt x="0" y="3404141"/>
                   </a:moveTo>
                   <a:lnTo>
                     <a:pt x="0" y="0"/>
@@ -2462,7 +2462,7 @@
                 </a:path>
               </a:pathLst>
             </a:custGeom>
-            <a:ln w="6775" cap="flat">
+            <a:ln w="8623" cap="flat">
               <a:solidFill>
                 <a:srgbClr val="EBEBEB">
                   <a:alpha val="100000"/>
@@ -2486,15 +2486,15 @@
           </p:nvSpPr>
           <p:spPr>
             <a:xfrm>
-              <a:off x="3337360" y="2073503"/>
-              <a:ext cx="0" cy="3649639"/>
+              <a:off x="3397654" y="2209169"/>
+              <a:ext cx="0" cy="3404141"/>
             </a:xfrm>
             <a:custGeom>
               <a:avLst/>
               <a:pathLst>
-                <a:path w="0" h="3649639">
+                <a:path w="0" h="3404141">
                   <a:moveTo>
-                    <a:pt x="0" y="3649639"/>
+                    <a:pt x="0" y="3404141"/>
                   </a:moveTo>
                   <a:lnTo>
                     <a:pt x="0" y="0"/>
@@ -2505,7 +2505,7 @@
                 </a:path>
               </a:pathLst>
             </a:custGeom>
-            <a:ln w="6775" cap="flat">
+            <a:ln w="8623" cap="flat">
               <a:solidFill>
                 <a:srgbClr val="EBEBEB">
                   <a:alpha val="100000"/>
@@ -2529,15 +2529,15 @@
           </p:nvSpPr>
           <p:spPr>
             <a:xfrm>
-              <a:off x="5187233" y="2073503"/>
-              <a:ext cx="0" cy="3649639"/>
+              <a:off x="5219752" y="2209169"/>
+              <a:ext cx="0" cy="3404141"/>
             </a:xfrm>
             <a:custGeom>
               <a:avLst/>
               <a:pathLst>
-                <a:path w="0" h="3649639">
+                <a:path w="0" h="3404141">
                   <a:moveTo>
-                    <a:pt x="0" y="3649639"/>
+                    <a:pt x="0" y="3404141"/>
                   </a:moveTo>
                   <a:lnTo>
                     <a:pt x="0" y="0"/>
@@ -2548,7 +2548,7 @@
                 </a:path>
               </a:pathLst>
             </a:custGeom>
-            <a:ln w="6775" cap="flat">
+            <a:ln w="8623" cap="flat">
               <a:solidFill>
                 <a:srgbClr val="EBEBEB">
                   <a:alpha val="100000"/>
@@ -2572,15 +2572,15 @@
           </p:nvSpPr>
           <p:spPr>
             <a:xfrm>
-              <a:off x="7037106" y="2073503"/>
-              <a:ext cx="0" cy="3649639"/>
+              <a:off x="7041851" y="2209169"/>
+              <a:ext cx="0" cy="3404141"/>
             </a:xfrm>
             <a:custGeom>
               <a:avLst/>
               <a:pathLst>
-                <a:path w="0" h="3649639">
+                <a:path w="0" h="3404141">
                   <a:moveTo>
-                    <a:pt x="0" y="3649639"/>
+                    <a:pt x="0" y="3404141"/>
                   </a:moveTo>
                   <a:lnTo>
                     <a:pt x="0" y="0"/>
@@ -2591,7 +2591,7 @@
                 </a:path>
               </a:pathLst>
             </a:custGeom>
-            <a:ln w="6775" cap="flat">
+            <a:ln w="8623" cap="flat">
               <a:solidFill>
                 <a:srgbClr val="EBEBEB">
                   <a:alpha val="100000"/>
@@ -2615,26 +2615,26 @@
           </p:nvSpPr>
           <p:spPr>
             <a:xfrm>
-              <a:off x="817517" y="5557249"/>
-              <a:ext cx="7799693" cy="0"/>
+              <a:off x="915645" y="5458577"/>
+              <a:ext cx="7682587" cy="0"/>
             </a:xfrm>
             <a:custGeom>
               <a:avLst/>
               <a:pathLst>
-                <a:path w="7799693" h="0">
+                <a:path w="7682587" h="0">
                   <a:moveTo>
                     <a:pt x="0" y="0"/>
                   </a:moveTo>
                   <a:lnTo>
-                    <a:pt x="7799693" y="0"/>
-                  </a:lnTo>
-                  <a:lnTo>
-                    <a:pt x="7799693" y="0"/>
+                    <a:pt x="7682587" y="0"/>
+                  </a:lnTo>
+                  <a:lnTo>
+                    <a:pt x="7682587" y="0"/>
                   </a:lnTo>
                 </a:path>
               </a:pathLst>
             </a:custGeom>
-            <a:ln w="13550" cap="flat">
+            <a:ln w="17246" cap="flat">
               <a:solidFill>
                 <a:srgbClr val="EBEBEB">
                   <a:alpha val="100000"/>
@@ -2658,26 +2658,26 @@
           </p:nvSpPr>
           <p:spPr>
             <a:xfrm>
-              <a:off x="817517" y="4727786"/>
-              <a:ext cx="7799693" cy="0"/>
+              <a:off x="915645" y="4684908"/>
+              <a:ext cx="7682587" cy="0"/>
             </a:xfrm>
             <a:custGeom>
               <a:avLst/>
               <a:pathLst>
-                <a:path w="7799693" h="0">
+                <a:path w="7682587" h="0">
                   <a:moveTo>
                     <a:pt x="0" y="0"/>
                   </a:moveTo>
                   <a:lnTo>
-                    <a:pt x="7799693" y="0"/>
-                  </a:lnTo>
-                  <a:lnTo>
-                    <a:pt x="7799693" y="0"/>
+                    <a:pt x="7682587" y="0"/>
+                  </a:lnTo>
+                  <a:lnTo>
+                    <a:pt x="7682587" y="0"/>
                   </a:lnTo>
                 </a:path>
               </a:pathLst>
             </a:custGeom>
-            <a:ln w="13550" cap="flat">
+            <a:ln w="17246" cap="flat">
               <a:solidFill>
                 <a:srgbClr val="EBEBEB">
                   <a:alpha val="100000"/>
@@ -2701,26 +2701,26 @@
           </p:nvSpPr>
           <p:spPr>
             <a:xfrm>
-              <a:off x="817517" y="3898322"/>
-              <a:ext cx="7799693" cy="0"/>
+              <a:off x="915645" y="3911240"/>
+              <a:ext cx="7682587" cy="0"/>
             </a:xfrm>
             <a:custGeom>
               <a:avLst/>
               <a:pathLst>
-                <a:path w="7799693" h="0">
+                <a:path w="7682587" h="0">
                   <a:moveTo>
                     <a:pt x="0" y="0"/>
                   </a:moveTo>
                   <a:lnTo>
-                    <a:pt x="7799693" y="0"/>
-                  </a:lnTo>
-                  <a:lnTo>
-                    <a:pt x="7799693" y="0"/>
+                    <a:pt x="7682587" y="0"/>
+                  </a:lnTo>
+                  <a:lnTo>
+                    <a:pt x="7682587" y="0"/>
                   </a:lnTo>
                 </a:path>
               </a:pathLst>
             </a:custGeom>
-            <a:ln w="13550" cap="flat">
+            <a:ln w="17246" cap="flat">
               <a:solidFill>
                 <a:srgbClr val="EBEBEB">
                   <a:alpha val="100000"/>
@@ -2744,26 +2744,26 @@
           </p:nvSpPr>
           <p:spPr>
             <a:xfrm>
-              <a:off x="817517" y="3068859"/>
-              <a:ext cx="7799693" cy="0"/>
+              <a:off x="915645" y="3137571"/>
+              <a:ext cx="7682587" cy="0"/>
             </a:xfrm>
             <a:custGeom>
               <a:avLst/>
               <a:pathLst>
-                <a:path w="7799693" h="0">
+                <a:path w="7682587" h="0">
                   <a:moveTo>
                     <a:pt x="0" y="0"/>
                   </a:moveTo>
                   <a:lnTo>
-                    <a:pt x="7799693" y="0"/>
-                  </a:lnTo>
-                  <a:lnTo>
-                    <a:pt x="7799693" y="0"/>
+                    <a:pt x="7682587" y="0"/>
+                  </a:lnTo>
+                  <a:lnTo>
+                    <a:pt x="7682587" y="0"/>
                   </a:lnTo>
                 </a:path>
               </a:pathLst>
             </a:custGeom>
-            <a:ln w="13550" cap="flat">
+            <a:ln w="17246" cap="flat">
               <a:solidFill>
                 <a:srgbClr val="EBEBEB">
                   <a:alpha val="100000"/>
@@ -2787,26 +2787,26 @@
           </p:nvSpPr>
           <p:spPr>
             <a:xfrm>
-              <a:off x="817517" y="2239395"/>
-              <a:ext cx="7799693" cy="0"/>
+              <a:off x="915645" y="2363903"/>
+              <a:ext cx="7682587" cy="0"/>
             </a:xfrm>
             <a:custGeom>
               <a:avLst/>
               <a:pathLst>
-                <a:path w="7799693" h="0">
+                <a:path w="7682587" h="0">
                   <a:moveTo>
                     <a:pt x="0" y="0"/>
                   </a:moveTo>
                   <a:lnTo>
-                    <a:pt x="7799693" y="0"/>
-                  </a:lnTo>
-                  <a:lnTo>
-                    <a:pt x="7799693" y="0"/>
+                    <a:pt x="7682587" y="0"/>
+                  </a:lnTo>
+                  <a:lnTo>
+                    <a:pt x="7682587" y="0"/>
                   </a:lnTo>
                 </a:path>
               </a:pathLst>
             </a:custGeom>
-            <a:ln w="13550" cap="flat">
+            <a:ln w="17246" cap="flat">
               <a:solidFill>
                 <a:srgbClr val="EBEBEB">
                   <a:alpha val="100000"/>
@@ -2830,15 +2830,15 @@
           </p:nvSpPr>
           <p:spPr>
             <a:xfrm>
-              <a:off x="2412424" y="2073503"/>
-              <a:ext cx="0" cy="3649639"/>
+              <a:off x="2486605" y="2209169"/>
+              <a:ext cx="0" cy="3404141"/>
             </a:xfrm>
             <a:custGeom>
               <a:avLst/>
               <a:pathLst>
-                <a:path w="0" h="3649639">
+                <a:path w="0" h="3404141">
                   <a:moveTo>
-                    <a:pt x="0" y="3649639"/>
+                    <a:pt x="0" y="3404141"/>
                   </a:moveTo>
                   <a:lnTo>
                     <a:pt x="0" y="0"/>
@@ -2849,7 +2849,7 @@
                 </a:path>
               </a:pathLst>
             </a:custGeom>
-            <a:ln w="13550" cap="flat">
+            <a:ln w="17246" cap="flat">
               <a:solidFill>
                 <a:srgbClr val="EBEBEB">
                   <a:alpha val="100000"/>
@@ -2873,15 +2873,15 @@
           </p:nvSpPr>
           <p:spPr>
             <a:xfrm>
-              <a:off x="4262297" y="2073503"/>
-              <a:ext cx="0" cy="3649639"/>
+              <a:off x="4308703" y="2209169"/>
+              <a:ext cx="0" cy="3404141"/>
             </a:xfrm>
             <a:custGeom>
               <a:avLst/>
               <a:pathLst>
-                <a:path w="0" h="3649639">
+                <a:path w="0" h="3404141">
                   <a:moveTo>
-                    <a:pt x="0" y="3649639"/>
+                    <a:pt x="0" y="3404141"/>
                   </a:moveTo>
                   <a:lnTo>
                     <a:pt x="0" y="0"/>
@@ -2892,7 +2892,7 @@
                 </a:path>
               </a:pathLst>
             </a:custGeom>
-            <a:ln w="13550" cap="flat">
+            <a:ln w="17246" cap="flat">
               <a:solidFill>
                 <a:srgbClr val="EBEBEB">
                   <a:alpha val="100000"/>
@@ -2916,15 +2916,15 @@
           </p:nvSpPr>
           <p:spPr>
             <a:xfrm>
-              <a:off x="6112169" y="2073503"/>
-              <a:ext cx="0" cy="3649639"/>
+              <a:off x="6130802" y="2209169"/>
+              <a:ext cx="0" cy="3404141"/>
             </a:xfrm>
             <a:custGeom>
               <a:avLst/>
               <a:pathLst>
-                <a:path w="0" h="3649639">
+                <a:path w="0" h="3404141">
                   <a:moveTo>
-                    <a:pt x="0" y="3649639"/>
+                    <a:pt x="0" y="3404141"/>
                   </a:moveTo>
                   <a:lnTo>
                     <a:pt x="0" y="0"/>
@@ -2935,7 +2935,7 @@
                 </a:path>
               </a:pathLst>
             </a:custGeom>
-            <a:ln w="13550" cap="flat">
+            <a:ln w="17246" cap="flat">
               <a:solidFill>
                 <a:srgbClr val="EBEBEB">
                   <a:alpha val="100000"/>
@@ -2959,15 +2959,15 @@
           </p:nvSpPr>
           <p:spPr>
             <a:xfrm>
-              <a:off x="7962042" y="2073503"/>
-              <a:ext cx="0" cy="3649639"/>
+              <a:off x="7952900" y="2209169"/>
+              <a:ext cx="0" cy="3404141"/>
             </a:xfrm>
             <a:custGeom>
               <a:avLst/>
               <a:pathLst>
-                <a:path w="0" h="3649639">
+                <a:path w="0" h="3404141">
                   <a:moveTo>
-                    <a:pt x="0" y="3649639"/>
+                    <a:pt x="0" y="3404141"/>
                   </a:moveTo>
                   <a:lnTo>
                     <a:pt x="0" y="0"/>
@@ -2978,7 +2978,7 @@
                 </a:path>
               </a:pathLst>
             </a:custGeom>
-            <a:ln w="13550" cap="flat">
+            <a:ln w="17246" cap="flat">
               <a:solidFill>
                 <a:srgbClr val="EBEBEB">
                   <a:alpha val="100000"/>
@@ -3002,456 +3002,456 @@
           </p:nvSpPr>
           <p:spPr>
             <a:xfrm>
-              <a:off x="1172049" y="2073503"/>
-              <a:ext cx="7090630" cy="3433771"/>
+              <a:off x="1264853" y="2209169"/>
+              <a:ext cx="6984170" cy="3202794"/>
             </a:xfrm>
             <a:custGeom>
               <a:avLst/>
               <a:pathLst>
-                <a:path w="7090630" h="3433771">
+                <a:path w="6984170" h="3202794">
                   <a:moveTo>
-                    <a:pt x="3781059" y="0"/>
+                    <a:pt x="3724289" y="0"/>
                   </a:moveTo>
                   <a:lnTo>
-                    <a:pt x="3795993" y="68499"/>
-                  </a:lnTo>
-                  <a:lnTo>
-                    <a:pt x="3867616" y="368172"/>
-                  </a:lnTo>
-                  <a:lnTo>
-                    <a:pt x="3939238" y="641551"/>
-                  </a:lnTo>
-                  <a:lnTo>
-                    <a:pt x="4010861" y="890941"/>
-                  </a:lnTo>
-                  <a:lnTo>
-                    <a:pt x="4082483" y="1118449"/>
-                  </a:lnTo>
-                  <a:lnTo>
-                    <a:pt x="4154106" y="1325994"/>
-                  </a:lnTo>
-                  <a:lnTo>
-                    <a:pt x="4225729" y="1515328"/>
-                  </a:lnTo>
-                  <a:lnTo>
-                    <a:pt x="4297351" y="1688048"/>
-                  </a:lnTo>
-                  <a:lnTo>
-                    <a:pt x="4368974" y="1845613"/>
-                  </a:lnTo>
-                  <a:lnTo>
-                    <a:pt x="4440596" y="1989352"/>
-                  </a:lnTo>
-                  <a:lnTo>
-                    <a:pt x="4512219" y="2120479"/>
-                  </a:lnTo>
-                  <a:lnTo>
-                    <a:pt x="4583841" y="2240100"/>
-                  </a:lnTo>
-                  <a:lnTo>
-                    <a:pt x="4655464" y="2349225"/>
-                  </a:lnTo>
-                  <a:lnTo>
-                    <a:pt x="4727086" y="2448774"/>
-                  </a:lnTo>
-                  <a:lnTo>
-                    <a:pt x="4798709" y="2539589"/>
-                  </a:lnTo>
-                  <a:lnTo>
-                    <a:pt x="4870331" y="2622435"/>
-                  </a:lnTo>
-                  <a:lnTo>
-                    <a:pt x="4941954" y="2661715"/>
-                  </a:lnTo>
-                  <a:lnTo>
-                    <a:pt x="5013576" y="2674166"/>
-                  </a:lnTo>
-                  <a:lnTo>
-                    <a:pt x="5085199" y="2686428"/>
-                  </a:lnTo>
-                  <a:lnTo>
-                    <a:pt x="5156821" y="2698505"/>
-                  </a:lnTo>
-                  <a:lnTo>
-                    <a:pt x="5228444" y="2710399"/>
-                  </a:lnTo>
-                  <a:lnTo>
-                    <a:pt x="5300066" y="2722112"/>
-                  </a:lnTo>
-                  <a:lnTo>
-                    <a:pt x="5371689" y="2733648"/>
-                  </a:lnTo>
-                  <a:lnTo>
-                    <a:pt x="5443311" y="2745010"/>
-                  </a:lnTo>
-                  <a:lnTo>
-                    <a:pt x="5514934" y="2756199"/>
-                  </a:lnTo>
-                  <a:lnTo>
-                    <a:pt x="5586557" y="2767219"/>
-                  </a:lnTo>
-                  <a:lnTo>
-                    <a:pt x="5658179" y="2778072"/>
-                  </a:lnTo>
-                  <a:lnTo>
-                    <a:pt x="5729802" y="2788760"/>
-                  </a:lnTo>
-                  <a:lnTo>
-                    <a:pt x="5801424" y="2799287"/>
-                  </a:lnTo>
-                  <a:lnTo>
-                    <a:pt x="5873047" y="2809654"/>
-                  </a:lnTo>
-                  <a:lnTo>
-                    <a:pt x="5944669" y="2819864"/>
-                  </a:lnTo>
-                  <a:lnTo>
-                    <a:pt x="6016292" y="2829919"/>
-                  </a:lnTo>
-                  <a:lnTo>
-                    <a:pt x="6087914" y="2839823"/>
-                  </a:lnTo>
-                  <a:lnTo>
-                    <a:pt x="6159537" y="2849576"/>
-                  </a:lnTo>
-                  <a:lnTo>
-                    <a:pt x="6231159" y="2859181"/>
-                  </a:lnTo>
-                  <a:lnTo>
-                    <a:pt x="6302782" y="2868641"/>
-                  </a:lnTo>
-                  <a:lnTo>
-                    <a:pt x="6374404" y="2877958"/>
-                  </a:lnTo>
-                  <a:lnTo>
-                    <a:pt x="6446027" y="2887134"/>
-                  </a:lnTo>
-                  <a:lnTo>
-                    <a:pt x="6517649" y="2896170"/>
-                  </a:lnTo>
-                  <a:lnTo>
-                    <a:pt x="6589272" y="2905070"/>
-                  </a:lnTo>
-                  <a:lnTo>
-                    <a:pt x="6660894" y="2913835"/>
-                  </a:lnTo>
-                  <a:lnTo>
-                    <a:pt x="6732517" y="2922467"/>
-                  </a:lnTo>
-                  <a:lnTo>
-                    <a:pt x="6804139" y="2930968"/>
-                  </a:lnTo>
-                  <a:lnTo>
-                    <a:pt x="6875762" y="2939341"/>
-                  </a:lnTo>
-                  <a:lnTo>
-                    <a:pt x="6947385" y="2947587"/>
-                  </a:lnTo>
-                  <a:lnTo>
-                    <a:pt x="7019007" y="2955708"/>
-                  </a:lnTo>
-                  <a:lnTo>
-                    <a:pt x="7090630" y="2963706"/>
-                  </a:lnTo>
-                  <a:lnTo>
-                    <a:pt x="7090630" y="3433771"/>
-                  </a:lnTo>
-                  <a:lnTo>
-                    <a:pt x="7019007" y="3428965"/>
-                  </a:lnTo>
-                  <a:lnTo>
-                    <a:pt x="6947385" y="3423695"/>
-                  </a:lnTo>
-                  <a:lnTo>
-                    <a:pt x="6875762" y="3417919"/>
-                  </a:lnTo>
-                  <a:lnTo>
-                    <a:pt x="6804139" y="3411588"/>
-                  </a:lnTo>
-                  <a:lnTo>
-                    <a:pt x="6732517" y="3404647"/>
-                  </a:lnTo>
-                  <a:lnTo>
-                    <a:pt x="6660894" y="3397039"/>
-                  </a:lnTo>
-                  <a:lnTo>
-                    <a:pt x="6589272" y="3388699"/>
-                  </a:lnTo>
-                  <a:lnTo>
-                    <a:pt x="6517649" y="3379557"/>
-                  </a:lnTo>
-                  <a:lnTo>
-                    <a:pt x="6446027" y="3369535"/>
-                  </a:lnTo>
-                  <a:lnTo>
-                    <a:pt x="6374404" y="3358549"/>
-                  </a:lnTo>
-                  <a:lnTo>
-                    <a:pt x="6302782" y="3346507"/>
-                  </a:lnTo>
-                  <a:lnTo>
-                    <a:pt x="6231159" y="3333307"/>
-                  </a:lnTo>
-                  <a:lnTo>
-                    <a:pt x="6159537" y="3318837"/>
-                  </a:lnTo>
-                  <a:lnTo>
-                    <a:pt x="6087914" y="3302975"/>
-                  </a:lnTo>
-                  <a:lnTo>
-                    <a:pt x="6016292" y="3285587"/>
-                  </a:lnTo>
-                  <a:lnTo>
-                    <a:pt x="5944669" y="3266527"/>
-                  </a:lnTo>
-                  <a:lnTo>
-                    <a:pt x="5873047" y="3245634"/>
-                  </a:lnTo>
-                  <a:lnTo>
-                    <a:pt x="5801424" y="3222731"/>
-                  </a:lnTo>
-                  <a:lnTo>
-                    <a:pt x="5729802" y="3197625"/>
-                  </a:lnTo>
-                  <a:lnTo>
-                    <a:pt x="5658179" y="3170104"/>
-                  </a:lnTo>
-                  <a:lnTo>
-                    <a:pt x="5586557" y="3139936"/>
-                  </a:lnTo>
-                  <a:lnTo>
-                    <a:pt x="5514934" y="3106866"/>
-                  </a:lnTo>
-                  <a:lnTo>
-                    <a:pt x="5443311" y="3070616"/>
-                  </a:lnTo>
-                  <a:lnTo>
-                    <a:pt x="5371689" y="3030878"/>
-                  </a:lnTo>
-                  <a:lnTo>
-                    <a:pt x="5300066" y="2987319"/>
-                  </a:lnTo>
-                  <a:lnTo>
-                    <a:pt x="5228444" y="2939570"/>
-                  </a:lnTo>
-                  <a:lnTo>
-                    <a:pt x="5156821" y="2887228"/>
-                  </a:lnTo>
-                  <a:lnTo>
-                    <a:pt x="5085199" y="2829851"/>
-                  </a:lnTo>
-                  <a:lnTo>
-                    <a:pt x="5013576" y="2766956"/>
-                  </a:lnTo>
-                  <a:lnTo>
-                    <a:pt x="4941954" y="2698011"/>
-                  </a:lnTo>
-                  <a:lnTo>
-                    <a:pt x="4870331" y="2649073"/>
-                  </a:lnTo>
-                  <a:lnTo>
-                    <a:pt x="4798709" y="2636236"/>
-                  </a:lnTo>
-                  <a:lnTo>
-                    <a:pt x="4727086" y="2623202"/>
-                  </a:lnTo>
-                  <a:lnTo>
-                    <a:pt x="4655464" y="2609967"/>
-                  </a:lnTo>
-                  <a:lnTo>
-                    <a:pt x="4583841" y="2596529"/>
-                  </a:lnTo>
-                  <a:lnTo>
-                    <a:pt x="4512219" y="2582884"/>
-                  </a:lnTo>
-                  <a:lnTo>
-                    <a:pt x="4440596" y="2569029"/>
-                  </a:lnTo>
-                  <a:lnTo>
-                    <a:pt x="4368974" y="2554961"/>
-                  </a:lnTo>
-                  <a:lnTo>
-                    <a:pt x="4297351" y="2540677"/>
-                  </a:lnTo>
-                  <a:lnTo>
-                    <a:pt x="4225729" y="2526173"/>
-                  </a:lnTo>
-                  <a:lnTo>
-                    <a:pt x="4154106" y="2511446"/>
-                  </a:lnTo>
-                  <a:lnTo>
-                    <a:pt x="4082483" y="2496493"/>
-                  </a:lnTo>
-                  <a:lnTo>
-                    <a:pt x="4010861" y="2481309"/>
-                  </a:lnTo>
-                  <a:lnTo>
-                    <a:pt x="3939238" y="2465892"/>
-                  </a:lnTo>
-                  <a:lnTo>
-                    <a:pt x="3867616" y="2450238"/>
-                  </a:lnTo>
-                  <a:lnTo>
-                    <a:pt x="3795993" y="2434344"/>
-                  </a:lnTo>
-                  <a:lnTo>
-                    <a:pt x="3724371" y="2418204"/>
-                  </a:lnTo>
-                  <a:lnTo>
-                    <a:pt x="3652748" y="2401817"/>
-                  </a:lnTo>
-                  <a:lnTo>
-                    <a:pt x="3581126" y="2385177"/>
-                  </a:lnTo>
-                  <a:lnTo>
-                    <a:pt x="3509503" y="2368282"/>
-                  </a:lnTo>
-                  <a:lnTo>
-                    <a:pt x="3437881" y="2351127"/>
-                  </a:lnTo>
-                  <a:lnTo>
-                    <a:pt x="3366258" y="2333708"/>
-                  </a:lnTo>
-                  <a:lnTo>
-                    <a:pt x="3294636" y="2316021"/>
-                  </a:lnTo>
-                  <a:lnTo>
-                    <a:pt x="3223013" y="2298062"/>
-                  </a:lnTo>
-                  <a:lnTo>
-                    <a:pt x="3151391" y="2279827"/>
-                  </a:lnTo>
-                  <a:lnTo>
-                    <a:pt x="3079768" y="2261311"/>
-                  </a:lnTo>
-                  <a:lnTo>
-                    <a:pt x="3008146" y="2242511"/>
-                  </a:lnTo>
-                  <a:lnTo>
-                    <a:pt x="2936523" y="2223421"/>
-                  </a:lnTo>
-                  <a:lnTo>
-                    <a:pt x="2864901" y="2204038"/>
-                  </a:lnTo>
-                  <a:lnTo>
-                    <a:pt x="2793278" y="2184357"/>
-                  </a:lnTo>
-                  <a:lnTo>
-                    <a:pt x="2721655" y="2164373"/>
-                  </a:lnTo>
-                  <a:lnTo>
-                    <a:pt x="2650033" y="2144082"/>
-                  </a:lnTo>
-                  <a:lnTo>
-                    <a:pt x="2578410" y="2123478"/>
-                  </a:lnTo>
-                  <a:lnTo>
-                    <a:pt x="2506788" y="2102558"/>
-                  </a:lnTo>
-                  <a:lnTo>
-                    <a:pt x="2435165" y="2081316"/>
-                  </a:lnTo>
-                  <a:lnTo>
-                    <a:pt x="2363543" y="2059748"/>
-                  </a:lnTo>
-                  <a:lnTo>
-                    <a:pt x="2291920" y="2037847"/>
-                  </a:lnTo>
-                  <a:lnTo>
-                    <a:pt x="2220298" y="2015610"/>
-                  </a:lnTo>
-                  <a:lnTo>
-                    <a:pt x="2148675" y="1993031"/>
-                  </a:lnTo>
-                  <a:lnTo>
-                    <a:pt x="2077053" y="1970105"/>
-                  </a:lnTo>
-                  <a:lnTo>
-                    <a:pt x="2005430" y="1946826"/>
-                  </a:lnTo>
-                  <a:lnTo>
-                    <a:pt x="1933808" y="1923189"/>
-                  </a:lnTo>
-                  <a:lnTo>
-                    <a:pt x="1862185" y="1899188"/>
-                  </a:lnTo>
-                  <a:lnTo>
-                    <a:pt x="1790563" y="1874819"/>
-                  </a:lnTo>
-                  <a:lnTo>
-                    <a:pt x="1718940" y="1850074"/>
-                  </a:lnTo>
-                  <a:lnTo>
-                    <a:pt x="1647318" y="1824949"/>
-                  </a:lnTo>
-                  <a:lnTo>
-                    <a:pt x="1575695" y="1799438"/>
-                  </a:lnTo>
-                  <a:lnTo>
-                    <a:pt x="1504073" y="1773534"/>
-                  </a:lnTo>
-                  <a:lnTo>
-                    <a:pt x="1432450" y="1747232"/>
-                  </a:lnTo>
-                  <a:lnTo>
-                    <a:pt x="1360827" y="1720525"/>
-                  </a:lnTo>
-                  <a:lnTo>
-                    <a:pt x="1289205" y="1693408"/>
-                  </a:lnTo>
-                  <a:lnTo>
-                    <a:pt x="1217582" y="1665874"/>
-                  </a:lnTo>
-                  <a:lnTo>
-                    <a:pt x="1145960" y="1637916"/>
-                  </a:lnTo>
-                  <a:lnTo>
-                    <a:pt x="1074337" y="1609528"/>
-                  </a:lnTo>
-                  <a:lnTo>
-                    <a:pt x="1002715" y="1580704"/>
-                  </a:lnTo>
-                  <a:lnTo>
-                    <a:pt x="931092" y="1551436"/>
-                  </a:lnTo>
-                  <a:lnTo>
-                    <a:pt x="859470" y="1521718"/>
-                  </a:lnTo>
-                  <a:lnTo>
-                    <a:pt x="787847" y="1491543"/>
-                  </a:lnTo>
-                  <a:lnTo>
-                    <a:pt x="716225" y="1460904"/>
-                  </a:lnTo>
-                  <a:lnTo>
-                    <a:pt x="644602" y="1429794"/>
-                  </a:lnTo>
-                  <a:lnTo>
-                    <a:pt x="572980" y="1398205"/>
-                  </a:lnTo>
-                  <a:lnTo>
-                    <a:pt x="501357" y="1366131"/>
-                  </a:lnTo>
-                  <a:lnTo>
-                    <a:pt x="429735" y="1333563"/>
-                  </a:lnTo>
-                  <a:lnTo>
-                    <a:pt x="358112" y="1300494"/>
-                  </a:lnTo>
-                  <a:lnTo>
-                    <a:pt x="286490" y="1266917"/>
-                  </a:lnTo>
-                  <a:lnTo>
-                    <a:pt x="214867" y="1232823"/>
-                  </a:lnTo>
-                  <a:lnTo>
-                    <a:pt x="143245" y="1198206"/>
-                  </a:lnTo>
-                  <a:lnTo>
-                    <a:pt x="71622" y="1163055"/>
-                  </a:lnTo>
-                  <a:lnTo>
-                    <a:pt x="0" y="1127364"/>
+                    <a:pt x="3739000" y="63891"/>
+                  </a:lnTo>
+                  <a:lnTo>
+                    <a:pt x="3809547" y="343407"/>
+                  </a:lnTo>
+                  <a:lnTo>
+                    <a:pt x="3880094" y="598396"/>
+                  </a:lnTo>
+                  <a:lnTo>
+                    <a:pt x="3950641" y="831011"/>
+                  </a:lnTo>
+                  <a:lnTo>
+                    <a:pt x="4021188" y="1043215"/>
+                  </a:lnTo>
+                  <a:lnTo>
+                    <a:pt x="4091736" y="1236799"/>
+                  </a:lnTo>
+                  <a:lnTo>
+                    <a:pt x="4162283" y="1413397"/>
+                  </a:lnTo>
+                  <a:lnTo>
+                    <a:pt x="4232830" y="1574499"/>
+                  </a:lnTo>
+                  <a:lnTo>
+                    <a:pt x="4303377" y="1721465"/>
+                  </a:lnTo>
+                  <a:lnTo>
+                    <a:pt x="4373924" y="1855536"/>
+                  </a:lnTo>
+                  <a:lnTo>
+                    <a:pt x="4444471" y="1977842"/>
+                  </a:lnTo>
+                  <a:lnTo>
+                    <a:pt x="4515019" y="2089417"/>
+                  </a:lnTo>
+                  <a:lnTo>
+                    <a:pt x="4585566" y="2191201"/>
+                  </a:lnTo>
+                  <a:lnTo>
+                    <a:pt x="4656113" y="2284054"/>
+                  </a:lnTo>
+                  <a:lnTo>
+                    <a:pt x="4726660" y="2368760"/>
+                  </a:lnTo>
+                  <a:lnTo>
+                    <a:pt x="4797207" y="2446033"/>
+                  </a:lnTo>
+                  <a:lnTo>
+                    <a:pt x="4867754" y="2482671"/>
+                  </a:lnTo>
+                  <a:lnTo>
+                    <a:pt x="4938302" y="2494285"/>
+                  </a:lnTo>
+                  <a:lnTo>
+                    <a:pt x="5008849" y="2505722"/>
+                  </a:lnTo>
+                  <a:lnTo>
+                    <a:pt x="5079396" y="2516986"/>
+                  </a:lnTo>
+                  <a:lnTo>
+                    <a:pt x="5149943" y="2528080"/>
+                  </a:lnTo>
+                  <a:lnTo>
+                    <a:pt x="5220490" y="2539006"/>
+                  </a:lnTo>
+                  <a:lnTo>
+                    <a:pt x="5291037" y="2549766"/>
+                  </a:lnTo>
+                  <a:lnTo>
+                    <a:pt x="5361585" y="2560363"/>
+                  </a:lnTo>
+                  <a:lnTo>
+                    <a:pt x="5432132" y="2570799"/>
+                  </a:lnTo>
+                  <a:lnTo>
+                    <a:pt x="5502679" y="2581078"/>
+                  </a:lnTo>
+                  <a:lnTo>
+                    <a:pt x="5573226" y="2591201"/>
+                  </a:lnTo>
+                  <a:lnTo>
+                    <a:pt x="5643773" y="2601170"/>
+                  </a:lnTo>
+                  <a:lnTo>
+                    <a:pt x="5714320" y="2610989"/>
+                  </a:lnTo>
+                  <a:lnTo>
+                    <a:pt x="5784868" y="2620659"/>
+                  </a:lnTo>
+                  <a:lnTo>
+                    <a:pt x="5855415" y="2630182"/>
+                  </a:lnTo>
+                  <a:lnTo>
+                    <a:pt x="5925962" y="2639561"/>
+                  </a:lnTo>
+                  <a:lnTo>
+                    <a:pt x="5996509" y="2648798"/>
+                  </a:lnTo>
+                  <a:lnTo>
+                    <a:pt x="6067056" y="2657895"/>
+                  </a:lnTo>
+                  <a:lnTo>
+                    <a:pt x="6137604" y="2666855"/>
+                  </a:lnTo>
+                  <a:lnTo>
+                    <a:pt x="6208151" y="2675678"/>
+                  </a:lnTo>
+                  <a:lnTo>
+                    <a:pt x="6278698" y="2684368"/>
+                  </a:lnTo>
+                  <a:lnTo>
+                    <a:pt x="6349245" y="2692927"/>
+                  </a:lnTo>
+                  <a:lnTo>
+                    <a:pt x="6419792" y="2701355"/>
+                  </a:lnTo>
+                  <a:lnTo>
+                    <a:pt x="6490339" y="2709656"/>
+                  </a:lnTo>
+                  <a:lnTo>
+                    <a:pt x="6560887" y="2717832"/>
+                  </a:lnTo>
+                  <a:lnTo>
+                    <a:pt x="6631434" y="2725883"/>
+                  </a:lnTo>
+                  <a:lnTo>
+                    <a:pt x="6701981" y="2733813"/>
+                  </a:lnTo>
+                  <a:lnTo>
+                    <a:pt x="6772528" y="2741622"/>
+                  </a:lnTo>
+                  <a:lnTo>
+                    <a:pt x="6843075" y="2749314"/>
+                  </a:lnTo>
+                  <a:lnTo>
+                    <a:pt x="6913622" y="2756888"/>
+                  </a:lnTo>
+                  <a:lnTo>
+                    <a:pt x="6984170" y="2764348"/>
+                  </a:lnTo>
+                  <a:lnTo>
+                    <a:pt x="6984170" y="3202794"/>
+                  </a:lnTo>
+                  <a:lnTo>
+                    <a:pt x="6913622" y="3198311"/>
+                  </a:lnTo>
+                  <a:lnTo>
+                    <a:pt x="6843075" y="3193396"/>
+                  </a:lnTo>
+                  <a:lnTo>
+                    <a:pt x="6772528" y="3188008"/>
+                  </a:lnTo>
+                  <a:lnTo>
+                    <a:pt x="6701981" y="3182103"/>
+                  </a:lnTo>
+                  <a:lnTo>
+                    <a:pt x="6631434" y="3175629"/>
+                  </a:lnTo>
+                  <a:lnTo>
+                    <a:pt x="6560887" y="3168532"/>
+                  </a:lnTo>
+                  <a:lnTo>
+                    <a:pt x="6490339" y="3160753"/>
+                  </a:lnTo>
+                  <a:lnTo>
+                    <a:pt x="6419792" y="3152226"/>
+                  </a:lnTo>
+                  <a:lnTo>
+                    <a:pt x="6349245" y="3142879"/>
+                  </a:lnTo>
+                  <a:lnTo>
+                    <a:pt x="6278698" y="3132632"/>
+                  </a:lnTo>
+                  <a:lnTo>
+                    <a:pt x="6208151" y="3121400"/>
+                  </a:lnTo>
+                  <a:lnTo>
+                    <a:pt x="6137604" y="3109087"/>
+                  </a:lnTo>
+                  <a:lnTo>
+                    <a:pt x="6067056" y="3095591"/>
+                  </a:lnTo>
+                  <a:lnTo>
+                    <a:pt x="5996509" y="3080796"/>
+                  </a:lnTo>
+                  <a:lnTo>
+                    <a:pt x="5925962" y="3064578"/>
+                  </a:lnTo>
+                  <a:lnTo>
+                    <a:pt x="5855415" y="3046800"/>
+                  </a:lnTo>
+                  <a:lnTo>
+                    <a:pt x="5784868" y="3027312"/>
+                  </a:lnTo>
+                  <a:lnTo>
+                    <a:pt x="5714320" y="3005949"/>
+                  </a:lnTo>
+                  <a:lnTo>
+                    <a:pt x="5643773" y="2982532"/>
+                  </a:lnTo>
+                  <a:lnTo>
+                    <a:pt x="5573226" y="2956863"/>
+                  </a:lnTo>
+                  <a:lnTo>
+                    <a:pt x="5502679" y="2928724"/>
+                  </a:lnTo>
+                  <a:lnTo>
+                    <a:pt x="5432132" y="2897879"/>
+                  </a:lnTo>
+                  <a:lnTo>
+                    <a:pt x="5361585" y="2864067"/>
+                  </a:lnTo>
+                  <a:lnTo>
+                    <a:pt x="5291037" y="2827002"/>
+                  </a:lnTo>
+                  <a:lnTo>
+                    <a:pt x="5220490" y="2786373"/>
+                  </a:lnTo>
+                  <a:lnTo>
+                    <a:pt x="5149943" y="2741836"/>
+                  </a:lnTo>
+                  <a:lnTo>
+                    <a:pt x="5079396" y="2693015"/>
+                  </a:lnTo>
+                  <a:lnTo>
+                    <a:pt x="5008849" y="2639498"/>
+                  </a:lnTo>
+                  <a:lnTo>
+                    <a:pt x="4938302" y="2580833"/>
+                  </a:lnTo>
+                  <a:lnTo>
+                    <a:pt x="4867754" y="2516526"/>
+                  </a:lnTo>
+                  <a:lnTo>
+                    <a:pt x="4797207" y="2470879"/>
+                  </a:lnTo>
+                  <a:lnTo>
+                    <a:pt x="4726660" y="2458906"/>
+                  </a:lnTo>
+                  <a:lnTo>
+                    <a:pt x="4656113" y="2446749"/>
+                  </a:lnTo>
+                  <a:lnTo>
+                    <a:pt x="4585566" y="2434404"/>
+                  </a:lnTo>
+                  <a:lnTo>
+                    <a:pt x="4515019" y="2421870"/>
+                  </a:lnTo>
+                  <a:lnTo>
+                    <a:pt x="4444471" y="2409143"/>
+                  </a:lnTo>
+                  <a:lnTo>
+                    <a:pt x="4373924" y="2396220"/>
+                  </a:lnTo>
+                  <a:lnTo>
+                    <a:pt x="4303377" y="2383098"/>
+                  </a:lnTo>
+                  <a:lnTo>
+                    <a:pt x="4232830" y="2369775"/>
+                  </a:lnTo>
+                  <a:lnTo>
+                    <a:pt x="4162283" y="2356247"/>
+                  </a:lnTo>
+                  <a:lnTo>
+                    <a:pt x="4091736" y="2342510"/>
+                  </a:lnTo>
+                  <a:lnTo>
+                    <a:pt x="4021188" y="2328563"/>
+                  </a:lnTo>
+                  <a:lnTo>
+                    <a:pt x="3950641" y="2314401"/>
+                  </a:lnTo>
+                  <a:lnTo>
+                    <a:pt x="3880094" y="2300021"/>
+                  </a:lnTo>
+                  <a:lnTo>
+                    <a:pt x="3809547" y="2285420"/>
+                  </a:lnTo>
+                  <a:lnTo>
+                    <a:pt x="3739000" y="2270594"/>
+                  </a:lnTo>
+                  <a:lnTo>
+                    <a:pt x="3668452" y="2255541"/>
+                  </a:lnTo>
+                  <a:lnTo>
+                    <a:pt x="3597905" y="2240255"/>
+                  </a:lnTo>
+                  <a:lnTo>
+                    <a:pt x="3527358" y="2224735"/>
+                  </a:lnTo>
+                  <a:lnTo>
+                    <a:pt x="3456811" y="2208976"/>
+                  </a:lnTo>
+                  <a:lnTo>
+                    <a:pt x="3386264" y="2192975"/>
+                  </a:lnTo>
+                  <a:lnTo>
+                    <a:pt x="3315717" y="2176728"/>
+                  </a:lnTo>
+                  <a:lnTo>
+                    <a:pt x="3245169" y="2160231"/>
+                  </a:lnTo>
+                  <a:lnTo>
+                    <a:pt x="3174622" y="2143480"/>
+                  </a:lnTo>
+                  <a:lnTo>
+                    <a:pt x="3104075" y="2126471"/>
+                  </a:lnTo>
+                  <a:lnTo>
+                    <a:pt x="3033528" y="2109201"/>
+                  </a:lnTo>
+                  <a:lnTo>
+                    <a:pt x="2962981" y="2091665"/>
+                  </a:lnTo>
+                  <a:lnTo>
+                    <a:pt x="2892434" y="2073860"/>
+                  </a:lnTo>
+                  <a:lnTo>
+                    <a:pt x="2821886" y="2055780"/>
+                  </a:lnTo>
+                  <a:lnTo>
+                    <a:pt x="2751339" y="2037423"/>
+                  </a:lnTo>
+                  <a:lnTo>
+                    <a:pt x="2680792" y="2018784"/>
+                  </a:lnTo>
+                  <a:lnTo>
+                    <a:pt x="2610245" y="1999857"/>
+                  </a:lnTo>
+                  <a:lnTo>
+                    <a:pt x="2539698" y="1980640"/>
+                  </a:lnTo>
+                  <a:lnTo>
+                    <a:pt x="2469151" y="1961127"/>
+                  </a:lnTo>
+                  <a:lnTo>
+                    <a:pt x="2398603" y="1941314"/>
+                  </a:lnTo>
+                  <a:lnTo>
+                    <a:pt x="2328056" y="1921196"/>
+                  </a:lnTo>
+                  <a:lnTo>
+                    <a:pt x="2257509" y="1900769"/>
+                  </a:lnTo>
+                  <a:lnTo>
+                    <a:pt x="2186962" y="1880028"/>
+                  </a:lnTo>
+                  <a:lnTo>
+                    <a:pt x="2116415" y="1858967"/>
+                  </a:lnTo>
+                  <a:lnTo>
+                    <a:pt x="2045868" y="1837583"/>
+                  </a:lnTo>
+                  <a:lnTo>
+                    <a:pt x="1975320" y="1815870"/>
+                  </a:lnTo>
+                  <a:lnTo>
+                    <a:pt x="1904773" y="1793823"/>
+                  </a:lnTo>
+                  <a:lnTo>
+                    <a:pt x="1834226" y="1771437"/>
+                  </a:lnTo>
+                  <a:lnTo>
+                    <a:pt x="1763679" y="1748707"/>
+                  </a:lnTo>
+                  <a:lnTo>
+                    <a:pt x="1693132" y="1725627"/>
+                  </a:lnTo>
+                  <a:lnTo>
+                    <a:pt x="1622584" y="1702192"/>
+                  </a:lnTo>
+                  <a:lnTo>
+                    <a:pt x="1552037" y="1678396"/>
+                  </a:lnTo>
+                  <a:lnTo>
+                    <a:pt x="1481490" y="1654235"/>
+                  </a:lnTo>
+                  <a:lnTo>
+                    <a:pt x="1410943" y="1629702"/>
+                  </a:lnTo>
+                  <a:lnTo>
+                    <a:pt x="1340396" y="1604792"/>
+                  </a:lnTo>
+                  <a:lnTo>
+                    <a:pt x="1269849" y="1579499"/>
+                  </a:lnTo>
+                  <a:lnTo>
+                    <a:pt x="1199301" y="1553816"/>
+                  </a:lnTo>
+                  <a:lnTo>
+                    <a:pt x="1128754" y="1527739"/>
+                  </a:lnTo>
+                  <a:lnTo>
+                    <a:pt x="1058207" y="1501261"/>
+                  </a:lnTo>
+                  <a:lnTo>
+                    <a:pt x="987660" y="1474375"/>
+                  </a:lnTo>
+                  <a:lnTo>
+                    <a:pt x="917113" y="1447076"/>
+                  </a:lnTo>
+                  <a:lnTo>
+                    <a:pt x="846566" y="1419358"/>
+                  </a:lnTo>
+                  <a:lnTo>
+                    <a:pt x="776018" y="1391212"/>
+                  </a:lnTo>
+                  <a:lnTo>
+                    <a:pt x="705471" y="1362634"/>
+                  </a:lnTo>
+                  <a:lnTo>
+                    <a:pt x="634924" y="1333617"/>
+                  </a:lnTo>
+                  <a:lnTo>
+                    <a:pt x="564377" y="1304153"/>
+                  </a:lnTo>
+                  <a:lnTo>
+                    <a:pt x="493830" y="1274236"/>
+                  </a:lnTo>
+                  <a:lnTo>
+                    <a:pt x="423283" y="1243859"/>
+                  </a:lnTo>
+                  <a:lnTo>
+                    <a:pt x="352735" y="1213015"/>
+                  </a:lnTo>
+                  <a:lnTo>
+                    <a:pt x="282188" y="1181696"/>
+                  </a:lnTo>
+                  <a:lnTo>
+                    <a:pt x="211641" y="1149896"/>
+                  </a:lnTo>
+                  <a:lnTo>
+                    <a:pt x="141094" y="1117607"/>
+                  </a:lnTo>
+                  <a:lnTo>
+                    <a:pt x="70547" y="1084821"/>
+                  </a:lnTo>
+                  <a:lnTo>
+                    <a:pt x="0" y="1051531"/>
                   </a:lnTo>
                   <a:lnTo>
                     <a:pt x="0" y="0"/>
@@ -3480,156 +3480,156 @@
           </p:nvSpPr>
           <p:spPr>
             <a:xfrm>
-              <a:off x="4953108" y="2073503"/>
-              <a:ext cx="3309571" cy="2963706"/>
+              <a:off x="4989143" y="2209169"/>
+              <a:ext cx="3259880" cy="2764348"/>
             </a:xfrm>
             <a:custGeom>
               <a:avLst/>
               <a:pathLst>
-                <a:path w="3309571" h="2963706">
+                <a:path w="3259880" h="2764348">
                   <a:moveTo>
                     <a:pt x="0" y="0"/>
                   </a:moveTo>
                   <a:lnTo>
-                    <a:pt x="14934" y="68499"/>
-                  </a:lnTo>
-                  <a:lnTo>
-                    <a:pt x="86557" y="368172"/>
-                  </a:lnTo>
-                  <a:lnTo>
-                    <a:pt x="158179" y="641551"/>
-                  </a:lnTo>
-                  <a:lnTo>
-                    <a:pt x="229802" y="890941"/>
-                  </a:lnTo>
-                  <a:lnTo>
-                    <a:pt x="301424" y="1118449"/>
-                  </a:lnTo>
-                  <a:lnTo>
-                    <a:pt x="373047" y="1325994"/>
-                  </a:lnTo>
-                  <a:lnTo>
-                    <a:pt x="444670" y="1515328"/>
-                  </a:lnTo>
-                  <a:lnTo>
-                    <a:pt x="516292" y="1688048"/>
-                  </a:lnTo>
-                  <a:lnTo>
-                    <a:pt x="587915" y="1845613"/>
-                  </a:lnTo>
-                  <a:lnTo>
-                    <a:pt x="659537" y="1989352"/>
-                  </a:lnTo>
-                  <a:lnTo>
-                    <a:pt x="731160" y="2120479"/>
-                  </a:lnTo>
-                  <a:lnTo>
-                    <a:pt x="802782" y="2240100"/>
-                  </a:lnTo>
-                  <a:lnTo>
-                    <a:pt x="874405" y="2349225"/>
-                  </a:lnTo>
-                  <a:lnTo>
-                    <a:pt x="946027" y="2448774"/>
-                  </a:lnTo>
-                  <a:lnTo>
-                    <a:pt x="1017650" y="2539589"/>
-                  </a:lnTo>
-                  <a:lnTo>
-                    <a:pt x="1089272" y="2622435"/>
-                  </a:lnTo>
-                  <a:lnTo>
-                    <a:pt x="1160895" y="2661715"/>
-                  </a:lnTo>
-                  <a:lnTo>
-                    <a:pt x="1232517" y="2674166"/>
-                  </a:lnTo>
-                  <a:lnTo>
-                    <a:pt x="1304140" y="2686428"/>
-                  </a:lnTo>
-                  <a:lnTo>
-                    <a:pt x="1375762" y="2698505"/>
-                  </a:lnTo>
-                  <a:lnTo>
-                    <a:pt x="1447385" y="2710399"/>
-                  </a:lnTo>
-                  <a:lnTo>
-                    <a:pt x="1519007" y="2722112"/>
-                  </a:lnTo>
-                  <a:lnTo>
-                    <a:pt x="1590630" y="2733648"/>
-                  </a:lnTo>
-                  <a:lnTo>
-                    <a:pt x="1662252" y="2745010"/>
-                  </a:lnTo>
-                  <a:lnTo>
-                    <a:pt x="1733875" y="2756199"/>
-                  </a:lnTo>
-                  <a:lnTo>
-                    <a:pt x="1805498" y="2767219"/>
-                  </a:lnTo>
-                  <a:lnTo>
-                    <a:pt x="1877120" y="2778072"/>
-                  </a:lnTo>
-                  <a:lnTo>
-                    <a:pt x="1948743" y="2788760"/>
-                  </a:lnTo>
-                  <a:lnTo>
-                    <a:pt x="2020365" y="2799287"/>
-                  </a:lnTo>
-                  <a:lnTo>
-                    <a:pt x="2091988" y="2809654"/>
-                  </a:lnTo>
-                  <a:lnTo>
-                    <a:pt x="2163610" y="2819864"/>
-                  </a:lnTo>
-                  <a:lnTo>
-                    <a:pt x="2235233" y="2829919"/>
-                  </a:lnTo>
-                  <a:lnTo>
-                    <a:pt x="2306855" y="2839823"/>
-                  </a:lnTo>
-                  <a:lnTo>
-                    <a:pt x="2378478" y="2849576"/>
-                  </a:lnTo>
-                  <a:lnTo>
-                    <a:pt x="2450100" y="2859181"/>
-                  </a:lnTo>
-                  <a:lnTo>
-                    <a:pt x="2521723" y="2868641"/>
-                  </a:lnTo>
-                  <a:lnTo>
-                    <a:pt x="2593345" y="2877958"/>
-                  </a:lnTo>
-                  <a:lnTo>
-                    <a:pt x="2664968" y="2887134"/>
-                  </a:lnTo>
-                  <a:lnTo>
-                    <a:pt x="2736590" y="2896170"/>
-                  </a:lnTo>
-                  <a:lnTo>
-                    <a:pt x="2808213" y="2905070"/>
-                  </a:lnTo>
-                  <a:lnTo>
-                    <a:pt x="2879835" y="2913835"/>
-                  </a:lnTo>
-                  <a:lnTo>
-                    <a:pt x="2951458" y="2922467"/>
-                  </a:lnTo>
-                  <a:lnTo>
-                    <a:pt x="3023080" y="2930968"/>
-                  </a:lnTo>
-                  <a:lnTo>
-                    <a:pt x="3094703" y="2939341"/>
-                  </a:lnTo>
-                  <a:lnTo>
-                    <a:pt x="3166326" y="2947587"/>
-                  </a:lnTo>
-                  <a:lnTo>
-                    <a:pt x="3237948" y="2955708"/>
-                  </a:lnTo>
-                  <a:lnTo>
-                    <a:pt x="3309571" y="2963706"/>
+                    <a:pt x="14710" y="63891"/>
+                  </a:lnTo>
+                  <a:lnTo>
+                    <a:pt x="85257" y="343407"/>
+                  </a:lnTo>
+                  <a:lnTo>
+                    <a:pt x="155804" y="598396"/>
+                  </a:lnTo>
+                  <a:lnTo>
+                    <a:pt x="226352" y="831011"/>
+                  </a:lnTo>
+                  <a:lnTo>
+                    <a:pt x="296899" y="1043215"/>
+                  </a:lnTo>
+                  <a:lnTo>
+                    <a:pt x="367446" y="1236799"/>
+                  </a:lnTo>
+                  <a:lnTo>
+                    <a:pt x="437993" y="1413397"/>
+                  </a:lnTo>
+                  <a:lnTo>
+                    <a:pt x="508540" y="1574499"/>
+                  </a:lnTo>
+                  <a:lnTo>
+                    <a:pt x="579088" y="1721465"/>
+                  </a:lnTo>
+                  <a:lnTo>
+                    <a:pt x="649635" y="1855536"/>
+                  </a:lnTo>
+                  <a:lnTo>
+                    <a:pt x="720182" y="1977842"/>
+                  </a:lnTo>
+                  <a:lnTo>
+                    <a:pt x="790729" y="2089417"/>
+                  </a:lnTo>
+                  <a:lnTo>
+                    <a:pt x="861276" y="2191201"/>
+                  </a:lnTo>
+                  <a:lnTo>
+                    <a:pt x="931823" y="2284054"/>
+                  </a:lnTo>
+                  <a:lnTo>
+                    <a:pt x="1002371" y="2368760"/>
+                  </a:lnTo>
+                  <a:lnTo>
+                    <a:pt x="1072918" y="2446033"/>
+                  </a:lnTo>
+                  <a:lnTo>
+                    <a:pt x="1143465" y="2482671"/>
+                  </a:lnTo>
+                  <a:lnTo>
+                    <a:pt x="1214012" y="2494285"/>
+                  </a:lnTo>
+                  <a:lnTo>
+                    <a:pt x="1284559" y="2505722"/>
+                  </a:lnTo>
+                  <a:lnTo>
+                    <a:pt x="1355106" y="2516986"/>
+                  </a:lnTo>
+                  <a:lnTo>
+                    <a:pt x="1425654" y="2528080"/>
+                  </a:lnTo>
+                  <a:lnTo>
+                    <a:pt x="1496201" y="2539006"/>
+                  </a:lnTo>
+                  <a:lnTo>
+                    <a:pt x="1566748" y="2549766"/>
+                  </a:lnTo>
+                  <a:lnTo>
+                    <a:pt x="1637295" y="2560363"/>
+                  </a:lnTo>
+                  <a:lnTo>
+                    <a:pt x="1707842" y="2570799"/>
+                  </a:lnTo>
+                  <a:lnTo>
+                    <a:pt x="1778389" y="2581078"/>
+                  </a:lnTo>
+                  <a:lnTo>
+                    <a:pt x="1848937" y="2591201"/>
+                  </a:lnTo>
+                  <a:lnTo>
+                    <a:pt x="1919484" y="2601170"/>
+                  </a:lnTo>
+                  <a:lnTo>
+                    <a:pt x="1990031" y="2610989"/>
+                  </a:lnTo>
+                  <a:lnTo>
+                    <a:pt x="2060578" y="2620659"/>
+                  </a:lnTo>
+                  <a:lnTo>
+                    <a:pt x="2131125" y="2630182"/>
+                  </a:lnTo>
+                  <a:lnTo>
+                    <a:pt x="2201672" y="2639561"/>
+                  </a:lnTo>
+                  <a:lnTo>
+                    <a:pt x="2272220" y="2648798"/>
+                  </a:lnTo>
+                  <a:lnTo>
+                    <a:pt x="2342767" y="2657895"/>
+                  </a:lnTo>
+                  <a:lnTo>
+                    <a:pt x="2413314" y="2666855"/>
+                  </a:lnTo>
+                  <a:lnTo>
+                    <a:pt x="2483861" y="2675678"/>
+                  </a:lnTo>
+                  <a:lnTo>
+                    <a:pt x="2554408" y="2684368"/>
+                  </a:lnTo>
+                  <a:lnTo>
+                    <a:pt x="2624956" y="2692927"/>
+                  </a:lnTo>
+                  <a:lnTo>
+                    <a:pt x="2695503" y="2701355"/>
+                  </a:lnTo>
+                  <a:lnTo>
+                    <a:pt x="2766050" y="2709656"/>
+                  </a:lnTo>
+                  <a:lnTo>
+                    <a:pt x="2836597" y="2717832"/>
+                  </a:lnTo>
+                  <a:lnTo>
+                    <a:pt x="2907144" y="2725883"/>
+                  </a:lnTo>
+                  <a:lnTo>
+                    <a:pt x="2977691" y="2733813"/>
+                  </a:lnTo>
+                  <a:lnTo>
+                    <a:pt x="3048239" y="2741622"/>
+                  </a:lnTo>
+                  <a:lnTo>
+                    <a:pt x="3118786" y="2749314"/>
+                  </a:lnTo>
+                  <a:lnTo>
+                    <a:pt x="3189333" y="2756888"/>
+                  </a:lnTo>
+                  <a:lnTo>
+                    <a:pt x="3259880" y="2764348"/>
                   </a:lnTo>
                 </a:path>
               </a:pathLst>
@@ -3649,309 +3649,309 @@
           </p:nvSpPr>
           <p:spPr>
             <a:xfrm>
-              <a:off x="1172049" y="3200867"/>
-              <a:ext cx="7090630" cy="2306407"/>
+              <a:off x="1264853" y="3260700"/>
+              <a:ext cx="6984170" cy="2151263"/>
             </a:xfrm>
             <a:custGeom>
               <a:avLst/>
               <a:pathLst>
-                <a:path w="7090630" h="2306407">
+                <a:path w="6984170" h="2151263">
                   <a:moveTo>
-                    <a:pt x="7090630" y="2306407"/>
+                    <a:pt x="6984170" y="2151263"/>
                   </a:moveTo>
                   <a:lnTo>
-                    <a:pt x="7019007" y="2301600"/>
-                  </a:lnTo>
-                  <a:lnTo>
-                    <a:pt x="6947385" y="2296331"/>
-                  </a:lnTo>
-                  <a:lnTo>
-                    <a:pt x="6875762" y="2290555"/>
-                  </a:lnTo>
-                  <a:lnTo>
-                    <a:pt x="6804139" y="2284223"/>
-                  </a:lnTo>
-                  <a:lnTo>
-                    <a:pt x="6732517" y="2277282"/>
-                  </a:lnTo>
-                  <a:lnTo>
-                    <a:pt x="6660894" y="2269674"/>
-                  </a:lnTo>
-                  <a:lnTo>
-                    <a:pt x="6589272" y="2261334"/>
-                  </a:lnTo>
-                  <a:lnTo>
-                    <a:pt x="6517649" y="2252192"/>
-                  </a:lnTo>
-                  <a:lnTo>
-                    <a:pt x="6446027" y="2242170"/>
-                  </a:lnTo>
-                  <a:lnTo>
-                    <a:pt x="6374404" y="2231185"/>
-                  </a:lnTo>
-                  <a:lnTo>
-                    <a:pt x="6302782" y="2219143"/>
-                  </a:lnTo>
-                  <a:lnTo>
-                    <a:pt x="6231159" y="2205942"/>
-                  </a:lnTo>
-                  <a:lnTo>
-                    <a:pt x="6159537" y="2191472"/>
-                  </a:lnTo>
-                  <a:lnTo>
-                    <a:pt x="6087914" y="2175610"/>
-                  </a:lnTo>
-                  <a:lnTo>
-                    <a:pt x="6016292" y="2158222"/>
-                  </a:lnTo>
-                  <a:lnTo>
-                    <a:pt x="5944669" y="2139162"/>
-                  </a:lnTo>
-                  <a:lnTo>
-                    <a:pt x="5873047" y="2118269"/>
-                  </a:lnTo>
-                  <a:lnTo>
-                    <a:pt x="5801424" y="2095366"/>
-                  </a:lnTo>
-                  <a:lnTo>
-                    <a:pt x="5729802" y="2070260"/>
-                  </a:lnTo>
-                  <a:lnTo>
-                    <a:pt x="5658179" y="2042739"/>
-                  </a:lnTo>
-                  <a:lnTo>
-                    <a:pt x="5586557" y="2012571"/>
-                  </a:lnTo>
-                  <a:lnTo>
-                    <a:pt x="5514934" y="1979501"/>
-                  </a:lnTo>
-                  <a:lnTo>
-                    <a:pt x="5443311" y="1943251"/>
-                  </a:lnTo>
-                  <a:lnTo>
-                    <a:pt x="5371689" y="1903514"/>
-                  </a:lnTo>
-                  <a:lnTo>
-                    <a:pt x="5300066" y="1859954"/>
-                  </a:lnTo>
-                  <a:lnTo>
-                    <a:pt x="5228444" y="1812205"/>
-                  </a:lnTo>
-                  <a:lnTo>
-                    <a:pt x="5156821" y="1759863"/>
-                  </a:lnTo>
-                  <a:lnTo>
-                    <a:pt x="5085199" y="1702487"/>
-                  </a:lnTo>
-                  <a:lnTo>
-                    <a:pt x="5013576" y="1639591"/>
-                  </a:lnTo>
-                  <a:lnTo>
-                    <a:pt x="4941954" y="1570646"/>
-                  </a:lnTo>
-                  <a:lnTo>
-                    <a:pt x="4870331" y="1521708"/>
-                  </a:lnTo>
-                  <a:lnTo>
-                    <a:pt x="4798709" y="1508871"/>
-                  </a:lnTo>
-                  <a:lnTo>
-                    <a:pt x="4727086" y="1495837"/>
-                  </a:lnTo>
-                  <a:lnTo>
-                    <a:pt x="4655464" y="1482602"/>
-                  </a:lnTo>
-                  <a:lnTo>
-                    <a:pt x="4583841" y="1469164"/>
-                  </a:lnTo>
-                  <a:lnTo>
-                    <a:pt x="4512219" y="1455519"/>
-                  </a:lnTo>
-                  <a:lnTo>
-                    <a:pt x="4440596" y="1441664"/>
-                  </a:lnTo>
-                  <a:lnTo>
-                    <a:pt x="4368974" y="1427596"/>
-                  </a:lnTo>
-                  <a:lnTo>
-                    <a:pt x="4297351" y="1413312"/>
-                  </a:lnTo>
-                  <a:lnTo>
-                    <a:pt x="4225729" y="1398808"/>
-                  </a:lnTo>
-                  <a:lnTo>
-                    <a:pt x="4154106" y="1384081"/>
-                  </a:lnTo>
-                  <a:lnTo>
-                    <a:pt x="4082483" y="1369128"/>
-                  </a:lnTo>
-                  <a:lnTo>
-                    <a:pt x="4010861" y="1353945"/>
-                  </a:lnTo>
-                  <a:lnTo>
-                    <a:pt x="3939238" y="1338528"/>
-                  </a:lnTo>
-                  <a:lnTo>
-                    <a:pt x="3867616" y="1322874"/>
-                  </a:lnTo>
-                  <a:lnTo>
-                    <a:pt x="3795993" y="1306979"/>
-                  </a:lnTo>
-                  <a:lnTo>
-                    <a:pt x="3724371" y="1290840"/>
-                  </a:lnTo>
-                  <a:lnTo>
-                    <a:pt x="3652748" y="1274452"/>
-                  </a:lnTo>
-                  <a:lnTo>
-                    <a:pt x="3581126" y="1257813"/>
-                  </a:lnTo>
-                  <a:lnTo>
-                    <a:pt x="3509503" y="1240917"/>
-                  </a:lnTo>
-                  <a:lnTo>
-                    <a:pt x="3437881" y="1223762"/>
-                  </a:lnTo>
-                  <a:lnTo>
-                    <a:pt x="3366258" y="1206343"/>
-                  </a:lnTo>
-                  <a:lnTo>
-                    <a:pt x="3294636" y="1188656"/>
-                  </a:lnTo>
-                  <a:lnTo>
-                    <a:pt x="3223013" y="1170697"/>
-                  </a:lnTo>
-                  <a:lnTo>
-                    <a:pt x="3151391" y="1152462"/>
-                  </a:lnTo>
-                  <a:lnTo>
-                    <a:pt x="3079768" y="1133946"/>
-                  </a:lnTo>
-                  <a:lnTo>
-                    <a:pt x="3008146" y="1115146"/>
-                  </a:lnTo>
-                  <a:lnTo>
-                    <a:pt x="2936523" y="1096056"/>
-                  </a:lnTo>
-                  <a:lnTo>
-                    <a:pt x="2864901" y="1076673"/>
-                  </a:lnTo>
-                  <a:lnTo>
-                    <a:pt x="2793278" y="1056992"/>
-                  </a:lnTo>
-                  <a:lnTo>
-                    <a:pt x="2721655" y="1037008"/>
-                  </a:lnTo>
-                  <a:lnTo>
-                    <a:pt x="2650033" y="1016717"/>
-                  </a:lnTo>
-                  <a:lnTo>
-                    <a:pt x="2578410" y="996114"/>
-                  </a:lnTo>
-                  <a:lnTo>
-                    <a:pt x="2506788" y="975194"/>
-                  </a:lnTo>
-                  <a:lnTo>
-                    <a:pt x="2435165" y="953952"/>
-                  </a:lnTo>
-                  <a:lnTo>
-                    <a:pt x="2363543" y="932383"/>
-                  </a:lnTo>
-                  <a:lnTo>
-                    <a:pt x="2291920" y="910483"/>
-                  </a:lnTo>
-                  <a:lnTo>
-                    <a:pt x="2220298" y="888246"/>
-                  </a:lnTo>
-                  <a:lnTo>
-                    <a:pt x="2148675" y="865666"/>
-                  </a:lnTo>
-                  <a:lnTo>
-                    <a:pt x="2077053" y="842740"/>
-                  </a:lnTo>
-                  <a:lnTo>
-                    <a:pt x="2005430" y="819461"/>
-                  </a:lnTo>
-                  <a:lnTo>
-                    <a:pt x="1933808" y="795824"/>
-                  </a:lnTo>
-                  <a:lnTo>
-                    <a:pt x="1862185" y="771824"/>
-                  </a:lnTo>
-                  <a:lnTo>
-                    <a:pt x="1790563" y="747454"/>
-                  </a:lnTo>
-                  <a:lnTo>
-                    <a:pt x="1718940" y="722710"/>
-                  </a:lnTo>
-                  <a:lnTo>
-                    <a:pt x="1647318" y="697585"/>
-                  </a:lnTo>
-                  <a:lnTo>
-                    <a:pt x="1575695" y="672073"/>
-                  </a:lnTo>
-                  <a:lnTo>
-                    <a:pt x="1504073" y="646169"/>
-                  </a:lnTo>
-                  <a:lnTo>
-                    <a:pt x="1432450" y="619867"/>
-                  </a:lnTo>
-                  <a:lnTo>
-                    <a:pt x="1360827" y="593161"/>
-                  </a:lnTo>
-                  <a:lnTo>
-                    <a:pt x="1289205" y="566043"/>
-                  </a:lnTo>
-                  <a:lnTo>
-                    <a:pt x="1217582" y="538509"/>
-                  </a:lnTo>
-                  <a:lnTo>
-                    <a:pt x="1145960" y="510551"/>
-                  </a:lnTo>
-                  <a:lnTo>
-                    <a:pt x="1074337" y="482163"/>
-                  </a:lnTo>
-                  <a:lnTo>
-                    <a:pt x="1002715" y="453339"/>
-                  </a:lnTo>
-                  <a:lnTo>
-                    <a:pt x="931092" y="424071"/>
-                  </a:lnTo>
-                  <a:lnTo>
-                    <a:pt x="859470" y="394353"/>
-                  </a:lnTo>
-                  <a:lnTo>
-                    <a:pt x="787847" y="364178"/>
-                  </a:lnTo>
-                  <a:lnTo>
-                    <a:pt x="716225" y="333539"/>
-                  </a:lnTo>
-                  <a:lnTo>
-                    <a:pt x="644602" y="302429"/>
-                  </a:lnTo>
-                  <a:lnTo>
-                    <a:pt x="572980" y="270840"/>
-                  </a:lnTo>
-                  <a:lnTo>
-                    <a:pt x="501357" y="238766"/>
-                  </a:lnTo>
-                  <a:lnTo>
-                    <a:pt x="429735" y="206198"/>
-                  </a:lnTo>
-                  <a:lnTo>
-                    <a:pt x="358112" y="173130"/>
-                  </a:lnTo>
-                  <a:lnTo>
-                    <a:pt x="286490" y="139552"/>
-                  </a:lnTo>
-                  <a:lnTo>
-                    <a:pt x="214867" y="105459"/>
-                  </a:lnTo>
-                  <a:lnTo>
-                    <a:pt x="143245" y="70841"/>
-                  </a:lnTo>
-                  <a:lnTo>
-                    <a:pt x="71622" y="35690"/>
+                    <a:pt x="6913622" y="2146780"/>
+                  </a:lnTo>
+                  <a:lnTo>
+                    <a:pt x="6843075" y="2141865"/>
+                  </a:lnTo>
+                  <a:lnTo>
+                    <a:pt x="6772528" y="2136477"/>
+                  </a:lnTo>
+                  <a:lnTo>
+                    <a:pt x="6701981" y="2130572"/>
+                  </a:lnTo>
+                  <a:lnTo>
+                    <a:pt x="6631434" y="2124098"/>
+                  </a:lnTo>
+                  <a:lnTo>
+                    <a:pt x="6560887" y="2117001"/>
+                  </a:lnTo>
+                  <a:lnTo>
+                    <a:pt x="6490339" y="2109222"/>
+                  </a:lnTo>
+                  <a:lnTo>
+                    <a:pt x="6419792" y="2100695"/>
+                  </a:lnTo>
+                  <a:lnTo>
+                    <a:pt x="6349245" y="2091348"/>
+                  </a:lnTo>
+                  <a:lnTo>
+                    <a:pt x="6278698" y="2081101"/>
+                  </a:lnTo>
+                  <a:lnTo>
+                    <a:pt x="6208151" y="2069869"/>
+                  </a:lnTo>
+                  <a:lnTo>
+                    <a:pt x="6137604" y="2057556"/>
+                  </a:lnTo>
+                  <a:lnTo>
+                    <a:pt x="6067056" y="2044060"/>
+                  </a:lnTo>
+                  <a:lnTo>
+                    <a:pt x="5996509" y="2029265"/>
+                  </a:lnTo>
+                  <a:lnTo>
+                    <a:pt x="5925962" y="2013047"/>
+                  </a:lnTo>
+                  <a:lnTo>
+                    <a:pt x="5855415" y="1995269"/>
+                  </a:lnTo>
+                  <a:lnTo>
+                    <a:pt x="5784868" y="1975781"/>
+                  </a:lnTo>
+                  <a:lnTo>
+                    <a:pt x="5714320" y="1954418"/>
+                  </a:lnTo>
+                  <a:lnTo>
+                    <a:pt x="5643773" y="1931001"/>
+                  </a:lnTo>
+                  <a:lnTo>
+                    <a:pt x="5573226" y="1905331"/>
+                  </a:lnTo>
+                  <a:lnTo>
+                    <a:pt x="5502679" y="1877193"/>
+                  </a:lnTo>
+                  <a:lnTo>
+                    <a:pt x="5432132" y="1846348"/>
+                  </a:lnTo>
+                  <a:lnTo>
+                    <a:pt x="5361585" y="1812536"/>
+                  </a:lnTo>
+                  <a:lnTo>
+                    <a:pt x="5291037" y="1775471"/>
+                  </a:lnTo>
+                  <a:lnTo>
+                    <a:pt x="5220490" y="1734842"/>
+                  </a:lnTo>
+                  <a:lnTo>
+                    <a:pt x="5149943" y="1690305"/>
+                  </a:lnTo>
+                  <a:lnTo>
+                    <a:pt x="5079396" y="1641484"/>
+                  </a:lnTo>
+                  <a:lnTo>
+                    <a:pt x="5008849" y="1587967"/>
+                  </a:lnTo>
+                  <a:lnTo>
+                    <a:pt x="4938302" y="1529302"/>
+                  </a:lnTo>
+                  <a:lnTo>
+                    <a:pt x="4867754" y="1464995"/>
+                  </a:lnTo>
+                  <a:lnTo>
+                    <a:pt x="4797207" y="1419348"/>
+                  </a:lnTo>
+                  <a:lnTo>
+                    <a:pt x="4726660" y="1407375"/>
+                  </a:lnTo>
+                  <a:lnTo>
+                    <a:pt x="4656113" y="1395217"/>
+                  </a:lnTo>
+                  <a:lnTo>
+                    <a:pt x="4585566" y="1382873"/>
+                  </a:lnTo>
+                  <a:lnTo>
+                    <a:pt x="4515019" y="1370339"/>
+                  </a:lnTo>
+                  <a:lnTo>
+                    <a:pt x="4444471" y="1357612"/>
+                  </a:lnTo>
+                  <a:lnTo>
+                    <a:pt x="4373924" y="1344689"/>
+                  </a:lnTo>
+                  <a:lnTo>
+                    <a:pt x="4303377" y="1331567"/>
+                  </a:lnTo>
+                  <a:lnTo>
+                    <a:pt x="4232830" y="1318244"/>
+                  </a:lnTo>
+                  <a:lnTo>
+                    <a:pt x="4162283" y="1304716"/>
+                  </a:lnTo>
+                  <a:lnTo>
+                    <a:pt x="4091736" y="1290979"/>
+                  </a:lnTo>
+                  <a:lnTo>
+                    <a:pt x="4021188" y="1277032"/>
+                  </a:lnTo>
+                  <a:lnTo>
+                    <a:pt x="3950641" y="1262870"/>
+                  </a:lnTo>
+                  <a:lnTo>
+                    <a:pt x="3880094" y="1248490"/>
+                  </a:lnTo>
+                  <a:lnTo>
+                    <a:pt x="3809547" y="1233889"/>
+                  </a:lnTo>
+                  <a:lnTo>
+                    <a:pt x="3739000" y="1219063"/>
+                  </a:lnTo>
+                  <a:lnTo>
+                    <a:pt x="3668452" y="1204010"/>
+                  </a:lnTo>
+                  <a:lnTo>
+                    <a:pt x="3597905" y="1188724"/>
+                  </a:lnTo>
+                  <a:lnTo>
+                    <a:pt x="3527358" y="1173204"/>
+                  </a:lnTo>
+                  <a:lnTo>
+                    <a:pt x="3456811" y="1157445"/>
+                  </a:lnTo>
+                  <a:lnTo>
+                    <a:pt x="3386264" y="1141444"/>
+                  </a:lnTo>
+                  <a:lnTo>
+                    <a:pt x="3315717" y="1125197"/>
+                  </a:lnTo>
+                  <a:lnTo>
+                    <a:pt x="3245169" y="1108700"/>
+                  </a:lnTo>
+                  <a:lnTo>
+                    <a:pt x="3174622" y="1091949"/>
+                  </a:lnTo>
+                  <a:lnTo>
+                    <a:pt x="3104075" y="1074940"/>
+                  </a:lnTo>
+                  <a:lnTo>
+                    <a:pt x="3033528" y="1057670"/>
+                  </a:lnTo>
+                  <a:lnTo>
+                    <a:pt x="2962981" y="1040134"/>
+                  </a:lnTo>
+                  <a:lnTo>
+                    <a:pt x="2892434" y="1022329"/>
+                  </a:lnTo>
+                  <a:lnTo>
+                    <a:pt x="2821886" y="1004249"/>
+                  </a:lnTo>
+                  <a:lnTo>
+                    <a:pt x="2751339" y="985892"/>
+                  </a:lnTo>
+                  <a:lnTo>
+                    <a:pt x="2680792" y="967252"/>
+                  </a:lnTo>
+                  <a:lnTo>
+                    <a:pt x="2610245" y="948326"/>
+                  </a:lnTo>
+                  <a:lnTo>
+                    <a:pt x="2539698" y="929109"/>
+                  </a:lnTo>
+                  <a:lnTo>
+                    <a:pt x="2469151" y="909596"/>
+                  </a:lnTo>
+                  <a:lnTo>
+                    <a:pt x="2398603" y="889783"/>
+                  </a:lnTo>
+                  <a:lnTo>
+                    <a:pt x="2328056" y="869665"/>
+                  </a:lnTo>
+                  <a:lnTo>
+                    <a:pt x="2257509" y="849238"/>
+                  </a:lnTo>
+                  <a:lnTo>
+                    <a:pt x="2186962" y="828497"/>
+                  </a:lnTo>
+                  <a:lnTo>
+                    <a:pt x="2116415" y="807436"/>
+                  </a:lnTo>
+                  <a:lnTo>
+                    <a:pt x="2045868" y="786052"/>
+                  </a:lnTo>
+                  <a:lnTo>
+                    <a:pt x="1975320" y="764339"/>
+                  </a:lnTo>
+                  <a:lnTo>
+                    <a:pt x="1904773" y="742292"/>
+                  </a:lnTo>
+                  <a:lnTo>
+                    <a:pt x="1834226" y="719906"/>
+                  </a:lnTo>
+                  <a:lnTo>
+                    <a:pt x="1763679" y="697175"/>
+                  </a:lnTo>
+                  <a:lnTo>
+                    <a:pt x="1693132" y="674096"/>
+                  </a:lnTo>
+                  <a:lnTo>
+                    <a:pt x="1622584" y="650661"/>
+                  </a:lnTo>
+                  <a:lnTo>
+                    <a:pt x="1552037" y="626865"/>
+                  </a:lnTo>
+                  <a:lnTo>
+                    <a:pt x="1481490" y="602704"/>
+                  </a:lnTo>
+                  <a:lnTo>
+                    <a:pt x="1410943" y="578171"/>
+                  </a:lnTo>
+                  <a:lnTo>
+                    <a:pt x="1340396" y="553261"/>
+                  </a:lnTo>
+                  <a:lnTo>
+                    <a:pt x="1269849" y="527968"/>
+                  </a:lnTo>
+                  <a:lnTo>
+                    <a:pt x="1199301" y="502285"/>
+                  </a:lnTo>
+                  <a:lnTo>
+                    <a:pt x="1128754" y="476208"/>
+                  </a:lnTo>
+                  <a:lnTo>
+                    <a:pt x="1058207" y="449730"/>
+                  </a:lnTo>
+                  <a:lnTo>
+                    <a:pt x="987660" y="422844"/>
+                  </a:lnTo>
+                  <a:lnTo>
+                    <a:pt x="917113" y="395545"/>
+                  </a:lnTo>
+                  <a:lnTo>
+                    <a:pt x="846566" y="367826"/>
+                  </a:lnTo>
+                  <a:lnTo>
+                    <a:pt x="776018" y="339681"/>
+                  </a:lnTo>
+                  <a:lnTo>
+                    <a:pt x="705471" y="311103"/>
+                  </a:lnTo>
+                  <a:lnTo>
+                    <a:pt x="634924" y="282086"/>
+                  </a:lnTo>
+                  <a:lnTo>
+                    <a:pt x="564377" y="252622"/>
+                  </a:lnTo>
+                  <a:lnTo>
+                    <a:pt x="493830" y="222705"/>
+                  </a:lnTo>
+                  <a:lnTo>
+                    <a:pt x="423283" y="192328"/>
+                  </a:lnTo>
+                  <a:lnTo>
+                    <a:pt x="352735" y="161484"/>
+                  </a:lnTo>
+                  <a:lnTo>
+                    <a:pt x="282188" y="130165"/>
+                  </a:lnTo>
+                  <a:lnTo>
+                    <a:pt x="211641" y="98365"/>
+                  </a:lnTo>
+                  <a:lnTo>
+                    <a:pt x="141094" y="66076"/>
+                  </a:lnTo>
+                  <a:lnTo>
+                    <a:pt x="70547" y="33290"/>
                   </a:lnTo>
                   <a:lnTo>
                     <a:pt x="0" y="0"/>
@@ -3974,189 +3974,189 @@
           </p:nvSpPr>
           <p:spPr>
             <a:xfrm>
-              <a:off x="4152792" y="2073503"/>
-              <a:ext cx="4109887" cy="3322535"/>
+              <a:off x="4200842" y="2209169"/>
+              <a:ext cx="4048180" cy="3099041"/>
             </a:xfrm>
             <a:custGeom>
               <a:avLst/>
               <a:pathLst>
-                <a:path w="4109887" h="3322535">
+                <a:path w="4048180" h="3099041">
                   <a:moveTo>
                     <a:pt x="0" y="0"/>
                   </a:moveTo>
                   <a:lnTo>
-                    <a:pt x="27403" y="71810"/>
-                  </a:lnTo>
-                  <a:lnTo>
-                    <a:pt x="99025" y="249712"/>
-                  </a:lnTo>
-                  <a:lnTo>
-                    <a:pt x="170648" y="418337"/>
-                  </a:lnTo>
-                  <a:lnTo>
-                    <a:pt x="242270" y="578171"/>
-                  </a:lnTo>
-                  <a:lnTo>
-                    <a:pt x="313893" y="729670"/>
-                  </a:lnTo>
-                  <a:lnTo>
-                    <a:pt x="385515" y="873270"/>
-                  </a:lnTo>
-                  <a:lnTo>
-                    <a:pt x="457138" y="1009383"/>
-                  </a:lnTo>
-                  <a:lnTo>
-                    <a:pt x="528760" y="1138399"/>
-                  </a:lnTo>
-                  <a:lnTo>
-                    <a:pt x="600383" y="1260688"/>
-                  </a:lnTo>
-                  <a:lnTo>
-                    <a:pt x="672005" y="1376600"/>
-                  </a:lnTo>
-                  <a:lnTo>
-                    <a:pt x="743628" y="1486469"/>
-                  </a:lnTo>
-                  <a:lnTo>
-                    <a:pt x="815251" y="1590609"/>
-                  </a:lnTo>
-                  <a:lnTo>
-                    <a:pt x="886873" y="1689319"/>
-                  </a:lnTo>
-                  <a:lnTo>
-                    <a:pt x="958496" y="1782882"/>
-                  </a:lnTo>
-                  <a:lnTo>
-                    <a:pt x="1030118" y="1871567"/>
-                  </a:lnTo>
-                  <a:lnTo>
-                    <a:pt x="1101741" y="1955627"/>
-                  </a:lnTo>
-                  <a:lnTo>
-                    <a:pt x="1173363" y="2035305"/>
-                  </a:lnTo>
-                  <a:lnTo>
-                    <a:pt x="1244986" y="2110828"/>
-                  </a:lnTo>
-                  <a:lnTo>
-                    <a:pt x="1316608" y="2182413"/>
-                  </a:lnTo>
-                  <a:lnTo>
-                    <a:pt x="1388231" y="2250266"/>
-                  </a:lnTo>
-                  <a:lnTo>
-                    <a:pt x="1459853" y="2314581"/>
-                  </a:lnTo>
-                  <a:lnTo>
-                    <a:pt x="1531476" y="2375542"/>
-                  </a:lnTo>
-                  <a:lnTo>
-                    <a:pt x="1603098" y="2433325"/>
-                  </a:lnTo>
-                  <a:lnTo>
-                    <a:pt x="1674721" y="2488095"/>
-                  </a:lnTo>
-                  <a:lnTo>
-                    <a:pt x="1746343" y="2540009"/>
-                  </a:lnTo>
-                  <a:lnTo>
-                    <a:pt x="1817966" y="2589217"/>
-                  </a:lnTo>
-                  <a:lnTo>
-                    <a:pt x="1889588" y="2635858"/>
-                  </a:lnTo>
-                  <a:lnTo>
-                    <a:pt x="1961211" y="2680068"/>
-                  </a:lnTo>
-                  <a:lnTo>
-                    <a:pt x="2032833" y="2721973"/>
-                  </a:lnTo>
-                  <a:lnTo>
-                    <a:pt x="2104456" y="2761692"/>
-                  </a:lnTo>
-                  <a:lnTo>
-                    <a:pt x="2176079" y="2799341"/>
-                  </a:lnTo>
-                  <a:lnTo>
-                    <a:pt x="2247701" y="2835026"/>
-                  </a:lnTo>
-                  <a:lnTo>
-                    <a:pt x="2319324" y="2868851"/>
-                  </a:lnTo>
-                  <a:lnTo>
-                    <a:pt x="2390946" y="2900912"/>
-                  </a:lnTo>
-                  <a:lnTo>
-                    <a:pt x="2462569" y="2931302"/>
-                  </a:lnTo>
-                  <a:lnTo>
-                    <a:pt x="2534191" y="2960107"/>
-                  </a:lnTo>
-                  <a:lnTo>
-                    <a:pt x="2605814" y="2987410"/>
-                  </a:lnTo>
-                  <a:lnTo>
-                    <a:pt x="2677436" y="3013289"/>
-                  </a:lnTo>
-                  <a:lnTo>
-                    <a:pt x="2749059" y="3037820"/>
-                  </a:lnTo>
-                  <a:lnTo>
-                    <a:pt x="2820681" y="3061071"/>
-                  </a:lnTo>
-                  <a:lnTo>
-                    <a:pt x="2892304" y="3083109"/>
-                  </a:lnTo>
-                  <a:lnTo>
-                    <a:pt x="2963926" y="3103999"/>
-                  </a:lnTo>
-                  <a:lnTo>
-                    <a:pt x="3035549" y="3123799"/>
-                  </a:lnTo>
-                  <a:lnTo>
-                    <a:pt x="3107171" y="3142567"/>
-                  </a:lnTo>
-                  <a:lnTo>
-                    <a:pt x="3178794" y="3160357"/>
-                  </a:lnTo>
-                  <a:lnTo>
-                    <a:pt x="3250416" y="3177219"/>
-                  </a:lnTo>
-                  <a:lnTo>
-                    <a:pt x="3322039" y="3193201"/>
-                  </a:lnTo>
-                  <a:lnTo>
-                    <a:pt x="3393661" y="3208351"/>
-                  </a:lnTo>
-                  <a:lnTo>
-                    <a:pt x="3465284" y="3222710"/>
-                  </a:lnTo>
-                  <a:lnTo>
-                    <a:pt x="3536907" y="3236321"/>
-                  </a:lnTo>
-                  <a:lnTo>
-                    <a:pt x="3608529" y="3249222"/>
-                  </a:lnTo>
-                  <a:lnTo>
-                    <a:pt x="3680152" y="3261450"/>
-                  </a:lnTo>
-                  <a:lnTo>
-                    <a:pt x="3751774" y="3273041"/>
-                  </a:lnTo>
-                  <a:lnTo>
-                    <a:pt x="3823397" y="3284027"/>
-                  </a:lnTo>
-                  <a:lnTo>
-                    <a:pt x="3895019" y="3294441"/>
-                  </a:lnTo>
-                  <a:lnTo>
-                    <a:pt x="3966642" y="3304311"/>
-                  </a:lnTo>
-                  <a:lnTo>
-                    <a:pt x="4038264" y="3313667"/>
-                  </a:lnTo>
-                  <a:lnTo>
-                    <a:pt x="4109887" y="3322535"/>
+                    <a:pt x="26991" y="66980"/>
+                  </a:lnTo>
+                  <a:lnTo>
+                    <a:pt x="97538" y="232915"/>
+                  </a:lnTo>
+                  <a:lnTo>
+                    <a:pt x="168086" y="390197"/>
+                  </a:lnTo>
+                  <a:lnTo>
+                    <a:pt x="238633" y="539279"/>
+                  </a:lnTo>
+                  <a:lnTo>
+                    <a:pt x="309180" y="680588"/>
+                  </a:lnTo>
+                  <a:lnTo>
+                    <a:pt x="379727" y="814529"/>
+                  </a:lnTo>
+                  <a:lnTo>
+                    <a:pt x="450274" y="941486"/>
+                  </a:lnTo>
+                  <a:lnTo>
+                    <a:pt x="520822" y="1061823"/>
+                  </a:lnTo>
+                  <a:lnTo>
+                    <a:pt x="591369" y="1175886"/>
+                  </a:lnTo>
+                  <a:lnTo>
+                    <a:pt x="661916" y="1284001"/>
+                  </a:lnTo>
+                  <a:lnTo>
+                    <a:pt x="732463" y="1386479"/>
+                  </a:lnTo>
+                  <a:lnTo>
+                    <a:pt x="803010" y="1483614"/>
+                  </a:lnTo>
+                  <a:lnTo>
+                    <a:pt x="873557" y="1575684"/>
+                  </a:lnTo>
+                  <a:lnTo>
+                    <a:pt x="944105" y="1662954"/>
+                  </a:lnTo>
+                  <a:lnTo>
+                    <a:pt x="1014652" y="1745673"/>
+                  </a:lnTo>
+                  <a:lnTo>
+                    <a:pt x="1085199" y="1824079"/>
+                  </a:lnTo>
+                  <a:lnTo>
+                    <a:pt x="1155746" y="1898397"/>
+                  </a:lnTo>
+                  <a:lnTo>
+                    <a:pt x="1226293" y="1968840"/>
+                  </a:lnTo>
+                  <a:lnTo>
+                    <a:pt x="1296840" y="2035610"/>
+                  </a:lnTo>
+                  <a:lnTo>
+                    <a:pt x="1367388" y="2098899"/>
+                  </a:lnTo>
+                  <a:lnTo>
+                    <a:pt x="1437935" y="2158887"/>
+                  </a:lnTo>
+                  <a:lnTo>
+                    <a:pt x="1508482" y="2215748"/>
+                  </a:lnTo>
+                  <a:lnTo>
+                    <a:pt x="1579029" y="2269644"/>
+                  </a:lnTo>
+                  <a:lnTo>
+                    <a:pt x="1649576" y="2320730"/>
+                  </a:lnTo>
+                  <a:lnTo>
+                    <a:pt x="1720123" y="2369152"/>
+                  </a:lnTo>
+                  <a:lnTo>
+                    <a:pt x="1790671" y="2415050"/>
+                  </a:lnTo>
+                  <a:lnTo>
+                    <a:pt x="1861218" y="2458554"/>
+                  </a:lnTo>
+                  <a:lnTo>
+                    <a:pt x="1931765" y="2499790"/>
+                  </a:lnTo>
+                  <a:lnTo>
+                    <a:pt x="2002312" y="2538875"/>
+                  </a:lnTo>
+                  <a:lnTo>
+                    <a:pt x="2072859" y="2575923"/>
+                  </a:lnTo>
+                  <a:lnTo>
+                    <a:pt x="2143406" y="2611039"/>
+                  </a:lnTo>
+                  <a:lnTo>
+                    <a:pt x="2213954" y="2644324"/>
+                  </a:lnTo>
+                  <a:lnTo>
+                    <a:pt x="2284501" y="2675874"/>
+                  </a:lnTo>
+                  <a:lnTo>
+                    <a:pt x="2355048" y="2705779"/>
+                  </a:lnTo>
+                  <a:lnTo>
+                    <a:pt x="2425595" y="2734124"/>
+                  </a:lnTo>
+                  <a:lnTo>
+                    <a:pt x="2496142" y="2760991"/>
+                  </a:lnTo>
+                  <a:lnTo>
+                    <a:pt x="2566690" y="2786458"/>
+                  </a:lnTo>
+                  <a:lnTo>
+                    <a:pt x="2637237" y="2810597"/>
+                  </a:lnTo>
+                  <a:lnTo>
+                    <a:pt x="2707784" y="2833477"/>
+                  </a:lnTo>
+                  <a:lnTo>
+                    <a:pt x="2778331" y="2855164"/>
+                  </a:lnTo>
+                  <a:lnTo>
+                    <a:pt x="2848878" y="2875720"/>
+                  </a:lnTo>
+                  <a:lnTo>
+                    <a:pt x="2919425" y="2895204"/>
+                  </a:lnTo>
+                  <a:lnTo>
+                    <a:pt x="2989973" y="2913673"/>
+                  </a:lnTo>
+                  <a:lnTo>
+                    <a:pt x="3060520" y="2931178"/>
+                  </a:lnTo>
+                  <a:lnTo>
+                    <a:pt x="3131067" y="2947771"/>
+                  </a:lnTo>
+                  <a:lnTo>
+                    <a:pt x="3201614" y="2963499"/>
+                  </a:lnTo>
+                  <a:lnTo>
+                    <a:pt x="3272161" y="2978406"/>
+                  </a:lnTo>
+                  <a:lnTo>
+                    <a:pt x="3342708" y="2992537"/>
+                  </a:lnTo>
+                  <a:lnTo>
+                    <a:pt x="3413256" y="3005930"/>
+                  </a:lnTo>
+                  <a:lnTo>
+                    <a:pt x="3483803" y="3018625"/>
+                  </a:lnTo>
+                  <a:lnTo>
+                    <a:pt x="3554350" y="3030658"/>
+                  </a:lnTo>
+                  <a:lnTo>
+                    <a:pt x="3624897" y="3042064"/>
+                  </a:lnTo>
+                  <a:lnTo>
+                    <a:pt x="3695444" y="3052875"/>
+                  </a:lnTo>
+                  <a:lnTo>
+                    <a:pt x="3765991" y="3063123"/>
+                  </a:lnTo>
+                  <a:lnTo>
+                    <a:pt x="3836539" y="3072836"/>
+                  </a:lnTo>
+                  <a:lnTo>
+                    <a:pt x="3907086" y="3082042"/>
+                  </a:lnTo>
+                  <a:lnTo>
+                    <a:pt x="3977633" y="3090769"/>
+                  </a:lnTo>
+                  <a:lnTo>
+                    <a:pt x="4048180" y="3099041"/>
                   </a:lnTo>
                 </a:path>
               </a:pathLst>
@@ -4185,21 +4185,21 @@
           </p:nvSpPr>
           <p:spPr>
             <a:xfrm>
-              <a:off x="817517" y="4727786"/>
-              <a:ext cx="7799693" cy="0"/>
+              <a:off x="915645" y="4684908"/>
+              <a:ext cx="7682587" cy="0"/>
             </a:xfrm>
             <a:custGeom>
               <a:avLst/>
               <a:pathLst>
-                <a:path w="7799693" h="0">
+                <a:path w="7682587" h="0">
                   <a:moveTo>
                     <a:pt x="0" y="0"/>
                   </a:moveTo>
                   <a:lnTo>
-                    <a:pt x="7799693" y="0"/>
-                  </a:lnTo>
-                  <a:lnTo>
-                    <a:pt x="7799693" y="0"/>
+                    <a:pt x="7682587" y="0"/>
+                  </a:lnTo>
+                  <a:lnTo>
+                    <a:pt x="7682587" y="0"/>
                   </a:lnTo>
                 </a:path>
               </a:pathLst>
@@ -4228,15 +4228,15 @@
           </p:nvSpPr>
           <p:spPr>
             <a:xfrm>
-              <a:off x="6071765" y="2073503"/>
-              <a:ext cx="0" cy="3649639"/>
+              <a:off x="6091004" y="2209169"/>
+              <a:ext cx="0" cy="3404141"/>
             </a:xfrm>
             <a:custGeom>
               <a:avLst/>
               <a:pathLst>
-                <a:path w="0" h="3649639">
+                <a:path w="0" h="3404141">
                   <a:moveTo>
-                    <a:pt x="0" y="3649639"/>
+                    <a:pt x="0" y="3404141"/>
                   </a:moveTo>
                   <a:lnTo>
                     <a:pt x="0" y="0"/>
@@ -4271,15 +4271,15 @@
           </p:nvSpPr>
           <p:spPr>
             <a:xfrm>
-              <a:off x="5051213" y="2073503"/>
-              <a:ext cx="0" cy="3649639"/>
+              <a:off x="5085775" y="2209169"/>
+              <a:ext cx="0" cy="3404141"/>
             </a:xfrm>
             <a:custGeom>
               <a:avLst/>
               <a:pathLst>
-                <a:path w="0" h="3649639">
+                <a:path w="0" h="3404141">
                   <a:moveTo>
-                    <a:pt x="0" y="3649639"/>
+                    <a:pt x="0" y="3404141"/>
                   </a:moveTo>
                   <a:lnTo>
                     <a:pt x="0" y="0"/>
@@ -4314,15 +4314,15 @@
           </p:nvSpPr>
           <p:spPr>
             <a:xfrm>
-              <a:off x="6733531" y="2073503"/>
-              <a:ext cx="0" cy="3649639"/>
+              <a:off x="6742834" y="2209169"/>
+              <a:ext cx="0" cy="3404141"/>
             </a:xfrm>
             <a:custGeom>
               <a:avLst/>
               <a:pathLst>
-                <a:path w="0" h="3649639">
+                <a:path w="0" h="3404141">
                   <a:moveTo>
-                    <a:pt x="0" y="3649639"/>
+                    <a:pt x="0" y="3404141"/>
                   </a:moveTo>
                   <a:lnTo>
                     <a:pt x="0" y="0"/>
@@ -4357,8 +4357,8 @@
           </p:nvSpPr>
           <p:spPr>
             <a:xfrm>
-              <a:off x="692708" y="5517199"/>
-              <a:ext cx="62179" cy="80101"/>
+              <a:off x="756929" y="5407599"/>
+              <a:ext cx="79004" cy="101955"/>
             </a:xfrm>
             <a:prstGeom prst="rect">
               <a:avLst/>
@@ -4371,7 +4371,7 @@
             <a:p>
               <a:pPr algn="l" marL="0" marR="0" indent="0">
                 <a:lnSpc>
-                  <a:spcPts val="880"/>
+                  <a:spcPts val="1120"/>
                 </a:lnSpc>
                 <a:spcBef>
                   <a:spcPts val="0"/>
@@ -4381,7 +4381,7 @@
                 </a:spcAft>
               </a:pPr>
               <a:r>
-                <a:rPr sz="880">
+                <a:rPr sz="1120">
                   <a:solidFill>
                     <a:srgbClr val="4D4D4D">
                       <a:alpha val="100000"/>
@@ -4403,8 +4403,8 @@
           </p:nvSpPr>
           <p:spPr>
             <a:xfrm>
-              <a:off x="692708" y="4687735"/>
-              <a:ext cx="62179" cy="80101"/>
+              <a:off x="756929" y="4633931"/>
+              <a:ext cx="79004" cy="101955"/>
             </a:xfrm>
             <a:prstGeom prst="rect">
               <a:avLst/>
@@ -4417,7 +4417,7 @@
             <a:p>
               <a:pPr algn="l" marL="0" marR="0" indent="0">
                 <a:lnSpc>
-                  <a:spcPts val="880"/>
+                  <a:spcPts val="1120"/>
                 </a:lnSpc>
                 <a:spcBef>
                   <a:spcPts val="0"/>
@@ -4427,7 +4427,7 @@
                 </a:spcAft>
               </a:pPr>
               <a:r>
-                <a:rPr sz="880">
+                <a:rPr sz="1120">
                   <a:solidFill>
                     <a:srgbClr val="4D4D4D">
                       <a:alpha val="100000"/>
@@ -4449,8 +4449,8 @@
           </p:nvSpPr>
           <p:spPr>
             <a:xfrm>
-              <a:off x="692708" y="3858272"/>
-              <a:ext cx="62179" cy="80101"/>
+              <a:off x="756929" y="3860262"/>
+              <a:ext cx="79004" cy="101955"/>
             </a:xfrm>
             <a:prstGeom prst="rect">
               <a:avLst/>
@@ -4463,7 +4463,7 @@
             <a:p>
               <a:pPr algn="l" marL="0" marR="0" indent="0">
                 <a:lnSpc>
-                  <a:spcPts val="880"/>
+                  <a:spcPts val="1120"/>
                 </a:lnSpc>
                 <a:spcBef>
                   <a:spcPts val="0"/>
@@ -4473,7 +4473,7 @@
                 </a:spcAft>
               </a:pPr>
               <a:r>
-                <a:rPr sz="880">
+                <a:rPr sz="1120">
                   <a:solidFill>
                     <a:srgbClr val="4D4D4D">
                       <a:alpha val="100000"/>
@@ -4495,8 +4495,8 @@
           </p:nvSpPr>
           <p:spPr>
             <a:xfrm>
-              <a:off x="692708" y="3028808"/>
-              <a:ext cx="62179" cy="80101"/>
+              <a:off x="756929" y="3086593"/>
+              <a:ext cx="79004" cy="101955"/>
             </a:xfrm>
             <a:prstGeom prst="rect">
               <a:avLst/>
@@ -4509,7 +4509,7 @@
             <a:p>
               <a:pPr algn="l" marL="0" marR="0" indent="0">
                 <a:lnSpc>
-                  <a:spcPts val="880"/>
+                  <a:spcPts val="1120"/>
                 </a:lnSpc>
                 <a:spcBef>
                   <a:spcPts val="0"/>
@@ -4519,7 +4519,7 @@
                 </a:spcAft>
               </a:pPr>
               <a:r>
-                <a:rPr sz="880">
+                <a:rPr sz="1120">
                   <a:solidFill>
                     <a:srgbClr val="4D4D4D">
                       <a:alpha val="100000"/>
@@ -4541,8 +4541,8 @@
           </p:nvSpPr>
           <p:spPr>
             <a:xfrm>
-              <a:off x="692708" y="2199345"/>
-              <a:ext cx="62179" cy="80101"/>
+              <a:off x="756929" y="2312925"/>
+              <a:ext cx="79004" cy="101955"/>
             </a:xfrm>
             <a:prstGeom prst="rect">
               <a:avLst/>
@@ -4555,7 +4555,7 @@
             <a:p>
               <a:pPr algn="l" marL="0" marR="0" indent="0">
                 <a:lnSpc>
-                  <a:spcPts val="880"/>
+                  <a:spcPts val="1120"/>
                 </a:lnSpc>
                 <a:spcBef>
                   <a:spcPts val="0"/>
@@ -4565,7 +4565,7 @@
                 </a:spcAft>
               </a:pPr>
               <a:r>
-                <a:rPr sz="880">
+                <a:rPr sz="1120">
                   <a:solidFill>
                     <a:srgbClr val="4D4D4D">
                       <a:alpha val="100000"/>
@@ -4587,8 +4587,8 @@
           </p:nvSpPr>
           <p:spPr>
             <a:xfrm>
-              <a:off x="2331636" y="5785772"/>
-              <a:ext cx="161574" cy="80101"/>
+              <a:off x="2383963" y="5693022"/>
+              <a:ext cx="205282" cy="101955"/>
             </a:xfrm>
             <a:prstGeom prst="rect">
               <a:avLst/>
@@ -4601,7 +4601,7 @@
             <a:p>
               <a:pPr algn="l" marL="0" marR="0" indent="0">
                 <a:lnSpc>
-                  <a:spcPts val="880"/>
+                  <a:spcPts val="1120"/>
                 </a:lnSpc>
                 <a:spcBef>
                   <a:spcPts val="0"/>
@@ -4611,7 +4611,7 @@
                 </a:spcAft>
               </a:pPr>
               <a:r>
-                <a:rPr sz="880">
+                <a:rPr sz="1120">
                   <a:solidFill>
                     <a:srgbClr val="4D4D4D">
                       <a:alpha val="100000"/>
@@ -4633,8 +4633,8 @@
           </p:nvSpPr>
           <p:spPr>
             <a:xfrm>
-              <a:off x="4181509" y="5785772"/>
-              <a:ext cx="161574" cy="80101"/>
+              <a:off x="4206062" y="5693022"/>
+              <a:ext cx="205282" cy="101955"/>
             </a:xfrm>
             <a:prstGeom prst="rect">
               <a:avLst/>
@@ -4647,7 +4647,7 @@
             <a:p>
               <a:pPr algn="l" marL="0" marR="0" indent="0">
                 <a:lnSpc>
-                  <a:spcPts val="880"/>
+                  <a:spcPts val="1120"/>
                 </a:lnSpc>
                 <a:spcBef>
                   <a:spcPts val="0"/>
@@ -4657,7 +4657,7 @@
                 </a:spcAft>
               </a:pPr>
               <a:r>
-                <a:rPr sz="880">
+                <a:rPr sz="1120">
                   <a:solidFill>
                     <a:srgbClr val="4D4D4D">
                       <a:alpha val="100000"/>
@@ -4679,8 +4679,8 @@
           </p:nvSpPr>
           <p:spPr>
             <a:xfrm>
-              <a:off x="6081080" y="5785772"/>
-              <a:ext cx="62179" cy="80101"/>
+              <a:off x="6091300" y="5693022"/>
+              <a:ext cx="79004" cy="101955"/>
             </a:xfrm>
             <a:prstGeom prst="rect">
               <a:avLst/>
@@ -4693,7 +4693,7 @@
             <a:p>
               <a:pPr algn="l" marL="0" marR="0" indent="0">
                 <a:lnSpc>
-                  <a:spcPts val="880"/>
+                  <a:spcPts val="1120"/>
                 </a:lnSpc>
                 <a:spcBef>
                   <a:spcPts val="0"/>
@@ -4703,7 +4703,7 @@
                 </a:spcAft>
               </a:pPr>
               <a:r>
-                <a:rPr sz="880">
+                <a:rPr sz="1120">
                   <a:solidFill>
                     <a:srgbClr val="4D4D4D">
                       <a:alpha val="100000"/>
@@ -4725,8 +4725,8 @@
           </p:nvSpPr>
           <p:spPr>
             <a:xfrm>
-              <a:off x="7899863" y="5785772"/>
-              <a:ext cx="124358" cy="80101"/>
+              <a:off x="7873896" y="5693022"/>
+              <a:ext cx="158008" cy="101955"/>
             </a:xfrm>
             <a:prstGeom prst="rect">
               <a:avLst/>
@@ -4739,7 +4739,7 @@
             <a:p>
               <a:pPr algn="l" marL="0" marR="0" indent="0">
                 <a:lnSpc>
-                  <a:spcPts val="880"/>
+                  <a:spcPts val="1120"/>
                 </a:lnSpc>
                 <a:spcBef>
                   <a:spcPts val="0"/>
@@ -4749,7 +4749,7 @@
                 </a:spcAft>
               </a:pPr>
               <a:r>
-                <a:rPr sz="880">
+                <a:rPr sz="1120">
                   <a:solidFill>
                     <a:srgbClr val="4D4D4D">
                       <a:alpha val="100000"/>
@@ -4771,8 +4771,8 @@
           </p:nvSpPr>
           <p:spPr>
             <a:xfrm>
-              <a:off x="3832408" y="5925448"/>
-              <a:ext cx="1769912" cy="100218"/>
+              <a:off x="3630809" y="5870717"/>
+              <a:ext cx="2252258" cy="127558"/>
             </a:xfrm>
             <a:prstGeom prst="rect">
               <a:avLst/>
@@ -4785,7 +4785,7 @@
             <a:p>
               <a:pPr algn="l" marL="0" marR="0" indent="0">
                 <a:lnSpc>
-                  <a:spcPts val="1100"/>
+                  <a:spcPts val="1400"/>
                 </a:lnSpc>
                 <a:spcBef>
                   <a:spcPts val="0"/>
@@ -4795,7 +4795,7 @@
                 </a:spcAft>
               </a:pPr>
               <a:r>
-                <a:rPr sz="1100">
+                <a:rPr sz="1400">
                   <a:solidFill>
                     <a:srgbClr val="000000">
                       <a:alpha val="100000"/>
@@ -4817,8 +4817,8 @@
           </p:nvSpPr>
           <p:spPr>
             <a:xfrm rot="-5400000">
-              <a:off x="181100" y="3848213"/>
-              <a:ext cx="791596" cy="100218"/>
+              <a:off x="105758" y="3847460"/>
+              <a:ext cx="1007577" cy="127558"/>
             </a:xfrm>
             <a:prstGeom prst="rect">
               <a:avLst/>
@@ -4831,7 +4831,7 @@
             <a:p>
               <a:pPr algn="l" marL="0" marR="0" indent="0">
                 <a:lnSpc>
-                  <a:spcPts val="1100"/>
+                  <a:spcPts val="1400"/>
                 </a:lnSpc>
                 <a:spcBef>
                   <a:spcPts val="0"/>
@@ -4841,7 +4841,7 @@
                 </a:spcAft>
               </a:pPr>
               <a:r>
-                <a:rPr sz="1100">
+                <a:rPr sz="1400">
                   <a:solidFill>
                     <a:srgbClr val="000000">
                       <a:alpha val="100000"/>
@@ -4863,8 +4863,8 @@
           </p:nvSpPr>
           <p:spPr>
             <a:xfrm>
-              <a:off x="817517" y="1896563"/>
-              <a:ext cx="5228813" cy="82021"/>
+              <a:off x="915645" y="1977589"/>
+              <a:ext cx="6974403" cy="109362"/>
             </a:xfrm>
             <a:prstGeom prst="rect">
               <a:avLst/>
@@ -4877,7 +4877,7 @@
             <a:p>
               <a:pPr algn="l" marL="0" marR="0" indent="0">
                 <a:lnSpc>
-                  <a:spcPts val="900"/>
+                  <a:spcPts val="1200"/>
                 </a:lnSpc>
                 <a:spcBef>
                   <a:spcPts val="0"/>
@@ -4887,7 +4887,7 @@
                 </a:spcAft>
               </a:pPr>
               <a:r>
-                <a:rPr sz="900">
+                <a:rPr sz="1200">
                   <a:solidFill>
                     <a:srgbClr val="404040">
                       <a:alpha val="100000"/>
@@ -4909,8 +4909,8 @@
           </p:nvSpPr>
           <p:spPr>
             <a:xfrm>
-              <a:off x="817517" y="1669789"/>
-              <a:ext cx="2783799" cy="120152"/>
+              <a:off x="915645" y="1688767"/>
+              <a:ext cx="3544214" cy="153070"/>
             </a:xfrm>
             <a:prstGeom prst="rect">
               <a:avLst/>
@@ -4923,7 +4923,7 @@
             <a:p>
               <a:pPr algn="l" marL="0" marR="0" indent="0">
                 <a:lnSpc>
-                  <a:spcPts val="1320"/>
+                  <a:spcPts val="1680"/>
                 </a:lnSpc>
                 <a:spcBef>
                   <a:spcPts val="0"/>
@@ -4933,7 +4933,7 @@
                 </a:spcAft>
               </a:pPr>
               <a:r>
-                <a:rPr sz="1320">
+                <a:rPr sz="1680">
                   <a:solidFill>
                     <a:srgbClr val="000000">
                       <a:alpha val="100000"/>
